--- a/assets/module-2-device/mod-2-lecture-10-devices-2.pptx
+++ b/assets/module-2-device/mod-2-lecture-10-devices-2.pptx
@@ -5,29 +5,33 @@
     <p:sldMasterId id="2147483648" r:id="rId1"/>
   </p:sldMasterIdLst>
   <p:notesMasterIdLst>
-    <p:notesMasterId r:id="rId19"/>
+    <p:notesMasterId r:id="rId23"/>
   </p:notesMasterIdLst>
   <p:handoutMasterIdLst>
-    <p:handoutMasterId r:id="rId20"/>
+    <p:handoutMasterId r:id="rId24"/>
   </p:handoutMasterIdLst>
   <p:sldIdLst>
     <p:sldId id="794" r:id="rId2"/>
     <p:sldId id="415" r:id="rId3"/>
-    <p:sldId id="416" r:id="rId4"/>
-    <p:sldId id="337" r:id="rId5"/>
-    <p:sldId id="343" r:id="rId6"/>
-    <p:sldId id="334" r:id="rId7"/>
-    <p:sldId id="335" r:id="rId8"/>
-    <p:sldId id="344" r:id="rId9"/>
-    <p:sldId id="339" r:id="rId10"/>
-    <p:sldId id="340" r:id="rId11"/>
-    <p:sldId id="359" r:id="rId12"/>
-    <p:sldId id="361" r:id="rId13"/>
-    <p:sldId id="362" r:id="rId14"/>
-    <p:sldId id="366" r:id="rId15"/>
-    <p:sldId id="367" r:id="rId16"/>
-    <p:sldId id="377" r:id="rId17"/>
-    <p:sldId id="378" r:id="rId18"/>
+    <p:sldId id="796" r:id="rId4"/>
+    <p:sldId id="416" r:id="rId5"/>
+    <p:sldId id="337" r:id="rId6"/>
+    <p:sldId id="343" r:id="rId7"/>
+    <p:sldId id="334" r:id="rId8"/>
+    <p:sldId id="335" r:id="rId9"/>
+    <p:sldId id="344" r:id="rId10"/>
+    <p:sldId id="339" r:id="rId11"/>
+    <p:sldId id="361" r:id="rId12"/>
+    <p:sldId id="797" r:id="rId13"/>
+    <p:sldId id="798" r:id="rId14"/>
+    <p:sldId id="799" r:id="rId15"/>
+    <p:sldId id="340" r:id="rId16"/>
+    <p:sldId id="359" r:id="rId17"/>
+    <p:sldId id="366" r:id="rId18"/>
+    <p:sldId id="362" r:id="rId19"/>
+    <p:sldId id="367" r:id="rId20"/>
+    <p:sldId id="377" r:id="rId21"/>
+    <p:sldId id="378" r:id="rId22"/>
   </p:sldIdLst>
   <p:sldSz cx="12192000" cy="6858000"/>
   <p:notesSz cx="6858000" cy="9144000"/>
@@ -236,7 +240,7 @@
           <a:p>
             <a:fld id="{449E6E90-D057-4D0D-B992-091951C9891F}" type="datetimeFigureOut">
               <a:rPr lang="en-US" smtClean="0"/>
-              <a:t>9/23/2025</a:t>
+              <a:t>9/24/2025</a:t>
             </a:fld>
             <a:endParaRPr lang="en-US"/>
           </a:p>
@@ -401,7 +405,7 @@
           <a:p>
             <a:fld id="{70E82251-0160-4469-ACEE-303A5D4B0836}" type="datetimeFigureOut">
               <a:rPr lang="en-US" smtClean="0"/>
-              <a:t>9/23/2025</a:t>
+              <a:t>9/24/2025</a:t>
             </a:fld>
             <a:endParaRPr lang="en-US"/>
           </a:p>
@@ -2222,287 +2226,10 @@
       </p:grpSpPr>
       <p:sp>
         <p:nvSpPr>
-          <p:cNvPr id="27651" name="Rectangle 3">
+          <p:cNvPr id="26626" name="Rectangle 2">
             <a:extLst>
               <a:ext uri="{FF2B5EF4-FFF2-40B4-BE49-F238E27FC236}">
-                <a16:creationId xmlns:a16="http://schemas.microsoft.com/office/drawing/2014/main" id="{59ADB478-D071-3E01-1AFE-A6C1A2D7E0FC}"/>
-              </a:ext>
-            </a:extLst>
-          </p:cNvPr>
-          <p:cNvSpPr>
-            <a:spLocks noChangeArrowheads="1"/>
-          </p:cNvSpPr>
-          <p:nvPr/>
-        </p:nvSpPr>
-        <p:spPr bwMode="auto">
-          <a:xfrm>
-            <a:off x="-1" y="0"/>
-            <a:ext cx="9314121" cy="609600"/>
-          </a:xfrm>
-          <a:prstGeom prst="rect">
-            <a:avLst/>
-          </a:prstGeom>
-          <a:noFill/>
-          <a:ln>
-            <a:noFill/>
-          </a:ln>
-          <a:extLst>
-            <a:ext uri="{909E8E84-426E-40DD-AFC4-6F175D3DCCD1}">
-              <a14:hiddenFill xmlns:a14="http://schemas.microsoft.com/office/drawing/2010/main">
-                <a:solidFill>
-                  <a:srgbClr val="FFFFFF"/>
-                </a:solidFill>
-              </a14:hiddenFill>
-            </a:ext>
-            <a:ext uri="{91240B29-F687-4F45-9708-019B960494DF}">
-              <a14:hiddenLine xmlns:a14="http://schemas.microsoft.com/office/drawing/2010/main" w="9525">
-                <a:solidFill>
-                  <a:srgbClr val="000000"/>
-                </a:solidFill>
-                <a:miter lim="800000"/>
-                <a:headEnd/>
-                <a:tailEnd/>
-              </a14:hiddenLine>
-            </a:ext>
-          </a:extLst>
-        </p:spPr>
-        <p:txBody>
-          <a:bodyPr anchor="ctr"/>
-          <a:lstStyle>
-            <a:lvl1pPr>
-              <a:spcBef>
-                <a:spcPct val="20000"/>
-              </a:spcBef>
-              <a:buChar char="•"/>
-              <a:defRPr sz="3200">
-                <a:solidFill>
-                  <a:schemeClr val="tx1"/>
-                </a:solidFill>
-                <a:latin typeface="Times New Roman" panose="02020603050405020304" pitchFamily="18" charset="0"/>
-              </a:defRPr>
-            </a:lvl1pPr>
-            <a:lvl2pPr marL="742950" indent="-285750">
-              <a:spcBef>
-                <a:spcPct val="20000"/>
-              </a:spcBef>
-              <a:buChar char="–"/>
-              <a:defRPr sz="2800">
-                <a:solidFill>
-                  <a:schemeClr val="tx1"/>
-                </a:solidFill>
-                <a:latin typeface="Times New Roman" panose="02020603050405020304" pitchFamily="18" charset="0"/>
-              </a:defRPr>
-            </a:lvl2pPr>
-            <a:lvl3pPr marL="1143000" indent="-228600">
-              <a:spcBef>
-                <a:spcPct val="20000"/>
-              </a:spcBef>
-              <a:buChar char="•"/>
-              <a:defRPr sz="2400">
-                <a:solidFill>
-                  <a:schemeClr val="tx1"/>
-                </a:solidFill>
-                <a:latin typeface="Times New Roman" panose="02020603050405020304" pitchFamily="18" charset="0"/>
-              </a:defRPr>
-            </a:lvl3pPr>
-            <a:lvl4pPr marL="1600200" indent="-228600">
-              <a:spcBef>
-                <a:spcPct val="20000"/>
-              </a:spcBef>
-              <a:buChar char="–"/>
-              <a:defRPr sz="2000">
-                <a:solidFill>
-                  <a:schemeClr val="tx1"/>
-                </a:solidFill>
-                <a:latin typeface="Times New Roman" panose="02020603050405020304" pitchFamily="18" charset="0"/>
-              </a:defRPr>
-            </a:lvl4pPr>
-            <a:lvl5pPr marL="2057400" indent="-228600">
-              <a:spcBef>
-                <a:spcPct val="20000"/>
-              </a:spcBef>
-              <a:buChar char="»"/>
-              <a:defRPr sz="2000">
-                <a:solidFill>
-                  <a:schemeClr val="tx1"/>
-                </a:solidFill>
-                <a:latin typeface="Times New Roman" panose="02020603050405020304" pitchFamily="18" charset="0"/>
-              </a:defRPr>
-            </a:lvl5pPr>
-            <a:lvl6pPr marL="2514600" indent="-228600" eaLnBrk="0" fontAlgn="base" hangingPunct="0">
-              <a:spcBef>
-                <a:spcPct val="20000"/>
-              </a:spcBef>
-              <a:spcAft>
-                <a:spcPct val="0"/>
-              </a:spcAft>
-              <a:buChar char="»"/>
-              <a:defRPr sz="2000">
-                <a:solidFill>
-                  <a:schemeClr val="tx1"/>
-                </a:solidFill>
-                <a:latin typeface="Times New Roman" panose="02020603050405020304" pitchFamily="18" charset="0"/>
-              </a:defRPr>
-            </a:lvl6pPr>
-            <a:lvl7pPr marL="2971800" indent="-228600" eaLnBrk="0" fontAlgn="base" hangingPunct="0">
-              <a:spcBef>
-                <a:spcPct val="20000"/>
-              </a:spcBef>
-              <a:spcAft>
-                <a:spcPct val="0"/>
-              </a:spcAft>
-              <a:buChar char="»"/>
-              <a:defRPr sz="2000">
-                <a:solidFill>
-                  <a:schemeClr val="tx1"/>
-                </a:solidFill>
-                <a:latin typeface="Times New Roman" panose="02020603050405020304" pitchFamily="18" charset="0"/>
-              </a:defRPr>
-            </a:lvl7pPr>
-            <a:lvl8pPr marL="3429000" indent="-228600" eaLnBrk="0" fontAlgn="base" hangingPunct="0">
-              <a:spcBef>
-                <a:spcPct val="20000"/>
-              </a:spcBef>
-              <a:spcAft>
-                <a:spcPct val="0"/>
-              </a:spcAft>
-              <a:buChar char="»"/>
-              <a:defRPr sz="2000">
-                <a:solidFill>
-                  <a:schemeClr val="tx1"/>
-                </a:solidFill>
-                <a:latin typeface="Times New Roman" panose="02020603050405020304" pitchFamily="18" charset="0"/>
-              </a:defRPr>
-            </a:lvl8pPr>
-            <a:lvl9pPr marL="3886200" indent="-228600" eaLnBrk="0" fontAlgn="base" hangingPunct="0">
-              <a:spcBef>
-                <a:spcPct val="20000"/>
-              </a:spcBef>
-              <a:spcAft>
-                <a:spcPct val="0"/>
-              </a:spcAft>
-              <a:buChar char="»"/>
-              <a:defRPr sz="2000">
-                <a:solidFill>
-                  <a:schemeClr val="tx1"/>
-                </a:solidFill>
-                <a:latin typeface="Times New Roman" panose="02020603050405020304" pitchFamily="18" charset="0"/>
-              </a:defRPr>
-            </a:lvl9pPr>
-          </a:lstStyle>
-          <a:p>
-            <a:pPr>
-              <a:spcBef>
-                <a:spcPct val="0"/>
-              </a:spcBef>
-              <a:buFontTx/>
-              <a:buNone/>
-            </a:pPr>
-            <a:r>
-              <a:rPr lang="en-US" altLang="en-US" dirty="0">
-                <a:solidFill>
-                  <a:srgbClr val="991B1E"/>
-                </a:solidFill>
-                <a:latin typeface="PT Sans" panose="020B0503020203020204" pitchFamily="34" charset="0"/>
-                <a:ea typeface="Source Sans Pro" panose="020B0503030403020204" pitchFamily="34" charset="0"/>
-                <a:cs typeface="Segoe UI" panose="020B0502040204020203" pitchFamily="34" charset="0"/>
-              </a:rPr>
-              <a:t>CMOS (Complementary MOS) Inverter</a:t>
-            </a:r>
-          </a:p>
-        </p:txBody>
-      </p:sp>
-      <p:pic>
-        <p:nvPicPr>
-          <p:cNvPr id="27652" name="Picture 5">
-            <a:extLst>
-              <a:ext uri="{FF2B5EF4-FFF2-40B4-BE49-F238E27FC236}">
-                <a16:creationId xmlns:a16="http://schemas.microsoft.com/office/drawing/2014/main" id="{2678F65C-C2BC-1220-4631-E31A2D6BBBB1}"/>
-              </a:ext>
-            </a:extLst>
-          </p:cNvPr>
-          <p:cNvPicPr>
-            <a:picLocks noChangeAspect="1" noChangeArrowheads="1"/>
-          </p:cNvPicPr>
-          <p:nvPr/>
-        </p:nvPicPr>
-        <p:blipFill>
-          <a:blip r:embed="rId2">
-            <a:extLst>
-              <a:ext uri="{28A0092B-C50C-407E-A947-70E740481C1C}">
-                <a14:useLocalDpi xmlns:a14="http://schemas.microsoft.com/office/drawing/2010/main" val="0"/>
-              </a:ext>
-            </a:extLst>
-          </a:blip>
-          <a:srcRect b="10323"/>
-          <a:stretch>
-            <a:fillRect/>
-          </a:stretch>
-        </p:blipFill>
-        <p:spPr bwMode="auto">
-          <a:xfrm>
-            <a:off x="3276600" y="971551"/>
-            <a:ext cx="5562600" cy="4278313"/>
-          </a:xfrm>
-          <a:prstGeom prst="rect">
-            <a:avLst/>
-          </a:prstGeom>
-          <a:noFill/>
-          <a:ln>
-            <a:noFill/>
-          </a:ln>
-          <a:extLst>
-            <a:ext uri="{909E8E84-426E-40DD-AFC4-6F175D3DCCD1}">
-              <a14:hiddenFill xmlns:a14="http://schemas.microsoft.com/office/drawing/2010/main">
-                <a:solidFill>
-                  <a:srgbClr val="FFFFFF"/>
-                </a:solidFill>
-              </a14:hiddenFill>
-            </a:ext>
-            <a:ext uri="{91240B29-F687-4F45-9708-019B960494DF}">
-              <a14:hiddenLine xmlns:a14="http://schemas.microsoft.com/office/drawing/2010/main" w="9525">
-                <a:solidFill>
-                  <a:srgbClr val="000000"/>
-                </a:solidFill>
-                <a:miter lim="800000"/>
-                <a:headEnd/>
-                <a:tailEnd/>
-              </a14:hiddenLine>
-            </a:ext>
-          </a:extLst>
-        </p:spPr>
-      </p:pic>
-    </p:spTree>
-  </p:cSld>
-  <p:clrMapOvr>
-    <a:masterClrMapping/>
-  </p:clrMapOvr>
-</p:sld>
-</file>
-
-<file path=ppt/slides/slide11.xml><?xml version="1.0" encoding="utf-8"?>
-<p:sld xmlns:a="http://schemas.openxmlformats.org/drawingml/2006/main" xmlns:r="http://schemas.openxmlformats.org/officeDocument/2006/relationships" xmlns:p="http://schemas.openxmlformats.org/presentationml/2006/main">
-  <p:cSld>
-    <p:spTree>
-      <p:nvGrpSpPr>
-        <p:cNvPr id="1" name=""/>
-        <p:cNvGrpSpPr/>
-        <p:nvPr/>
-      </p:nvGrpSpPr>
-      <p:grpSpPr>
-        <a:xfrm>
-          <a:off x="0" y="0"/>
-          <a:ext cx="0" cy="0"/>
-          <a:chOff x="0" y="0"/>
-          <a:chExt cx="0" cy="0"/>
-        </a:xfrm>
-      </p:grpSpPr>
-      <p:sp>
-        <p:nvSpPr>
-          <p:cNvPr id="28674" name="Rectangle 2">
-            <a:extLst>
-              <a:ext uri="{FF2B5EF4-FFF2-40B4-BE49-F238E27FC236}">
-                <a16:creationId xmlns:a16="http://schemas.microsoft.com/office/drawing/2014/main" id="{77B00A0D-2389-B5F5-B52D-41D2D3C79F3B}"/>
+                <a16:creationId xmlns:a16="http://schemas.microsoft.com/office/drawing/2014/main" id="{55AE5536-7E3E-C0FA-79E4-99D79BC76DE2}"/>
               </a:ext>
             </a:extLst>
           </p:cNvPr>
@@ -2515,8 +2242,8 @@
         </p:nvSpPr>
         <p:spPr>
           <a:xfrm>
-            <a:off x="3618" y="-4726"/>
-            <a:ext cx="7772400" cy="723900"/>
+            <a:off x="56506" y="-1586"/>
+            <a:ext cx="6324600" cy="914400"/>
           </a:xfrm>
         </p:spPr>
         <p:txBody>
@@ -2525,43 +2252,30 @@
           <a:p>
             <a:pPr eaLnBrk="1" hangingPunct="1"/>
             <a:r>
-              <a:rPr lang="en-US" altLang="en-US" sz="4000" i="1" dirty="0"/>
-              <a:t>Qualitative discussion: n-MOSFET</a:t>
+              <a:rPr lang="en-US" altLang="en-US" dirty="0"/>
+              <a:t>Complementary MOSFETs (CMOS)</a:t>
             </a:r>
           </a:p>
         </p:txBody>
       </p:sp>
-      <p:pic>
-        <p:nvPicPr>
-          <p:cNvPr id="28675" name="Picture 3">
+      <p:sp>
+        <p:nvSpPr>
+          <p:cNvPr id="26627" name="Text Box 3">
             <a:extLst>
               <a:ext uri="{FF2B5EF4-FFF2-40B4-BE49-F238E27FC236}">
-                <a16:creationId xmlns:a16="http://schemas.microsoft.com/office/drawing/2014/main" id="{6EEBA240-2A8B-DEA6-2003-66D07890D47B}"/>
+                <a16:creationId xmlns:a16="http://schemas.microsoft.com/office/drawing/2014/main" id="{C784E76F-9C8C-12C3-36FC-52787EE203B1}"/>
               </a:ext>
             </a:extLst>
           </p:cNvPr>
-          <p:cNvPicPr>
-            <a:picLocks noChangeAspect="1" noChangeArrowheads="1"/>
-          </p:cNvPicPr>
+          <p:cNvSpPr txBox="1">
+            <a:spLocks noChangeArrowheads="1"/>
+          </p:cNvSpPr>
           <p:nvPr/>
-        </p:nvPicPr>
-        <p:blipFill>
-          <a:blip r:embed="rId2">
-            <a:extLst>
-              <a:ext uri="{28A0092B-C50C-407E-A947-70E740481C1C}">
-                <a14:useLocalDpi xmlns:a14="http://schemas.microsoft.com/office/drawing/2010/main" val="0"/>
-              </a:ext>
-            </a:extLst>
-          </a:blip>
-          <a:srcRect b="4576"/>
-          <a:stretch>
-            <a:fillRect/>
-          </a:stretch>
-        </p:blipFill>
+        </p:nvSpPr>
         <p:spPr bwMode="auto">
           <a:xfrm>
-            <a:off x="2438400" y="812800"/>
-            <a:ext cx="3638550" cy="5334000"/>
+            <a:off x="5775325" y="2657476"/>
+            <a:ext cx="184150" cy="519113"/>
           </a:xfrm>
           <a:prstGeom prst="rect">
             <a:avLst/>
@@ -2590,13 +2304,150 @@
             </a:ext>
           </a:extLst>
         </p:spPr>
-      </p:pic>
+        <p:txBody>
+          <a:bodyPr wrap="none">
+            <a:spAutoFit/>
+          </a:bodyPr>
+          <a:lstStyle>
+            <a:lvl1pPr>
+              <a:spcBef>
+                <a:spcPct val="20000"/>
+              </a:spcBef>
+              <a:buChar char="•"/>
+              <a:defRPr sz="3200">
+                <a:solidFill>
+                  <a:schemeClr val="tx1"/>
+                </a:solidFill>
+                <a:latin typeface="Times New Roman" panose="02020603050405020304" pitchFamily="18" charset="0"/>
+              </a:defRPr>
+            </a:lvl1pPr>
+            <a:lvl2pPr marL="742950" indent="-285750">
+              <a:spcBef>
+                <a:spcPct val="20000"/>
+              </a:spcBef>
+              <a:buChar char="–"/>
+              <a:defRPr sz="2800">
+                <a:solidFill>
+                  <a:schemeClr val="tx1"/>
+                </a:solidFill>
+                <a:latin typeface="Times New Roman" panose="02020603050405020304" pitchFamily="18" charset="0"/>
+              </a:defRPr>
+            </a:lvl2pPr>
+            <a:lvl3pPr marL="1143000" indent="-228600">
+              <a:spcBef>
+                <a:spcPct val="20000"/>
+              </a:spcBef>
+              <a:buChar char="•"/>
+              <a:defRPr sz="2400">
+                <a:solidFill>
+                  <a:schemeClr val="tx1"/>
+                </a:solidFill>
+                <a:latin typeface="Times New Roman" panose="02020603050405020304" pitchFamily="18" charset="0"/>
+              </a:defRPr>
+            </a:lvl3pPr>
+            <a:lvl4pPr marL="1600200" indent="-228600">
+              <a:spcBef>
+                <a:spcPct val="20000"/>
+              </a:spcBef>
+              <a:buChar char="–"/>
+              <a:defRPr sz="2000">
+                <a:solidFill>
+                  <a:schemeClr val="tx1"/>
+                </a:solidFill>
+                <a:latin typeface="Times New Roman" panose="02020603050405020304" pitchFamily="18" charset="0"/>
+              </a:defRPr>
+            </a:lvl4pPr>
+            <a:lvl5pPr marL="2057400" indent="-228600">
+              <a:spcBef>
+                <a:spcPct val="20000"/>
+              </a:spcBef>
+              <a:buChar char="»"/>
+              <a:defRPr sz="2000">
+                <a:solidFill>
+                  <a:schemeClr val="tx1"/>
+                </a:solidFill>
+                <a:latin typeface="Times New Roman" panose="02020603050405020304" pitchFamily="18" charset="0"/>
+              </a:defRPr>
+            </a:lvl5pPr>
+            <a:lvl6pPr marL="2514600" indent="-228600" eaLnBrk="0" fontAlgn="base" hangingPunct="0">
+              <a:spcBef>
+                <a:spcPct val="20000"/>
+              </a:spcBef>
+              <a:spcAft>
+                <a:spcPct val="0"/>
+              </a:spcAft>
+              <a:buChar char="»"/>
+              <a:defRPr sz="2000">
+                <a:solidFill>
+                  <a:schemeClr val="tx1"/>
+                </a:solidFill>
+                <a:latin typeface="Times New Roman" panose="02020603050405020304" pitchFamily="18" charset="0"/>
+              </a:defRPr>
+            </a:lvl6pPr>
+            <a:lvl7pPr marL="2971800" indent="-228600" eaLnBrk="0" fontAlgn="base" hangingPunct="0">
+              <a:spcBef>
+                <a:spcPct val="20000"/>
+              </a:spcBef>
+              <a:spcAft>
+                <a:spcPct val="0"/>
+              </a:spcAft>
+              <a:buChar char="»"/>
+              <a:defRPr sz="2000">
+                <a:solidFill>
+                  <a:schemeClr val="tx1"/>
+                </a:solidFill>
+                <a:latin typeface="Times New Roman" panose="02020603050405020304" pitchFamily="18" charset="0"/>
+              </a:defRPr>
+            </a:lvl7pPr>
+            <a:lvl8pPr marL="3429000" indent="-228600" eaLnBrk="0" fontAlgn="base" hangingPunct="0">
+              <a:spcBef>
+                <a:spcPct val="20000"/>
+              </a:spcBef>
+              <a:spcAft>
+                <a:spcPct val="0"/>
+              </a:spcAft>
+              <a:buChar char="»"/>
+              <a:defRPr sz="2000">
+                <a:solidFill>
+                  <a:schemeClr val="tx1"/>
+                </a:solidFill>
+                <a:latin typeface="Times New Roman" panose="02020603050405020304" pitchFamily="18" charset="0"/>
+              </a:defRPr>
+            </a:lvl8pPr>
+            <a:lvl9pPr marL="3886200" indent="-228600" eaLnBrk="0" fontAlgn="base" hangingPunct="0">
+              <a:spcBef>
+                <a:spcPct val="20000"/>
+              </a:spcBef>
+              <a:spcAft>
+                <a:spcPct val="0"/>
+              </a:spcAft>
+              <a:buChar char="»"/>
+              <a:defRPr sz="2000">
+                <a:solidFill>
+                  <a:schemeClr val="tx1"/>
+                </a:solidFill>
+                <a:latin typeface="Times New Roman" panose="02020603050405020304" pitchFamily="18" charset="0"/>
+              </a:defRPr>
+            </a:lvl9pPr>
+          </a:lstStyle>
+          <a:p>
+            <a:pPr>
+              <a:spcBef>
+                <a:spcPct val="0"/>
+              </a:spcBef>
+              <a:buFontTx/>
+              <a:buNone/>
+            </a:pPr>
+            <a:endParaRPr lang="en-US" altLang="en-US" sz="2800" b="1" i="1"/>
+          </a:p>
+        </p:txBody>
+      </p:sp>
       <p:sp>
         <p:nvSpPr>
-          <p:cNvPr id="28676" name="Text Box 19">
+          <p:cNvPr id="26628" name="Text Box 4">
             <a:extLst>
               <a:ext uri="{FF2B5EF4-FFF2-40B4-BE49-F238E27FC236}">
-                <a16:creationId xmlns:a16="http://schemas.microsoft.com/office/drawing/2014/main" id="{43B977F2-9295-8D41-CB46-1B52B131DF06}"/>
+                <a16:creationId xmlns:a16="http://schemas.microsoft.com/office/drawing/2014/main" id="{014C2436-7858-5588-02B4-7E5F95BF8BB4}"/>
               </a:ext>
             </a:extLst>
           </p:cNvPr>
@@ -2607,8 +2458,8 @@
         </p:nvSpPr>
         <p:spPr bwMode="auto">
           <a:xfrm>
-            <a:off x="6480175" y="1079501"/>
-            <a:ext cx="2895600" cy="701675"/>
+            <a:off x="2895601" y="5029201"/>
+            <a:ext cx="6971011" cy="830997"/>
           </a:xfrm>
           <a:prstGeom prst="rect">
             <a:avLst/>
@@ -2638,7 +2489,7 @@
           </a:extLst>
         </p:spPr>
         <p:txBody>
-          <a:bodyPr>
+          <a:bodyPr wrap="none">
             <a:spAutoFit/>
           </a:bodyPr>
           <a:lstStyle>
@@ -2772,93 +2623,24 @@
               <a:buNone/>
             </a:pPr>
             <a:r>
-              <a:rPr lang="en-US" altLang="en-US" sz="2000" i="1">
-                <a:solidFill>
-                  <a:schemeClr val="accent2"/>
-                </a:solidFill>
-              </a:rPr>
-              <a:t>V</a:t>
-            </a:r>
-            <a:r>
-              <a:rPr lang="en-US" altLang="en-US" sz="2000" baseline="-25000">
-                <a:solidFill>
-                  <a:schemeClr val="accent2"/>
-                </a:solidFill>
-              </a:rPr>
-              <a:t>G </a:t>
-            </a:r>
-            <a:r>
-              <a:rPr lang="en-US" altLang="en-US" sz="2000">
-                <a:solidFill>
-                  <a:schemeClr val="accent2"/>
-                </a:solidFill>
-              </a:rPr>
-              <a:t>&gt; </a:t>
-            </a:r>
-            <a:r>
-              <a:rPr lang="en-US" altLang="en-US" sz="2000" i="1">
-                <a:solidFill>
-                  <a:schemeClr val="accent2"/>
-                </a:solidFill>
-              </a:rPr>
-              <a:t>V</a:t>
-            </a:r>
-            <a:r>
-              <a:rPr lang="en-US" altLang="en-US" sz="2000" baseline="-25000">
-                <a:solidFill>
-                  <a:schemeClr val="accent2"/>
-                </a:solidFill>
-              </a:rPr>
-              <a:t>T </a:t>
-            </a:r>
-            <a:r>
-              <a:rPr lang="en-US" altLang="en-US" sz="2000">
-                <a:solidFill>
-                  <a:schemeClr val="accent2"/>
-                </a:solidFill>
-              </a:rPr>
-              <a:t>; </a:t>
-            </a:r>
-            <a:r>
-              <a:rPr lang="en-US" altLang="en-US" sz="2000" i="1">
-                <a:solidFill>
-                  <a:schemeClr val="accent2"/>
-                </a:solidFill>
-              </a:rPr>
-              <a:t>V</a:t>
-            </a:r>
-            <a:r>
-              <a:rPr lang="en-US" altLang="en-US" sz="2000" baseline="-25000">
-                <a:solidFill>
-                  <a:schemeClr val="accent2"/>
-                </a:solidFill>
-              </a:rPr>
-              <a:t>DS</a:t>
-            </a:r>
-            <a:r>
-              <a:rPr lang="en-US" altLang="en-US" sz="2000">
-                <a:solidFill>
-                  <a:schemeClr val="accent2"/>
-                </a:solidFill>
-              </a:rPr>
-              <a:t> </a:t>
-            </a:r>
-            <a:r>
-              <a:rPr lang="en-US" altLang="en-US" sz="2000">
-                <a:solidFill>
-                  <a:schemeClr val="accent2"/>
-                </a:solidFill>
-                <a:sym typeface="Symbol" panose="05050102010706020507" pitchFamily="18" charset="2"/>
-              </a:rPr>
-              <a:t></a:t>
-            </a:r>
-            <a:r>
-              <a:rPr lang="en-US" altLang="en-US" sz="2000">
-                <a:solidFill>
-                  <a:schemeClr val="accent2"/>
-                </a:solidFill>
-              </a:rPr>
-              <a:t> 0</a:t>
+              <a:rPr lang="en-US" altLang="en-US" sz="2400" b="1" i="1"/>
+              <a:t>When V</a:t>
+            </a:r>
+            <a:r>
+              <a:rPr lang="en-US" altLang="en-US" sz="2400" b="1" i="1" baseline="-25000"/>
+              <a:t>g </a:t>
+            </a:r>
+            <a:r>
+              <a:rPr lang="en-US" altLang="en-US" sz="2400" b="1" i="1"/>
+              <a:t>= V</a:t>
+            </a:r>
+            <a:r>
+              <a:rPr lang="en-US" altLang="en-US" sz="2400" b="1" i="1" baseline="-25000"/>
+              <a:t>dd </a:t>
+            </a:r>
+            <a:r>
+              <a:rPr lang="en-US" altLang="en-US" sz="2400" b="1" i="1"/>
+              <a:t>, the NFET is on and the PFET is off. </a:t>
             </a:r>
           </a:p>
           <a:p>
@@ -2870,55 +2652,131 @@
               <a:buNone/>
             </a:pPr>
             <a:r>
-              <a:rPr lang="en-US" altLang="en-US" sz="2000" i="1">
-                <a:solidFill>
-                  <a:schemeClr val="accent2"/>
-                </a:solidFill>
-              </a:rPr>
-              <a:t>I</a:t>
-            </a:r>
-            <a:r>
-              <a:rPr lang="en-US" altLang="en-US" sz="2000" baseline="-25000">
-                <a:solidFill>
-                  <a:schemeClr val="accent2"/>
-                </a:solidFill>
-              </a:rPr>
-              <a:t>D</a:t>
-            </a:r>
-            <a:r>
-              <a:rPr lang="en-US" altLang="en-US" sz="2000">
-                <a:solidFill>
-                  <a:schemeClr val="accent2"/>
-                </a:solidFill>
-              </a:rPr>
-              <a:t> increases with </a:t>
-            </a:r>
-            <a:r>
-              <a:rPr lang="en-US" altLang="en-US" sz="2000" i="1">
-                <a:solidFill>
-                  <a:schemeClr val="accent2"/>
-                </a:solidFill>
-              </a:rPr>
-              <a:t>V</a:t>
-            </a:r>
-            <a:r>
-              <a:rPr lang="en-US" altLang="en-US" sz="2000" baseline="-25000">
-                <a:solidFill>
-                  <a:schemeClr val="accent2"/>
-                </a:solidFill>
-              </a:rPr>
-              <a:t>DS</a:t>
-            </a:r>
-            <a:endParaRPr lang="en-US" altLang="en-US" sz="2000"/>
+              <a:rPr lang="en-US" altLang="en-US" sz="2400" b="1" i="1"/>
+              <a:t>When V</a:t>
+            </a:r>
+            <a:r>
+              <a:rPr lang="en-US" altLang="en-US" sz="2400" b="1" i="1" baseline="-25000"/>
+              <a:t>g</a:t>
+            </a:r>
+            <a:r>
+              <a:rPr lang="en-US" altLang="en-US" sz="2400" b="1" i="1"/>
+              <a:t> = 0, the PFET is on and the NFET is off.</a:t>
+            </a:r>
           </a:p>
         </p:txBody>
       </p:sp>
+      <p:graphicFrame>
+        <p:nvGraphicFramePr>
+          <p:cNvPr id="26629" name="Object 5">
+            <a:extLst>
+              <a:ext uri="{FF2B5EF4-FFF2-40B4-BE49-F238E27FC236}">
+                <a16:creationId xmlns:a16="http://schemas.microsoft.com/office/drawing/2014/main" id="{A99480F4-1187-040A-CC21-0575AABACF29}"/>
+              </a:ext>
+            </a:extLst>
+          </p:cNvPr>
+          <p:cNvGraphicFramePr>
+            <a:graphicFrameLocks noChangeAspect="1"/>
+          </p:cNvGraphicFramePr>
+          <p:nvPr/>
+        </p:nvGraphicFramePr>
+        <p:xfrm>
+          <a:off x="2647950" y="1838326"/>
+          <a:ext cx="7277100" cy="3178175"/>
+        </p:xfrm>
+        <a:graphic>
+          <a:graphicData uri="http://schemas.openxmlformats.org/presentationml/2006/ole">
+            <mc:AlternateContent xmlns:mc="http://schemas.openxmlformats.org/markup-compatibility/2006">
+              <mc:Choice xmlns:v="urn:schemas-microsoft-com:vml" Requires="v">
+                <p:oleObj name="Bitmap Image" r:id="rId2" imgW="9097645" imgH="3971429" progId="Paint.Picture">
+                  <p:embed/>
+                </p:oleObj>
+              </mc:Choice>
+              <mc:Fallback>
+                <p:oleObj name="Bitmap Image" r:id="rId2" imgW="9097645" imgH="3971429" progId="Paint.Picture">
+                  <p:embed/>
+                  <p:pic>
+                    <p:nvPicPr>
+                      <p:cNvPr id="26629" name="Object 5">
+                        <a:extLst>
+                          <a:ext uri="{FF2B5EF4-FFF2-40B4-BE49-F238E27FC236}">
+                            <a16:creationId xmlns:a16="http://schemas.microsoft.com/office/drawing/2014/main" id="{A99480F4-1187-040A-CC21-0575AABACF29}"/>
+                          </a:ext>
+                        </a:extLst>
+                      </p:cNvPr>
+                      <p:cNvPicPr>
+                        <a:picLocks noChangeAspect="1" noChangeArrowheads="1"/>
+                      </p:cNvPicPr>
+                      <p:nvPr/>
+                    </p:nvPicPr>
+                    <p:blipFill>
+                      <a:blip r:embed="rId3">
+                        <a:extLst>
+                          <a:ext uri="{28A0092B-C50C-407E-A947-70E740481C1C}">
+                            <a14:useLocalDpi xmlns:a14="http://schemas.microsoft.com/office/drawing/2010/main" val="0"/>
+                          </a:ext>
+                        </a:extLst>
+                      </a:blip>
+                      <a:srcRect/>
+                      <a:stretch>
+                        <a:fillRect/>
+                      </a:stretch>
+                    </p:blipFill>
+                    <p:spPr bwMode="auto">
+                      <a:xfrm>
+                        <a:off x="2647950" y="1838326"/>
+                        <a:ext cx="7277100" cy="3178175"/>
+                      </a:xfrm>
+                      <a:prstGeom prst="rect">
+                        <a:avLst/>
+                      </a:prstGeom>
+                      <a:noFill/>
+                      <a:ln>
+                        <a:noFill/>
+                      </a:ln>
+                      <a:effectLst/>
+                      <a:extLst>
+                        <a:ext uri="{909E8E84-426E-40DD-AFC4-6F175D3DCCD1}">
+                          <a14:hiddenFill xmlns:a14="http://schemas.microsoft.com/office/drawing/2010/main">
+                            <a:solidFill>
+                              <a:schemeClr val="accent1"/>
+                            </a:solidFill>
+                          </a14:hiddenFill>
+                        </a:ext>
+                        <a:ext uri="{91240B29-F687-4F45-9708-019B960494DF}">
+                          <a14:hiddenLine xmlns:a14="http://schemas.microsoft.com/office/drawing/2010/main" w="9525">
+                            <a:solidFill>
+                              <a:schemeClr val="tx1"/>
+                            </a:solidFill>
+                            <a:miter lim="800000"/>
+                            <a:headEnd/>
+                            <a:tailEnd/>
+                          </a14:hiddenLine>
+                        </a:ext>
+                        <a:ext uri="{AF507438-7753-43E0-B8FC-AC1667EBCBE1}">
+                          <a14:hiddenEffects xmlns:a14="http://schemas.microsoft.com/office/drawing/2010/main">
+                            <a:effectLst>
+                              <a:outerShdw dist="35921" dir="2700000" algn="ctr" rotWithShape="0">
+                                <a:schemeClr val="bg2"/>
+                              </a:outerShdw>
+                            </a:effectLst>
+                          </a14:hiddenEffects>
+                        </a:ext>
+                      </a:extLst>
+                    </p:spPr>
+                  </p:pic>
+                </p:oleObj>
+              </mc:Fallback>
+            </mc:AlternateContent>
+          </a:graphicData>
+        </a:graphic>
+      </p:graphicFrame>
       <p:sp>
         <p:nvSpPr>
-          <p:cNvPr id="28677" name="Text Box 20">
+          <p:cNvPr id="26630" name="Text Box 6">
             <a:extLst>
               <a:ext uri="{FF2B5EF4-FFF2-40B4-BE49-F238E27FC236}">
-                <a16:creationId xmlns:a16="http://schemas.microsoft.com/office/drawing/2014/main" id="{FBCA5694-6C6E-C0DC-D7DC-A342776380B5}"/>
+                <a16:creationId xmlns:a16="http://schemas.microsoft.com/office/drawing/2014/main" id="{C0BDA0CB-637C-7293-665C-3B65CB2FE36C}"/>
               </a:ext>
             </a:extLst>
           </p:cNvPr>
@@ -2929,8 +2787,8 @@
         </p:nvSpPr>
         <p:spPr bwMode="auto">
           <a:xfrm>
-            <a:off x="6477001" y="2298701"/>
-            <a:ext cx="3216275" cy="1006475"/>
+            <a:off x="3886201" y="1219201"/>
+            <a:ext cx="4276725" cy="396875"/>
           </a:xfrm>
           <a:prstGeom prst="rect">
             <a:avLst/>
@@ -2960,7 +2818,7 @@
           </a:extLst>
         </p:spPr>
         <p:txBody>
-          <a:bodyPr>
+          <a:bodyPr wrap="none">
             <a:spAutoFit/>
           </a:bodyPr>
           <a:lstStyle>
@@ -3094,814 +2952,8 @@
               <a:buNone/>
             </a:pPr>
             <a:r>
-              <a:rPr lang="en-US" altLang="en-US" sz="2000" i="1">
-                <a:solidFill>
-                  <a:schemeClr val="accent2"/>
-                </a:solidFill>
-              </a:rPr>
-              <a:t>V</a:t>
-            </a:r>
-            <a:r>
-              <a:rPr lang="en-US" altLang="en-US" sz="2000" baseline="-25000">
-                <a:solidFill>
-                  <a:schemeClr val="accent2"/>
-                </a:solidFill>
-              </a:rPr>
-              <a:t>G </a:t>
-            </a:r>
-            <a:r>
-              <a:rPr lang="en-US" altLang="en-US" sz="2000">
-                <a:solidFill>
-                  <a:schemeClr val="accent2"/>
-                </a:solidFill>
-              </a:rPr>
-              <a:t>&gt; </a:t>
-            </a:r>
-            <a:r>
-              <a:rPr lang="en-US" altLang="en-US" sz="2000" i="1">
-                <a:solidFill>
-                  <a:schemeClr val="accent2"/>
-                </a:solidFill>
-              </a:rPr>
-              <a:t>V</a:t>
-            </a:r>
-            <a:r>
-              <a:rPr lang="en-US" altLang="en-US" sz="2000" baseline="-25000">
-                <a:solidFill>
-                  <a:schemeClr val="accent2"/>
-                </a:solidFill>
-              </a:rPr>
-              <a:t>T</a:t>
-            </a:r>
-            <a:r>
-              <a:rPr lang="en-US" altLang="en-US" sz="2000">
-                <a:solidFill>
-                  <a:schemeClr val="accent2"/>
-                </a:solidFill>
-              </a:rPr>
-              <a:t>; </a:t>
-            </a:r>
-            <a:r>
-              <a:rPr lang="en-US" altLang="en-US" sz="2000" i="1">
-                <a:solidFill>
-                  <a:schemeClr val="accent2"/>
-                </a:solidFill>
-              </a:rPr>
-              <a:t>V</a:t>
-            </a:r>
-            <a:r>
-              <a:rPr lang="en-US" altLang="en-US" sz="2000" baseline="-25000">
-                <a:solidFill>
-                  <a:schemeClr val="accent2"/>
-                </a:solidFill>
-              </a:rPr>
-              <a:t>DS</a:t>
-            </a:r>
-            <a:r>
-              <a:rPr lang="en-US" altLang="en-US" sz="2000">
-                <a:solidFill>
-                  <a:schemeClr val="accent2"/>
-                </a:solidFill>
-              </a:rPr>
-              <a:t> small, &gt; 0</a:t>
-            </a:r>
-          </a:p>
-          <a:p>
-            <a:pPr>
-              <a:spcBef>
-                <a:spcPct val="0"/>
-              </a:spcBef>
-              <a:buFontTx/>
-              <a:buNone/>
-            </a:pPr>
-            <a:r>
-              <a:rPr lang="en-US" altLang="en-US" sz="2000" i="1">
-                <a:solidFill>
-                  <a:schemeClr val="accent2"/>
-                </a:solidFill>
-              </a:rPr>
-              <a:t>I</a:t>
-            </a:r>
-            <a:r>
-              <a:rPr lang="en-US" altLang="en-US" sz="2000" baseline="-25000">
-                <a:solidFill>
-                  <a:schemeClr val="accent2"/>
-                </a:solidFill>
-              </a:rPr>
-              <a:t>D</a:t>
-            </a:r>
-            <a:r>
-              <a:rPr lang="en-US" altLang="en-US" sz="2000">
-                <a:solidFill>
-                  <a:schemeClr val="accent2"/>
-                </a:solidFill>
-              </a:rPr>
-              <a:t> increases with </a:t>
-            </a:r>
-            <a:r>
-              <a:rPr lang="en-US" altLang="en-US" sz="2000" i="1">
-                <a:solidFill>
-                  <a:schemeClr val="accent2"/>
-                </a:solidFill>
-              </a:rPr>
-              <a:t>V</a:t>
-            </a:r>
-            <a:r>
-              <a:rPr lang="en-US" altLang="en-US" sz="2000" baseline="-25000">
-                <a:solidFill>
-                  <a:schemeClr val="accent2"/>
-                </a:solidFill>
-              </a:rPr>
-              <a:t>DS</a:t>
-            </a:r>
-            <a:r>
-              <a:rPr lang="en-US" altLang="en-US" sz="2000">
-                <a:solidFill>
-                  <a:schemeClr val="accent2"/>
-                </a:solidFill>
-              </a:rPr>
-              <a:t> , but rate of increase decreases.</a:t>
-            </a:r>
-          </a:p>
-        </p:txBody>
-      </p:sp>
-      <p:sp>
-        <p:nvSpPr>
-          <p:cNvPr id="28678" name="Text Box 21">
-            <a:extLst>
-              <a:ext uri="{FF2B5EF4-FFF2-40B4-BE49-F238E27FC236}">
-                <a16:creationId xmlns:a16="http://schemas.microsoft.com/office/drawing/2014/main" id="{6E080F32-741D-B058-3D56-46C4D6718AA0}"/>
-              </a:ext>
-            </a:extLst>
-          </p:cNvPr>
-          <p:cNvSpPr txBox="1">
-            <a:spLocks noChangeArrowheads="1"/>
-          </p:cNvSpPr>
-          <p:nvPr/>
-        </p:nvSpPr>
-        <p:spPr bwMode="auto">
-          <a:xfrm>
-            <a:off x="6480175" y="3594101"/>
-            <a:ext cx="3657600" cy="1006475"/>
-          </a:xfrm>
-          <a:prstGeom prst="rect">
-            <a:avLst/>
-          </a:prstGeom>
-          <a:noFill/>
-          <a:ln>
-            <a:noFill/>
-          </a:ln>
-          <a:extLst>
-            <a:ext uri="{909E8E84-426E-40DD-AFC4-6F175D3DCCD1}">
-              <a14:hiddenFill xmlns:a14="http://schemas.microsoft.com/office/drawing/2010/main">
-                <a:solidFill>
-                  <a:srgbClr val="FFFFFF"/>
-                </a:solidFill>
-              </a14:hiddenFill>
-            </a:ext>
-            <a:ext uri="{91240B29-F687-4F45-9708-019B960494DF}">
-              <a14:hiddenLine xmlns:a14="http://schemas.microsoft.com/office/drawing/2010/main" w="9525">
-                <a:solidFill>
-                  <a:srgbClr val="000000"/>
-                </a:solidFill>
-                <a:miter lim="800000"/>
-                <a:headEnd/>
-                <a:tailEnd/>
-              </a14:hiddenLine>
-            </a:ext>
-          </a:extLst>
-        </p:spPr>
-        <p:txBody>
-          <a:bodyPr>
-            <a:spAutoFit/>
-          </a:bodyPr>
-          <a:lstStyle>
-            <a:lvl1pPr>
-              <a:spcBef>
-                <a:spcPct val="20000"/>
-              </a:spcBef>
-              <a:buChar char="•"/>
-              <a:defRPr sz="3200">
-                <a:solidFill>
-                  <a:schemeClr val="tx1"/>
-                </a:solidFill>
-                <a:latin typeface="Times New Roman" panose="02020603050405020304" pitchFamily="18" charset="0"/>
-              </a:defRPr>
-            </a:lvl1pPr>
-            <a:lvl2pPr marL="742950" indent="-285750">
-              <a:spcBef>
-                <a:spcPct val="20000"/>
-              </a:spcBef>
-              <a:buChar char="–"/>
-              <a:defRPr sz="2800">
-                <a:solidFill>
-                  <a:schemeClr val="tx1"/>
-                </a:solidFill>
-                <a:latin typeface="Times New Roman" panose="02020603050405020304" pitchFamily="18" charset="0"/>
-              </a:defRPr>
-            </a:lvl2pPr>
-            <a:lvl3pPr marL="1143000" indent="-228600">
-              <a:spcBef>
-                <a:spcPct val="20000"/>
-              </a:spcBef>
-              <a:buChar char="•"/>
-              <a:defRPr sz="2400">
-                <a:solidFill>
-                  <a:schemeClr val="tx1"/>
-                </a:solidFill>
-                <a:latin typeface="Times New Roman" panose="02020603050405020304" pitchFamily="18" charset="0"/>
-              </a:defRPr>
-            </a:lvl3pPr>
-            <a:lvl4pPr marL="1600200" indent="-228600">
-              <a:spcBef>
-                <a:spcPct val="20000"/>
-              </a:spcBef>
-              <a:buChar char="–"/>
-              <a:defRPr sz="2000">
-                <a:solidFill>
-                  <a:schemeClr val="tx1"/>
-                </a:solidFill>
-                <a:latin typeface="Times New Roman" panose="02020603050405020304" pitchFamily="18" charset="0"/>
-              </a:defRPr>
-            </a:lvl4pPr>
-            <a:lvl5pPr marL="2057400" indent="-228600">
-              <a:spcBef>
-                <a:spcPct val="20000"/>
-              </a:spcBef>
-              <a:buChar char="»"/>
-              <a:defRPr sz="2000">
-                <a:solidFill>
-                  <a:schemeClr val="tx1"/>
-                </a:solidFill>
-                <a:latin typeface="Times New Roman" panose="02020603050405020304" pitchFamily="18" charset="0"/>
-              </a:defRPr>
-            </a:lvl5pPr>
-            <a:lvl6pPr marL="2514600" indent="-228600" eaLnBrk="0" fontAlgn="base" hangingPunct="0">
-              <a:spcBef>
-                <a:spcPct val="20000"/>
-              </a:spcBef>
-              <a:spcAft>
-                <a:spcPct val="0"/>
-              </a:spcAft>
-              <a:buChar char="»"/>
-              <a:defRPr sz="2000">
-                <a:solidFill>
-                  <a:schemeClr val="tx1"/>
-                </a:solidFill>
-                <a:latin typeface="Times New Roman" panose="02020603050405020304" pitchFamily="18" charset="0"/>
-              </a:defRPr>
-            </a:lvl6pPr>
-            <a:lvl7pPr marL="2971800" indent="-228600" eaLnBrk="0" fontAlgn="base" hangingPunct="0">
-              <a:spcBef>
-                <a:spcPct val="20000"/>
-              </a:spcBef>
-              <a:spcAft>
-                <a:spcPct val="0"/>
-              </a:spcAft>
-              <a:buChar char="»"/>
-              <a:defRPr sz="2000">
-                <a:solidFill>
-                  <a:schemeClr val="tx1"/>
-                </a:solidFill>
-                <a:latin typeface="Times New Roman" panose="02020603050405020304" pitchFamily="18" charset="0"/>
-              </a:defRPr>
-            </a:lvl7pPr>
-            <a:lvl8pPr marL="3429000" indent="-228600" eaLnBrk="0" fontAlgn="base" hangingPunct="0">
-              <a:spcBef>
-                <a:spcPct val="20000"/>
-              </a:spcBef>
-              <a:spcAft>
-                <a:spcPct val="0"/>
-              </a:spcAft>
-              <a:buChar char="»"/>
-              <a:defRPr sz="2000">
-                <a:solidFill>
-                  <a:schemeClr val="tx1"/>
-                </a:solidFill>
-                <a:latin typeface="Times New Roman" panose="02020603050405020304" pitchFamily="18" charset="0"/>
-              </a:defRPr>
-            </a:lvl8pPr>
-            <a:lvl9pPr marL="3886200" indent="-228600" eaLnBrk="0" fontAlgn="base" hangingPunct="0">
-              <a:spcBef>
-                <a:spcPct val="20000"/>
-              </a:spcBef>
-              <a:spcAft>
-                <a:spcPct val="0"/>
-              </a:spcAft>
-              <a:buChar char="»"/>
-              <a:defRPr sz="2000">
-                <a:solidFill>
-                  <a:schemeClr val="tx1"/>
-                </a:solidFill>
-                <a:latin typeface="Times New Roman" panose="02020603050405020304" pitchFamily="18" charset="0"/>
-              </a:defRPr>
-            </a:lvl9pPr>
-          </a:lstStyle>
-          <a:p>
-            <a:pPr>
-              <a:spcBef>
-                <a:spcPct val="0"/>
-              </a:spcBef>
-              <a:buFontTx/>
-              <a:buNone/>
-            </a:pPr>
-            <a:r>
-              <a:rPr lang="en-US" altLang="en-US" sz="2000" i="1">
-                <a:solidFill>
-                  <a:schemeClr val="accent2"/>
-                </a:solidFill>
-              </a:rPr>
-              <a:t>V</a:t>
-            </a:r>
-            <a:r>
-              <a:rPr lang="en-US" altLang="en-US" sz="2000" baseline="-25000">
-                <a:solidFill>
-                  <a:schemeClr val="accent2"/>
-                </a:solidFill>
-              </a:rPr>
-              <a:t>G</a:t>
-            </a:r>
-            <a:r>
-              <a:rPr lang="en-US" altLang="en-US" sz="2000">
-                <a:solidFill>
-                  <a:schemeClr val="accent2"/>
-                </a:solidFill>
-              </a:rPr>
-              <a:t> &gt; </a:t>
-            </a:r>
-            <a:r>
-              <a:rPr lang="en-US" altLang="en-US" sz="2000" i="1">
-                <a:solidFill>
-                  <a:schemeClr val="accent2"/>
-                </a:solidFill>
-              </a:rPr>
-              <a:t>V</a:t>
-            </a:r>
-            <a:r>
-              <a:rPr lang="en-US" altLang="en-US" sz="2000" baseline="-25000">
-                <a:solidFill>
-                  <a:schemeClr val="accent2"/>
-                </a:solidFill>
-              </a:rPr>
-              <a:t>T</a:t>
-            </a:r>
-            <a:r>
-              <a:rPr lang="en-US" altLang="en-US" sz="2000">
-                <a:solidFill>
-                  <a:schemeClr val="accent2"/>
-                </a:solidFill>
-              </a:rPr>
-              <a:t>; </a:t>
-            </a:r>
-            <a:r>
-              <a:rPr lang="en-US" altLang="en-US" sz="2000" i="1">
-                <a:solidFill>
-                  <a:schemeClr val="accent2"/>
-                </a:solidFill>
-              </a:rPr>
-              <a:t>V</a:t>
-            </a:r>
-            <a:r>
-              <a:rPr lang="en-US" altLang="en-US" sz="2000" baseline="-25000">
-                <a:solidFill>
-                  <a:schemeClr val="accent2"/>
-                </a:solidFill>
-              </a:rPr>
-              <a:t>DS</a:t>
-            </a:r>
-            <a:r>
-              <a:rPr lang="en-US" altLang="en-US" sz="2000">
-                <a:solidFill>
-                  <a:schemeClr val="accent2"/>
-                </a:solidFill>
-              </a:rPr>
-              <a:t> </a:t>
-            </a:r>
-            <a:r>
-              <a:rPr lang="en-US" altLang="en-US" sz="2000">
-                <a:solidFill>
-                  <a:schemeClr val="accent2"/>
-                </a:solidFill>
-                <a:sym typeface="Symbol" panose="05050102010706020507" pitchFamily="18" charset="2"/>
-              </a:rPr>
-              <a:t> pinch-off</a:t>
-            </a:r>
-          </a:p>
-          <a:p>
-            <a:pPr>
-              <a:spcBef>
-                <a:spcPct val="0"/>
-              </a:spcBef>
-              <a:buFontTx/>
-              <a:buNone/>
-            </a:pPr>
-            <a:r>
-              <a:rPr lang="en-US" altLang="en-US" sz="2000" i="1">
-                <a:solidFill>
-                  <a:schemeClr val="accent2"/>
-                </a:solidFill>
-                <a:sym typeface="Symbol" panose="05050102010706020507" pitchFamily="18" charset="2"/>
-              </a:rPr>
-              <a:t>I</a:t>
-            </a:r>
-            <a:r>
-              <a:rPr lang="en-US" altLang="en-US" sz="2000" baseline="-25000">
-                <a:solidFill>
-                  <a:schemeClr val="accent2"/>
-                </a:solidFill>
-                <a:sym typeface="Symbol" panose="05050102010706020507" pitchFamily="18" charset="2"/>
-              </a:rPr>
-              <a:t>D</a:t>
-            </a:r>
-            <a:r>
-              <a:rPr lang="en-US" altLang="en-US" sz="2000">
-                <a:solidFill>
-                  <a:schemeClr val="accent2"/>
-                </a:solidFill>
-                <a:sym typeface="Symbol" panose="05050102010706020507" pitchFamily="18" charset="2"/>
-              </a:rPr>
-              <a:t> reaches a saturation value, </a:t>
-            </a:r>
-            <a:r>
-              <a:rPr lang="en-US" altLang="en-US" sz="2000" i="1">
-                <a:solidFill>
-                  <a:schemeClr val="accent2"/>
-                </a:solidFill>
-                <a:sym typeface="Symbol" panose="05050102010706020507" pitchFamily="18" charset="2"/>
-              </a:rPr>
-              <a:t>I</a:t>
-            </a:r>
-            <a:r>
-              <a:rPr lang="en-US" altLang="en-US" sz="2000" baseline="-25000">
-                <a:solidFill>
-                  <a:schemeClr val="accent2"/>
-                </a:solidFill>
-                <a:sym typeface="Symbol" panose="05050102010706020507" pitchFamily="18" charset="2"/>
-              </a:rPr>
-              <a:t>D,sat</a:t>
-            </a:r>
-            <a:r>
-              <a:rPr lang="en-US" altLang="en-US" sz="2000">
-                <a:solidFill>
-                  <a:schemeClr val="accent2"/>
-                </a:solidFill>
-                <a:sym typeface="Symbol" panose="05050102010706020507" pitchFamily="18" charset="2"/>
-              </a:rPr>
-              <a:t> The </a:t>
-            </a:r>
-            <a:r>
-              <a:rPr lang="en-US" altLang="en-US" sz="2000" i="1">
-                <a:solidFill>
-                  <a:schemeClr val="accent2"/>
-                </a:solidFill>
-                <a:sym typeface="Symbol" panose="05050102010706020507" pitchFamily="18" charset="2"/>
-              </a:rPr>
-              <a:t>V</a:t>
-            </a:r>
-            <a:r>
-              <a:rPr lang="en-US" altLang="en-US" sz="2000" baseline="-25000">
-                <a:solidFill>
-                  <a:schemeClr val="accent2"/>
-                </a:solidFill>
-                <a:sym typeface="Symbol" panose="05050102010706020507" pitchFamily="18" charset="2"/>
-              </a:rPr>
-              <a:t>DS</a:t>
-            </a:r>
-            <a:r>
-              <a:rPr lang="en-US" altLang="en-US" sz="2000">
-                <a:solidFill>
-                  <a:schemeClr val="accent2"/>
-                </a:solidFill>
-                <a:sym typeface="Symbol" panose="05050102010706020507" pitchFamily="18" charset="2"/>
-              </a:rPr>
-              <a:t> value is called </a:t>
-            </a:r>
-            <a:r>
-              <a:rPr lang="en-US" altLang="en-US" sz="2000" i="1">
-                <a:solidFill>
-                  <a:schemeClr val="accent2"/>
-                </a:solidFill>
-                <a:sym typeface="Symbol" panose="05050102010706020507" pitchFamily="18" charset="2"/>
-              </a:rPr>
-              <a:t>V</a:t>
-            </a:r>
-            <a:r>
-              <a:rPr lang="en-US" altLang="en-US" sz="2000" baseline="-25000">
-                <a:solidFill>
-                  <a:schemeClr val="accent2"/>
-                </a:solidFill>
-                <a:sym typeface="Symbol" panose="05050102010706020507" pitchFamily="18" charset="2"/>
-              </a:rPr>
-              <a:t>DS,sat</a:t>
-            </a:r>
-            <a:endParaRPr lang="en-US" altLang="en-US" sz="2000">
-              <a:solidFill>
-                <a:schemeClr val="accent2"/>
-              </a:solidFill>
-            </a:endParaRPr>
-          </a:p>
-        </p:txBody>
-      </p:sp>
-      <p:sp>
-        <p:nvSpPr>
-          <p:cNvPr id="28679" name="Text Box 22">
-            <a:extLst>
-              <a:ext uri="{FF2B5EF4-FFF2-40B4-BE49-F238E27FC236}">
-                <a16:creationId xmlns:a16="http://schemas.microsoft.com/office/drawing/2014/main" id="{DEB26D5B-FD93-DE64-CE3D-C74A280FFE98}"/>
-              </a:ext>
-            </a:extLst>
-          </p:cNvPr>
-          <p:cNvSpPr txBox="1">
-            <a:spLocks noChangeArrowheads="1"/>
-          </p:cNvSpPr>
-          <p:nvPr/>
-        </p:nvSpPr>
-        <p:spPr bwMode="auto">
-          <a:xfrm>
-            <a:off x="6518275" y="4860926"/>
-            <a:ext cx="3810000" cy="1006475"/>
-          </a:xfrm>
-          <a:prstGeom prst="rect">
-            <a:avLst/>
-          </a:prstGeom>
-          <a:noFill/>
-          <a:ln>
-            <a:noFill/>
-          </a:ln>
-          <a:extLst>
-            <a:ext uri="{909E8E84-426E-40DD-AFC4-6F175D3DCCD1}">
-              <a14:hiddenFill xmlns:a14="http://schemas.microsoft.com/office/drawing/2010/main">
-                <a:solidFill>
-                  <a:srgbClr val="FFFFFF"/>
-                </a:solidFill>
-              </a14:hiddenFill>
-            </a:ext>
-            <a:ext uri="{91240B29-F687-4F45-9708-019B960494DF}">
-              <a14:hiddenLine xmlns:a14="http://schemas.microsoft.com/office/drawing/2010/main" w="9525">
-                <a:solidFill>
-                  <a:srgbClr val="000000"/>
-                </a:solidFill>
-                <a:miter lim="800000"/>
-                <a:headEnd/>
-                <a:tailEnd/>
-              </a14:hiddenLine>
-            </a:ext>
-          </a:extLst>
-        </p:spPr>
-        <p:txBody>
-          <a:bodyPr>
-            <a:spAutoFit/>
-          </a:bodyPr>
-          <a:lstStyle>
-            <a:lvl1pPr>
-              <a:spcBef>
-                <a:spcPct val="20000"/>
-              </a:spcBef>
-              <a:buChar char="•"/>
-              <a:defRPr sz="3200">
-                <a:solidFill>
-                  <a:schemeClr val="tx1"/>
-                </a:solidFill>
-                <a:latin typeface="Times New Roman" panose="02020603050405020304" pitchFamily="18" charset="0"/>
-              </a:defRPr>
-            </a:lvl1pPr>
-            <a:lvl2pPr marL="742950" indent="-285750">
-              <a:spcBef>
-                <a:spcPct val="20000"/>
-              </a:spcBef>
-              <a:buChar char="–"/>
-              <a:defRPr sz="2800">
-                <a:solidFill>
-                  <a:schemeClr val="tx1"/>
-                </a:solidFill>
-                <a:latin typeface="Times New Roman" panose="02020603050405020304" pitchFamily="18" charset="0"/>
-              </a:defRPr>
-            </a:lvl2pPr>
-            <a:lvl3pPr marL="1143000" indent="-228600">
-              <a:spcBef>
-                <a:spcPct val="20000"/>
-              </a:spcBef>
-              <a:buChar char="•"/>
-              <a:defRPr sz="2400">
-                <a:solidFill>
-                  <a:schemeClr val="tx1"/>
-                </a:solidFill>
-                <a:latin typeface="Times New Roman" panose="02020603050405020304" pitchFamily="18" charset="0"/>
-              </a:defRPr>
-            </a:lvl3pPr>
-            <a:lvl4pPr marL="1600200" indent="-228600">
-              <a:spcBef>
-                <a:spcPct val="20000"/>
-              </a:spcBef>
-              <a:buChar char="–"/>
-              <a:defRPr sz="2000">
-                <a:solidFill>
-                  <a:schemeClr val="tx1"/>
-                </a:solidFill>
-                <a:latin typeface="Times New Roman" panose="02020603050405020304" pitchFamily="18" charset="0"/>
-              </a:defRPr>
-            </a:lvl4pPr>
-            <a:lvl5pPr marL="2057400" indent="-228600">
-              <a:spcBef>
-                <a:spcPct val="20000"/>
-              </a:spcBef>
-              <a:buChar char="»"/>
-              <a:defRPr sz="2000">
-                <a:solidFill>
-                  <a:schemeClr val="tx1"/>
-                </a:solidFill>
-                <a:latin typeface="Times New Roman" panose="02020603050405020304" pitchFamily="18" charset="0"/>
-              </a:defRPr>
-            </a:lvl5pPr>
-            <a:lvl6pPr marL="2514600" indent="-228600" eaLnBrk="0" fontAlgn="base" hangingPunct="0">
-              <a:spcBef>
-                <a:spcPct val="20000"/>
-              </a:spcBef>
-              <a:spcAft>
-                <a:spcPct val="0"/>
-              </a:spcAft>
-              <a:buChar char="»"/>
-              <a:defRPr sz="2000">
-                <a:solidFill>
-                  <a:schemeClr val="tx1"/>
-                </a:solidFill>
-                <a:latin typeface="Times New Roman" panose="02020603050405020304" pitchFamily="18" charset="0"/>
-              </a:defRPr>
-            </a:lvl6pPr>
-            <a:lvl7pPr marL="2971800" indent="-228600" eaLnBrk="0" fontAlgn="base" hangingPunct="0">
-              <a:spcBef>
-                <a:spcPct val="20000"/>
-              </a:spcBef>
-              <a:spcAft>
-                <a:spcPct val="0"/>
-              </a:spcAft>
-              <a:buChar char="»"/>
-              <a:defRPr sz="2000">
-                <a:solidFill>
-                  <a:schemeClr val="tx1"/>
-                </a:solidFill>
-                <a:latin typeface="Times New Roman" panose="02020603050405020304" pitchFamily="18" charset="0"/>
-              </a:defRPr>
-            </a:lvl7pPr>
-            <a:lvl8pPr marL="3429000" indent="-228600" eaLnBrk="0" fontAlgn="base" hangingPunct="0">
-              <a:spcBef>
-                <a:spcPct val="20000"/>
-              </a:spcBef>
-              <a:spcAft>
-                <a:spcPct val="0"/>
-              </a:spcAft>
-              <a:buChar char="»"/>
-              <a:defRPr sz="2000">
-                <a:solidFill>
-                  <a:schemeClr val="tx1"/>
-                </a:solidFill>
-                <a:latin typeface="Times New Roman" panose="02020603050405020304" pitchFamily="18" charset="0"/>
-              </a:defRPr>
-            </a:lvl8pPr>
-            <a:lvl9pPr marL="3886200" indent="-228600" eaLnBrk="0" fontAlgn="base" hangingPunct="0">
-              <a:spcBef>
-                <a:spcPct val="20000"/>
-              </a:spcBef>
-              <a:spcAft>
-                <a:spcPct val="0"/>
-              </a:spcAft>
-              <a:buChar char="»"/>
-              <a:defRPr sz="2000">
-                <a:solidFill>
-                  <a:schemeClr val="tx1"/>
-                </a:solidFill>
-                <a:latin typeface="Times New Roman" panose="02020603050405020304" pitchFamily="18" charset="0"/>
-              </a:defRPr>
-            </a:lvl9pPr>
-          </a:lstStyle>
-          <a:p>
-            <a:pPr>
-              <a:spcBef>
-                <a:spcPct val="0"/>
-              </a:spcBef>
-              <a:buFontTx/>
-              <a:buNone/>
-            </a:pPr>
-            <a:r>
-              <a:rPr lang="en-US" altLang="en-US" sz="2000" i="1">
-                <a:solidFill>
-                  <a:schemeClr val="accent2"/>
-                </a:solidFill>
-              </a:rPr>
-              <a:t>V</a:t>
-            </a:r>
-            <a:r>
-              <a:rPr lang="en-US" altLang="en-US" sz="2000" baseline="-25000">
-                <a:solidFill>
-                  <a:schemeClr val="accent2"/>
-                </a:solidFill>
-              </a:rPr>
-              <a:t>G </a:t>
-            </a:r>
-            <a:r>
-              <a:rPr lang="en-US" altLang="en-US" sz="2000">
-                <a:solidFill>
-                  <a:schemeClr val="accent2"/>
-                </a:solidFill>
-              </a:rPr>
-              <a:t>&gt; </a:t>
-            </a:r>
-            <a:r>
-              <a:rPr lang="en-US" altLang="en-US" sz="2000" i="1">
-                <a:solidFill>
-                  <a:schemeClr val="accent2"/>
-                </a:solidFill>
-              </a:rPr>
-              <a:t>V</a:t>
-            </a:r>
-            <a:r>
-              <a:rPr lang="en-US" altLang="en-US" sz="2000" i="1" baseline="-25000">
-                <a:solidFill>
-                  <a:schemeClr val="accent2"/>
-                </a:solidFill>
-              </a:rPr>
-              <a:t>T</a:t>
-            </a:r>
-            <a:r>
-              <a:rPr lang="en-US" altLang="en-US" sz="2000">
-                <a:solidFill>
-                  <a:schemeClr val="accent2"/>
-                </a:solidFill>
-              </a:rPr>
-              <a:t>; </a:t>
-            </a:r>
-            <a:r>
-              <a:rPr lang="en-US" altLang="en-US" sz="2000" i="1">
-                <a:solidFill>
-                  <a:schemeClr val="accent2"/>
-                </a:solidFill>
-              </a:rPr>
-              <a:t>V</a:t>
-            </a:r>
-            <a:r>
-              <a:rPr lang="en-US" altLang="en-US" sz="2000" baseline="-25000">
-                <a:solidFill>
-                  <a:schemeClr val="accent2"/>
-                </a:solidFill>
-              </a:rPr>
-              <a:t>DS </a:t>
-            </a:r>
-            <a:r>
-              <a:rPr lang="en-US" altLang="en-US" sz="2000">
-                <a:solidFill>
-                  <a:schemeClr val="accent2"/>
-                </a:solidFill>
-              </a:rPr>
-              <a:t>&gt; </a:t>
-            </a:r>
-            <a:r>
-              <a:rPr lang="en-US" altLang="en-US" sz="2000" i="1">
-                <a:solidFill>
-                  <a:schemeClr val="accent2"/>
-                </a:solidFill>
-              </a:rPr>
-              <a:t>V</a:t>
-            </a:r>
-            <a:r>
-              <a:rPr lang="en-US" altLang="en-US" sz="2000" baseline="-25000">
-                <a:solidFill>
-                  <a:schemeClr val="accent2"/>
-                </a:solidFill>
-              </a:rPr>
-              <a:t>DS,sat</a:t>
-            </a:r>
-          </a:p>
-          <a:p>
-            <a:pPr>
-              <a:spcBef>
-                <a:spcPct val="0"/>
-              </a:spcBef>
-              <a:buFontTx/>
-              <a:buNone/>
-            </a:pPr>
-            <a:r>
-              <a:rPr lang="en-US" altLang="en-US" sz="2000" i="1">
-                <a:solidFill>
-                  <a:schemeClr val="accent2"/>
-                </a:solidFill>
-              </a:rPr>
-              <a:t>I</a:t>
-            </a:r>
-            <a:r>
-              <a:rPr lang="en-US" altLang="en-US" sz="2000" baseline="-25000">
-                <a:solidFill>
-                  <a:schemeClr val="accent2"/>
-                </a:solidFill>
-              </a:rPr>
-              <a:t>D</a:t>
-            </a:r>
-            <a:r>
-              <a:rPr lang="en-US" altLang="en-US" sz="2000">
-                <a:solidFill>
-                  <a:schemeClr val="accent2"/>
-                </a:solidFill>
-              </a:rPr>
-              <a:t> does not increase further, saturation region.</a:t>
+              <a:rPr lang="en-US" altLang="en-US" sz="2000" b="1" i="1"/>
+              <a:t>NFET			           PFET</a:t>
             </a:r>
           </a:p>
         </p:txBody>
@@ -3914,7 +2966,7 @@
 </p:sld>
 </file>
 
-<file path=ppt/slides/slide12.xml><?xml version="1.0" encoding="utf-8"?>
+<file path=ppt/slides/slide11.xml><?xml version="1.0" encoding="utf-8"?>
 <p:sld xmlns:a="http://schemas.openxmlformats.org/drawingml/2006/main" xmlns:r="http://schemas.openxmlformats.org/officeDocument/2006/relationships" xmlns:p="http://schemas.openxmlformats.org/presentationml/2006/main">
   <p:cSld>
     <p:spTree>
@@ -4105,7 +3157,7 @@
 </p:sld>
 </file>
 
-<file path=ppt/slides/slide13.xml><?xml version="1.0" encoding="utf-8"?>
+<file path=ppt/slides/slide12.xml><?xml version="1.0" encoding="utf-8"?>
 <p:sld xmlns:a="http://schemas.openxmlformats.org/drawingml/2006/main" xmlns:r="http://schemas.openxmlformats.org/officeDocument/2006/relationships" xmlns:p="http://schemas.openxmlformats.org/presentationml/2006/main">
   <p:cSld>
     <p:spTree>
@@ -4124,62 +3176,753 @@
       </p:grpSpPr>
       <p:sp>
         <p:nvSpPr>
-          <p:cNvPr id="31746" name="Rectangle 2">
+          <p:cNvPr id="2" name="Title 1">
             <a:extLst>
               <a:ext uri="{FF2B5EF4-FFF2-40B4-BE49-F238E27FC236}">
-                <a16:creationId xmlns:a16="http://schemas.microsoft.com/office/drawing/2014/main" id="{47079780-1E60-9A6B-DE5D-DC910A03E7E8}"/>
+                <a16:creationId xmlns:a16="http://schemas.microsoft.com/office/drawing/2014/main" id="{A08B7E27-D041-0C73-30C0-59F74DD69231}"/>
               </a:ext>
             </a:extLst>
           </p:cNvPr>
           <p:cNvSpPr>
-            <a:spLocks noGrp="1" noChangeArrowheads="1"/>
+            <a:spLocks noGrp="1"/>
           </p:cNvSpPr>
           <p:nvPr>
             <p:ph type="title"/>
           </p:nvPr>
         </p:nvSpPr>
-        <p:spPr>
-          <a:xfrm>
-            <a:off x="0" y="0"/>
-            <a:ext cx="7772400" cy="590931"/>
-          </a:xfrm>
-        </p:spPr>
+        <p:spPr/>
         <p:txBody>
-          <a:bodyPr anchor="t">
-            <a:spAutoFit/>
-          </a:bodyPr>
+          <a:bodyPr/>
           <a:lstStyle/>
           <a:p>
-            <a:pPr eaLnBrk="1" hangingPunct="1"/>
-            <a:r>
-              <a:rPr lang="en-US" altLang="en-US" sz="3600" i="1" dirty="0"/>
-              <a:t>I</a:t>
-            </a:r>
-            <a:r>
-              <a:rPr lang="en-US" altLang="en-US" sz="3600" i="1" baseline="-25000" dirty="0"/>
-              <a:t>D</a:t>
-            </a:r>
-            <a:r>
-              <a:rPr lang="en-US" altLang="en-US" sz="3600" i="1" dirty="0"/>
-              <a:t>-V</a:t>
-            </a:r>
-            <a:r>
-              <a:rPr lang="en-US" altLang="en-US" sz="3600" i="1" baseline="-25000" dirty="0"/>
-              <a:t>DS </a:t>
-            </a:r>
-            <a:r>
-              <a:rPr lang="en-US" altLang="en-US" sz="3600" i="1" dirty="0"/>
-              <a:t> characteristics for n-MOSFET</a:t>
-            </a:r>
+            <a:r>
+              <a:rPr lang="en-US" dirty="0"/>
+              <a:t>MOSFET current equations </a:t>
+            </a:r>
+          </a:p>
+        </p:txBody>
+      </p:sp>
+      <p:sp>
+        <p:nvSpPr>
+          <p:cNvPr id="3" name="Slide Number Placeholder 2">
+            <a:extLst>
+              <a:ext uri="{FF2B5EF4-FFF2-40B4-BE49-F238E27FC236}">
+                <a16:creationId xmlns:a16="http://schemas.microsoft.com/office/drawing/2014/main" id="{680CBB3A-BB87-89BD-7522-55C181425846}"/>
+              </a:ext>
+            </a:extLst>
+          </p:cNvPr>
+          <p:cNvSpPr>
+            <a:spLocks noGrp="1"/>
+          </p:cNvSpPr>
+          <p:nvPr>
+            <p:ph type="sldNum" sz="quarter" idx="11"/>
+          </p:nvPr>
+        </p:nvSpPr>
+        <p:spPr/>
+        <p:txBody>
+          <a:bodyPr/>
+          <a:lstStyle/>
+          <a:p>
+            <a:pPr>
+              <a:defRPr/>
+            </a:pPr>
+            <a:r>
+              <a:rPr lang="en-US" altLang="en-US"/>
+              <a:t>Slide 1-</a:t>
+            </a:r>
+            <a:fld id="{09CD9926-94D6-4100-8273-E75A6AC34B12}" type="slidenum">
+              <a:rPr lang="en-US" altLang="en-US" smtClean="0"/>
+              <a:pPr>
+                <a:defRPr/>
+              </a:pPr>
+              <a:t>12</a:t>
+            </a:fld>
+            <a:endParaRPr lang="en-US" altLang="en-US">
+              <a:latin typeface="Times New Roman" panose="02020603050405020304" pitchFamily="18" charset="0"/>
+            </a:endParaRPr>
           </a:p>
         </p:txBody>
       </p:sp>
       <p:pic>
         <p:nvPicPr>
-          <p:cNvPr id="31747" name="Picture 3">
+          <p:cNvPr id="5" name="Picture 4" descr="A math equations on a white background&#10;&#10;AI-generated content may be incorrect.">
             <a:extLst>
               <a:ext uri="{FF2B5EF4-FFF2-40B4-BE49-F238E27FC236}">
-                <a16:creationId xmlns:a16="http://schemas.microsoft.com/office/drawing/2014/main" id="{4A7F44B8-310D-CE04-59E2-586F514991BC}"/>
+                <a16:creationId xmlns:a16="http://schemas.microsoft.com/office/drawing/2014/main" id="{188B42E5-BD7C-D668-FCB4-B1C5ED635CC5}"/>
+              </a:ext>
+            </a:extLst>
+          </p:cNvPr>
+          <p:cNvPicPr>
+            <a:picLocks noChangeAspect="1"/>
+          </p:cNvPicPr>
+          <p:nvPr/>
+        </p:nvPicPr>
+        <p:blipFill>
+          <a:blip r:embed="rId2">
+            <a:extLst>
+              <a:ext uri="{28A0092B-C50C-407E-A947-70E740481C1C}">
+                <a14:useLocalDpi xmlns:a14="http://schemas.microsoft.com/office/drawing/2010/main" val="0"/>
+              </a:ext>
+            </a:extLst>
+          </a:blip>
+          <a:stretch>
+            <a:fillRect/>
+          </a:stretch>
+        </p:blipFill>
+        <p:spPr>
+          <a:xfrm>
+            <a:off x="111760" y="839155"/>
+            <a:ext cx="8374591" cy="3660223"/>
+          </a:xfrm>
+          <a:prstGeom prst="rect">
+            <a:avLst/>
+          </a:prstGeom>
+        </p:spPr>
+      </p:pic>
+      <p:pic>
+        <p:nvPicPr>
+          <p:cNvPr id="7" name="Picture 6" descr="A graph with a line&#10;&#10;AI-generated content may be incorrect.">
+            <a:extLst>
+              <a:ext uri="{FF2B5EF4-FFF2-40B4-BE49-F238E27FC236}">
+                <a16:creationId xmlns:a16="http://schemas.microsoft.com/office/drawing/2014/main" id="{7144A797-898F-61E8-6212-0E58AFD60216}"/>
+              </a:ext>
+            </a:extLst>
+          </p:cNvPr>
+          <p:cNvPicPr>
+            <a:picLocks noChangeAspect="1"/>
+          </p:cNvPicPr>
+          <p:nvPr/>
+        </p:nvPicPr>
+        <p:blipFill>
+          <a:blip r:embed="rId3" cstate="print">
+            <a:extLst>
+              <a:ext uri="{28A0092B-C50C-407E-A947-70E740481C1C}">
+                <a14:useLocalDpi xmlns:a14="http://schemas.microsoft.com/office/drawing/2010/main" val="0"/>
+              </a:ext>
+            </a:extLst>
+          </a:blip>
+          <a:stretch>
+            <a:fillRect/>
+          </a:stretch>
+        </p:blipFill>
+        <p:spPr>
+          <a:xfrm>
+            <a:off x="6659431" y="1395687"/>
+            <a:ext cx="5017098" cy="3856487"/>
+          </a:xfrm>
+          <a:prstGeom prst="rect">
+            <a:avLst/>
+          </a:prstGeom>
+        </p:spPr>
+      </p:pic>
+      <p:pic>
+        <p:nvPicPr>
+          <p:cNvPr id="8" name="Picture 7" descr="A math equations and numbers&#10;&#10;AI-generated content may be incorrect.">
+            <a:extLst>
+              <a:ext uri="{FF2B5EF4-FFF2-40B4-BE49-F238E27FC236}">
+                <a16:creationId xmlns:a16="http://schemas.microsoft.com/office/drawing/2014/main" id="{8BD74FF7-FBF0-06A0-CC62-AC810582D42E}"/>
+              </a:ext>
+            </a:extLst>
+          </p:cNvPr>
+          <p:cNvPicPr>
+            <a:picLocks noChangeAspect="1"/>
+          </p:cNvPicPr>
+          <p:nvPr/>
+        </p:nvPicPr>
+        <p:blipFill>
+          <a:blip r:embed="rId4">
+            <a:extLst>
+              <a:ext uri="{28A0092B-C50C-407E-A947-70E740481C1C}">
+                <a14:useLocalDpi xmlns:a14="http://schemas.microsoft.com/office/drawing/2010/main" val="0"/>
+              </a:ext>
+            </a:extLst>
+          </a:blip>
+          <a:stretch>
+            <a:fillRect/>
+          </a:stretch>
+        </p:blipFill>
+        <p:spPr>
+          <a:xfrm>
+            <a:off x="459506" y="4623120"/>
+            <a:ext cx="5598330" cy="1869755"/>
+          </a:xfrm>
+          <a:prstGeom prst="rect">
+            <a:avLst/>
+          </a:prstGeom>
+        </p:spPr>
+      </p:pic>
+    </p:spTree>
+    <p:extLst>
+      <p:ext uri="{BB962C8B-B14F-4D97-AF65-F5344CB8AC3E}">
+        <p14:creationId xmlns:p14="http://schemas.microsoft.com/office/powerpoint/2010/main" val="2806356525"/>
+      </p:ext>
+    </p:extLst>
+  </p:cSld>
+  <p:clrMapOvr>
+    <a:masterClrMapping/>
+  </p:clrMapOvr>
+</p:sld>
+</file>
+
+<file path=ppt/slides/slide13.xml><?xml version="1.0" encoding="utf-8"?>
+<p:sld xmlns:a="http://schemas.openxmlformats.org/drawingml/2006/main" xmlns:r="http://schemas.openxmlformats.org/officeDocument/2006/relationships" xmlns:p="http://schemas.openxmlformats.org/presentationml/2006/main">
+  <p:cSld>
+    <p:spTree>
+      <p:nvGrpSpPr>
+        <p:cNvPr id="1" name="">
+          <a:extLst>
+            <a:ext uri="{FF2B5EF4-FFF2-40B4-BE49-F238E27FC236}">
+              <a16:creationId xmlns:a16="http://schemas.microsoft.com/office/drawing/2014/main" id="{76725AFF-FD18-4989-4C6C-5732EA2C8E1B}"/>
+            </a:ext>
+          </a:extLst>
+        </p:cNvPr>
+        <p:cNvGrpSpPr/>
+        <p:nvPr/>
+      </p:nvGrpSpPr>
+      <p:grpSpPr>
+        <a:xfrm>
+          <a:off x="0" y="0"/>
+          <a:ext cx="0" cy="0"/>
+          <a:chOff x="0" y="0"/>
+          <a:chExt cx="0" cy="0"/>
+        </a:xfrm>
+      </p:grpSpPr>
+      <p:sp>
+        <p:nvSpPr>
+          <p:cNvPr id="2" name="Title 1">
+            <a:extLst>
+              <a:ext uri="{FF2B5EF4-FFF2-40B4-BE49-F238E27FC236}">
+                <a16:creationId xmlns:a16="http://schemas.microsoft.com/office/drawing/2014/main" id="{B95EF0AA-5621-01D3-11FC-B28CBFC20AC0}"/>
+              </a:ext>
+            </a:extLst>
+          </p:cNvPr>
+          <p:cNvSpPr>
+            <a:spLocks noGrp="1"/>
+          </p:cNvSpPr>
+          <p:nvPr>
+            <p:ph type="title"/>
+          </p:nvPr>
+        </p:nvSpPr>
+        <p:spPr/>
+        <p:txBody>
+          <a:bodyPr/>
+          <a:lstStyle/>
+          <a:p>
+            <a:r>
+              <a:rPr lang="en-US" dirty="0"/>
+              <a:t>MOSFET current equations </a:t>
+            </a:r>
+          </a:p>
+        </p:txBody>
+      </p:sp>
+      <p:pic>
+        <p:nvPicPr>
+          <p:cNvPr id="6" name="Picture 5" descr="A math equations on a white background&#10;&#10;AI-generated content may be incorrect.">
+            <a:extLst>
+              <a:ext uri="{FF2B5EF4-FFF2-40B4-BE49-F238E27FC236}">
+                <a16:creationId xmlns:a16="http://schemas.microsoft.com/office/drawing/2014/main" id="{7BE9F184-887C-D970-8555-2AD51819B4F1}"/>
+              </a:ext>
+            </a:extLst>
+          </p:cNvPr>
+          <p:cNvPicPr>
+            <a:picLocks noChangeAspect="1"/>
+          </p:cNvPicPr>
+          <p:nvPr/>
+        </p:nvPicPr>
+        <p:blipFill>
+          <a:blip r:embed="rId2">
+            <a:extLst>
+              <a:ext uri="{28A0092B-C50C-407E-A947-70E740481C1C}">
+                <a14:useLocalDpi xmlns:a14="http://schemas.microsoft.com/office/drawing/2010/main" val="0"/>
+              </a:ext>
+            </a:extLst>
+          </a:blip>
+          <a:stretch>
+            <a:fillRect/>
+          </a:stretch>
+        </p:blipFill>
+        <p:spPr>
+          <a:xfrm>
+            <a:off x="441771" y="800017"/>
+            <a:ext cx="5794276" cy="2532463"/>
+          </a:xfrm>
+          <a:prstGeom prst="rect">
+            <a:avLst/>
+          </a:prstGeom>
+        </p:spPr>
+      </p:pic>
+      <p:pic>
+        <p:nvPicPr>
+          <p:cNvPr id="9" name="Picture 8" descr="A math equations and numbers&#10;&#10;AI-generated content may be incorrect.">
+            <a:extLst>
+              <a:ext uri="{FF2B5EF4-FFF2-40B4-BE49-F238E27FC236}">
+                <a16:creationId xmlns:a16="http://schemas.microsoft.com/office/drawing/2014/main" id="{B8FDF083-4658-8DB8-2483-B7858A28779B}"/>
+              </a:ext>
+            </a:extLst>
+          </p:cNvPr>
+          <p:cNvPicPr>
+            <a:picLocks noChangeAspect="1"/>
+          </p:cNvPicPr>
+          <p:nvPr/>
+        </p:nvPicPr>
+        <p:blipFill>
+          <a:blip r:embed="rId3">
+            <a:extLst>
+              <a:ext uri="{28A0092B-C50C-407E-A947-70E740481C1C}">
+                <a14:useLocalDpi xmlns:a14="http://schemas.microsoft.com/office/drawing/2010/main" val="0"/>
+              </a:ext>
+            </a:extLst>
+          </a:blip>
+          <a:stretch>
+            <a:fillRect/>
+          </a:stretch>
+        </p:blipFill>
+        <p:spPr>
+          <a:xfrm>
+            <a:off x="91270" y="3429000"/>
+            <a:ext cx="6810827" cy="2274710"/>
+          </a:xfrm>
+          <a:prstGeom prst="rect">
+            <a:avLst/>
+          </a:prstGeom>
+        </p:spPr>
+      </p:pic>
+      <p:pic>
+        <p:nvPicPr>
+          <p:cNvPr id="11" name="Picture 10" descr="A math equations and formulas&#10;&#10;AI-generated content may be incorrect.">
+            <a:extLst>
+              <a:ext uri="{FF2B5EF4-FFF2-40B4-BE49-F238E27FC236}">
+                <a16:creationId xmlns:a16="http://schemas.microsoft.com/office/drawing/2014/main" id="{8B0D85BF-D381-5C1E-0D6B-3AD012D06E2E}"/>
+              </a:ext>
+            </a:extLst>
+          </p:cNvPr>
+          <p:cNvPicPr>
+            <a:picLocks noChangeAspect="1"/>
+          </p:cNvPicPr>
+          <p:nvPr/>
+        </p:nvPicPr>
+        <p:blipFill>
+          <a:blip r:embed="rId4">
+            <a:extLst>
+              <a:ext uri="{28A0092B-C50C-407E-A947-70E740481C1C}">
+                <a14:useLocalDpi xmlns:a14="http://schemas.microsoft.com/office/drawing/2010/main" val="0"/>
+              </a:ext>
+            </a:extLst>
+          </a:blip>
+          <a:stretch>
+            <a:fillRect/>
+          </a:stretch>
+        </p:blipFill>
+        <p:spPr>
+          <a:xfrm>
+            <a:off x="5646553" y="2478984"/>
+            <a:ext cx="5565974" cy="1900031"/>
+          </a:xfrm>
+          <a:prstGeom prst="rect">
+            <a:avLst/>
+          </a:prstGeom>
+        </p:spPr>
+      </p:pic>
+    </p:spTree>
+    <p:extLst>
+      <p:ext uri="{BB962C8B-B14F-4D97-AF65-F5344CB8AC3E}">
+        <p14:creationId xmlns:p14="http://schemas.microsoft.com/office/powerpoint/2010/main" val="2523007640"/>
+      </p:ext>
+    </p:extLst>
+  </p:cSld>
+  <p:clrMapOvr>
+    <a:masterClrMapping/>
+  </p:clrMapOvr>
+</p:sld>
+</file>
+
+<file path=ppt/slides/slide14.xml><?xml version="1.0" encoding="utf-8"?>
+<p:sld xmlns:a="http://schemas.openxmlformats.org/drawingml/2006/main" xmlns:r="http://schemas.openxmlformats.org/officeDocument/2006/relationships" xmlns:p="http://schemas.openxmlformats.org/presentationml/2006/main">
+  <p:cSld>
+    <p:spTree>
+      <p:nvGrpSpPr>
+        <p:cNvPr id="1" name="">
+          <a:extLst>
+            <a:ext uri="{FF2B5EF4-FFF2-40B4-BE49-F238E27FC236}">
+              <a16:creationId xmlns:a16="http://schemas.microsoft.com/office/drawing/2014/main" id="{6E0D5C00-1371-FD38-97E6-65E9A0A1BA4A}"/>
+            </a:ext>
+          </a:extLst>
+        </p:cNvPr>
+        <p:cNvGrpSpPr/>
+        <p:nvPr/>
+      </p:nvGrpSpPr>
+      <p:grpSpPr>
+        <a:xfrm>
+          <a:off x="0" y="0"/>
+          <a:ext cx="0" cy="0"/>
+          <a:chOff x="0" y="0"/>
+          <a:chExt cx="0" cy="0"/>
+        </a:xfrm>
+      </p:grpSpPr>
+      <p:sp>
+        <p:nvSpPr>
+          <p:cNvPr id="2" name="Title 1">
+            <a:extLst>
+              <a:ext uri="{FF2B5EF4-FFF2-40B4-BE49-F238E27FC236}">
+                <a16:creationId xmlns:a16="http://schemas.microsoft.com/office/drawing/2014/main" id="{C57AAF45-BAEB-0A6A-CA4E-6163E58179DC}"/>
+              </a:ext>
+            </a:extLst>
+          </p:cNvPr>
+          <p:cNvSpPr>
+            <a:spLocks noGrp="1"/>
+          </p:cNvSpPr>
+          <p:nvPr>
+            <p:ph type="title"/>
+          </p:nvPr>
+        </p:nvSpPr>
+        <p:spPr/>
+        <p:txBody>
+          <a:bodyPr/>
+          <a:lstStyle/>
+          <a:p>
+            <a:r>
+              <a:rPr lang="en-US" dirty="0"/>
+              <a:t>MOSFET current equations </a:t>
+            </a:r>
+          </a:p>
+        </p:txBody>
+      </p:sp>
+      <p:pic>
+        <p:nvPicPr>
+          <p:cNvPr id="6" name="Picture 5" descr="A math equations on a white background&#10;&#10;AI-generated content may be incorrect.">
+            <a:extLst>
+              <a:ext uri="{FF2B5EF4-FFF2-40B4-BE49-F238E27FC236}">
+                <a16:creationId xmlns:a16="http://schemas.microsoft.com/office/drawing/2014/main" id="{AE32A7A9-6E26-96A5-86F7-35121DEF7182}"/>
+              </a:ext>
+            </a:extLst>
+          </p:cNvPr>
+          <p:cNvPicPr>
+            <a:picLocks noChangeAspect="1"/>
+          </p:cNvPicPr>
+          <p:nvPr/>
+        </p:nvPicPr>
+        <p:blipFill>
+          <a:blip r:embed="rId2">
+            <a:extLst>
+              <a:ext uri="{28A0092B-C50C-407E-A947-70E740481C1C}">
+                <a14:useLocalDpi xmlns:a14="http://schemas.microsoft.com/office/drawing/2010/main" val="0"/>
+              </a:ext>
+            </a:extLst>
+          </a:blip>
+          <a:stretch>
+            <a:fillRect/>
+          </a:stretch>
+        </p:blipFill>
+        <p:spPr>
+          <a:xfrm>
+            <a:off x="441771" y="800017"/>
+            <a:ext cx="5794276" cy="2532463"/>
+          </a:xfrm>
+          <a:prstGeom prst="rect">
+            <a:avLst/>
+          </a:prstGeom>
+        </p:spPr>
+      </p:pic>
+      <p:pic>
+        <p:nvPicPr>
+          <p:cNvPr id="9" name="Picture 8" descr="A math equations and numbers&#10;&#10;AI-generated content may be incorrect.">
+            <a:extLst>
+              <a:ext uri="{FF2B5EF4-FFF2-40B4-BE49-F238E27FC236}">
+                <a16:creationId xmlns:a16="http://schemas.microsoft.com/office/drawing/2014/main" id="{D44B29C7-16DB-3E23-8761-B3790DDF624F}"/>
+              </a:ext>
+            </a:extLst>
+          </p:cNvPr>
+          <p:cNvPicPr>
+            <a:picLocks noChangeAspect="1"/>
+          </p:cNvPicPr>
+          <p:nvPr/>
+        </p:nvPicPr>
+        <p:blipFill>
+          <a:blip r:embed="rId3">
+            <a:extLst>
+              <a:ext uri="{28A0092B-C50C-407E-A947-70E740481C1C}">
+                <a14:useLocalDpi xmlns:a14="http://schemas.microsoft.com/office/drawing/2010/main" val="0"/>
+              </a:ext>
+            </a:extLst>
+          </a:blip>
+          <a:stretch>
+            <a:fillRect/>
+          </a:stretch>
+        </p:blipFill>
+        <p:spPr>
+          <a:xfrm>
+            <a:off x="91270" y="3429000"/>
+            <a:ext cx="6810827" cy="2274710"/>
+          </a:xfrm>
+          <a:prstGeom prst="rect">
+            <a:avLst/>
+          </a:prstGeom>
+        </p:spPr>
+      </p:pic>
+      <p:pic>
+        <p:nvPicPr>
+          <p:cNvPr id="5" name="Picture 4" descr="A math equation with black text&#10;&#10;AI-generated content may be incorrect.">
+            <a:extLst>
+              <a:ext uri="{FF2B5EF4-FFF2-40B4-BE49-F238E27FC236}">
+                <a16:creationId xmlns:a16="http://schemas.microsoft.com/office/drawing/2014/main" id="{DAB6109F-8963-AFF6-940F-435446B9C32F}"/>
+              </a:ext>
+            </a:extLst>
+          </p:cNvPr>
+          <p:cNvPicPr>
+            <a:picLocks noChangeAspect="1"/>
+          </p:cNvPicPr>
+          <p:nvPr/>
+        </p:nvPicPr>
+        <p:blipFill>
+          <a:blip r:embed="rId4">
+            <a:extLst>
+              <a:ext uri="{28A0092B-C50C-407E-A947-70E740481C1C}">
+                <a14:useLocalDpi xmlns:a14="http://schemas.microsoft.com/office/drawing/2010/main" val="0"/>
+              </a:ext>
+            </a:extLst>
+          </a:blip>
+          <a:stretch>
+            <a:fillRect/>
+          </a:stretch>
+        </p:blipFill>
+        <p:spPr>
+          <a:xfrm>
+            <a:off x="5604717" y="2295504"/>
+            <a:ext cx="6145512" cy="2073952"/>
+          </a:xfrm>
+          <a:prstGeom prst="rect">
+            <a:avLst/>
+          </a:prstGeom>
+        </p:spPr>
+      </p:pic>
+    </p:spTree>
+    <p:extLst>
+      <p:ext uri="{BB962C8B-B14F-4D97-AF65-F5344CB8AC3E}">
+        <p14:creationId xmlns:p14="http://schemas.microsoft.com/office/powerpoint/2010/main" val="898942420"/>
+      </p:ext>
+    </p:extLst>
+  </p:cSld>
+  <p:clrMapOvr>
+    <a:masterClrMapping/>
+  </p:clrMapOvr>
+</p:sld>
+</file>
+
+<file path=ppt/slides/slide15.xml><?xml version="1.0" encoding="utf-8"?>
+<p:sld xmlns:a="http://schemas.openxmlformats.org/drawingml/2006/main" xmlns:r="http://schemas.openxmlformats.org/officeDocument/2006/relationships" xmlns:p="http://schemas.openxmlformats.org/presentationml/2006/main">
+  <p:cSld>
+    <p:spTree>
+      <p:nvGrpSpPr>
+        <p:cNvPr id="1" name=""/>
+        <p:cNvGrpSpPr/>
+        <p:nvPr/>
+      </p:nvGrpSpPr>
+      <p:grpSpPr>
+        <a:xfrm>
+          <a:off x="0" y="0"/>
+          <a:ext cx="0" cy="0"/>
+          <a:chOff x="0" y="0"/>
+          <a:chExt cx="0" cy="0"/>
+        </a:xfrm>
+      </p:grpSpPr>
+      <p:sp>
+        <p:nvSpPr>
+          <p:cNvPr id="27651" name="Rectangle 3">
+            <a:extLst>
+              <a:ext uri="{FF2B5EF4-FFF2-40B4-BE49-F238E27FC236}">
+                <a16:creationId xmlns:a16="http://schemas.microsoft.com/office/drawing/2014/main" id="{59ADB478-D071-3E01-1AFE-A6C1A2D7E0FC}"/>
+              </a:ext>
+            </a:extLst>
+          </p:cNvPr>
+          <p:cNvSpPr>
+            <a:spLocks noChangeArrowheads="1"/>
+          </p:cNvSpPr>
+          <p:nvPr/>
+        </p:nvSpPr>
+        <p:spPr bwMode="auto">
+          <a:xfrm>
+            <a:off x="-1" y="0"/>
+            <a:ext cx="9314121" cy="609600"/>
+          </a:xfrm>
+          <a:prstGeom prst="rect">
+            <a:avLst/>
+          </a:prstGeom>
+          <a:noFill/>
+          <a:ln>
+            <a:noFill/>
+          </a:ln>
+          <a:extLst>
+            <a:ext uri="{909E8E84-426E-40DD-AFC4-6F175D3DCCD1}">
+              <a14:hiddenFill xmlns:a14="http://schemas.microsoft.com/office/drawing/2010/main">
+                <a:solidFill>
+                  <a:srgbClr val="FFFFFF"/>
+                </a:solidFill>
+              </a14:hiddenFill>
+            </a:ext>
+            <a:ext uri="{91240B29-F687-4F45-9708-019B960494DF}">
+              <a14:hiddenLine xmlns:a14="http://schemas.microsoft.com/office/drawing/2010/main" w="9525">
+                <a:solidFill>
+                  <a:srgbClr val="000000"/>
+                </a:solidFill>
+                <a:miter lim="800000"/>
+                <a:headEnd/>
+                <a:tailEnd/>
+              </a14:hiddenLine>
+            </a:ext>
+          </a:extLst>
+        </p:spPr>
+        <p:txBody>
+          <a:bodyPr anchor="ctr"/>
+          <a:lstStyle>
+            <a:lvl1pPr>
+              <a:spcBef>
+                <a:spcPct val="20000"/>
+              </a:spcBef>
+              <a:buChar char="•"/>
+              <a:defRPr sz="3200">
+                <a:solidFill>
+                  <a:schemeClr val="tx1"/>
+                </a:solidFill>
+                <a:latin typeface="Times New Roman" panose="02020603050405020304" pitchFamily="18" charset="0"/>
+              </a:defRPr>
+            </a:lvl1pPr>
+            <a:lvl2pPr marL="742950" indent="-285750">
+              <a:spcBef>
+                <a:spcPct val="20000"/>
+              </a:spcBef>
+              <a:buChar char="–"/>
+              <a:defRPr sz="2800">
+                <a:solidFill>
+                  <a:schemeClr val="tx1"/>
+                </a:solidFill>
+                <a:latin typeface="Times New Roman" panose="02020603050405020304" pitchFamily="18" charset="0"/>
+              </a:defRPr>
+            </a:lvl2pPr>
+            <a:lvl3pPr marL="1143000" indent="-228600">
+              <a:spcBef>
+                <a:spcPct val="20000"/>
+              </a:spcBef>
+              <a:buChar char="•"/>
+              <a:defRPr sz="2400">
+                <a:solidFill>
+                  <a:schemeClr val="tx1"/>
+                </a:solidFill>
+                <a:latin typeface="Times New Roman" panose="02020603050405020304" pitchFamily="18" charset="0"/>
+              </a:defRPr>
+            </a:lvl3pPr>
+            <a:lvl4pPr marL="1600200" indent="-228600">
+              <a:spcBef>
+                <a:spcPct val="20000"/>
+              </a:spcBef>
+              <a:buChar char="–"/>
+              <a:defRPr sz="2000">
+                <a:solidFill>
+                  <a:schemeClr val="tx1"/>
+                </a:solidFill>
+                <a:latin typeface="Times New Roman" panose="02020603050405020304" pitchFamily="18" charset="0"/>
+              </a:defRPr>
+            </a:lvl4pPr>
+            <a:lvl5pPr marL="2057400" indent="-228600">
+              <a:spcBef>
+                <a:spcPct val="20000"/>
+              </a:spcBef>
+              <a:buChar char="»"/>
+              <a:defRPr sz="2000">
+                <a:solidFill>
+                  <a:schemeClr val="tx1"/>
+                </a:solidFill>
+                <a:latin typeface="Times New Roman" panose="02020603050405020304" pitchFamily="18" charset="0"/>
+              </a:defRPr>
+            </a:lvl5pPr>
+            <a:lvl6pPr marL="2514600" indent="-228600" eaLnBrk="0" fontAlgn="base" hangingPunct="0">
+              <a:spcBef>
+                <a:spcPct val="20000"/>
+              </a:spcBef>
+              <a:spcAft>
+                <a:spcPct val="0"/>
+              </a:spcAft>
+              <a:buChar char="»"/>
+              <a:defRPr sz="2000">
+                <a:solidFill>
+                  <a:schemeClr val="tx1"/>
+                </a:solidFill>
+                <a:latin typeface="Times New Roman" panose="02020603050405020304" pitchFamily="18" charset="0"/>
+              </a:defRPr>
+            </a:lvl6pPr>
+            <a:lvl7pPr marL="2971800" indent="-228600" eaLnBrk="0" fontAlgn="base" hangingPunct="0">
+              <a:spcBef>
+                <a:spcPct val="20000"/>
+              </a:spcBef>
+              <a:spcAft>
+                <a:spcPct val="0"/>
+              </a:spcAft>
+              <a:buChar char="»"/>
+              <a:defRPr sz="2000">
+                <a:solidFill>
+                  <a:schemeClr val="tx1"/>
+                </a:solidFill>
+                <a:latin typeface="Times New Roman" panose="02020603050405020304" pitchFamily="18" charset="0"/>
+              </a:defRPr>
+            </a:lvl7pPr>
+            <a:lvl8pPr marL="3429000" indent="-228600" eaLnBrk="0" fontAlgn="base" hangingPunct="0">
+              <a:spcBef>
+                <a:spcPct val="20000"/>
+              </a:spcBef>
+              <a:spcAft>
+                <a:spcPct val="0"/>
+              </a:spcAft>
+              <a:buChar char="»"/>
+              <a:defRPr sz="2000">
+                <a:solidFill>
+                  <a:schemeClr val="tx1"/>
+                </a:solidFill>
+                <a:latin typeface="Times New Roman" panose="02020603050405020304" pitchFamily="18" charset="0"/>
+              </a:defRPr>
+            </a:lvl8pPr>
+            <a:lvl9pPr marL="3886200" indent="-228600" eaLnBrk="0" fontAlgn="base" hangingPunct="0">
+              <a:spcBef>
+                <a:spcPct val="20000"/>
+              </a:spcBef>
+              <a:spcAft>
+                <a:spcPct val="0"/>
+              </a:spcAft>
+              <a:buChar char="»"/>
+              <a:defRPr sz="2000">
+                <a:solidFill>
+                  <a:schemeClr val="tx1"/>
+                </a:solidFill>
+                <a:latin typeface="Times New Roman" panose="02020603050405020304" pitchFamily="18" charset="0"/>
+              </a:defRPr>
+            </a:lvl9pPr>
+          </a:lstStyle>
+          <a:p>
+            <a:pPr>
+              <a:spcBef>
+                <a:spcPct val="0"/>
+              </a:spcBef>
+              <a:buFontTx/>
+              <a:buNone/>
+            </a:pPr>
+            <a:r>
+              <a:rPr lang="en-US" altLang="en-US" dirty="0">
+                <a:solidFill>
+                  <a:srgbClr val="991B1E"/>
+                </a:solidFill>
+                <a:latin typeface="PT Sans" panose="020B0503020203020204" pitchFamily="34" charset="0"/>
+                <a:ea typeface="Source Sans Pro" panose="020B0503030403020204" pitchFamily="34" charset="0"/>
+                <a:cs typeface="Segoe UI" panose="020B0502040204020203" pitchFamily="34" charset="0"/>
+              </a:rPr>
+              <a:t>CMOS (Complementary MOS) Inverter</a:t>
+            </a:r>
+          </a:p>
+        </p:txBody>
+      </p:sp>
+      <p:pic>
+        <p:nvPicPr>
+          <p:cNvPr id="27652" name="Picture 5">
+            <a:extLst>
+              <a:ext uri="{FF2B5EF4-FFF2-40B4-BE49-F238E27FC236}">
+                <a16:creationId xmlns:a16="http://schemas.microsoft.com/office/drawing/2014/main" id="{2678F65C-C2BC-1220-4631-E31A2D6BBBB1}"/>
               </a:ext>
             </a:extLst>
           </p:cNvPr>
@@ -4196,15 +3939,15 @@
               </a:ext>
             </a:extLst>
           </a:blip>
-          <a:srcRect l="3339" r="4289" b="14951"/>
+          <a:srcRect b="10323"/>
           <a:stretch>
             <a:fillRect/>
           </a:stretch>
         </p:blipFill>
         <p:spPr bwMode="auto">
           <a:xfrm>
-            <a:off x="2895600" y="1470026"/>
-            <a:ext cx="6324600" cy="4551363"/>
+            <a:off x="3276600" y="971551"/>
+            <a:ext cx="5562600" cy="4278313"/>
           </a:xfrm>
           <a:prstGeom prst="rect">
             <a:avLst/>
@@ -4234,384 +3977,96 @@
           </a:extLst>
         </p:spPr>
       </p:pic>
+    </p:spTree>
+  </p:cSld>
+  <p:clrMapOvr>
+    <a:masterClrMapping/>
+  </p:clrMapOvr>
+</p:sld>
+</file>
+
+<file path=ppt/slides/slide16.xml><?xml version="1.0" encoding="utf-8"?>
+<p:sld xmlns:a="http://schemas.openxmlformats.org/drawingml/2006/main" xmlns:r="http://schemas.openxmlformats.org/officeDocument/2006/relationships" xmlns:p="http://schemas.openxmlformats.org/presentationml/2006/main">
+  <p:cSld>
+    <p:spTree>
+      <p:nvGrpSpPr>
+        <p:cNvPr id="1" name=""/>
+        <p:cNvGrpSpPr/>
+        <p:nvPr/>
+      </p:nvGrpSpPr>
+      <p:grpSpPr>
+        <a:xfrm>
+          <a:off x="0" y="0"/>
+          <a:ext cx="0" cy="0"/>
+          <a:chOff x="0" y="0"/>
+          <a:chExt cx="0" cy="0"/>
+        </a:xfrm>
+      </p:grpSpPr>
       <p:sp>
         <p:nvSpPr>
-          <p:cNvPr id="31748" name="AutoShape 4">
+          <p:cNvPr id="28674" name="Rectangle 2">
             <a:extLst>
               <a:ext uri="{FF2B5EF4-FFF2-40B4-BE49-F238E27FC236}">
-                <a16:creationId xmlns:a16="http://schemas.microsoft.com/office/drawing/2014/main" id="{84B1BA75-81F5-EF6A-9395-EE4DB770F733}"/>
+                <a16:creationId xmlns:a16="http://schemas.microsoft.com/office/drawing/2014/main" id="{77B00A0D-2389-B5F5-B52D-41D2D3C79F3B}"/>
               </a:ext>
             </a:extLst>
           </p:cNvPr>
           <p:cNvSpPr>
-            <a:spLocks/>
+            <a:spLocks noGrp="1" noChangeArrowheads="1"/>
           </p:cNvSpPr>
-          <p:nvPr/>
+          <p:nvPr>
+            <p:ph type="title"/>
+          </p:nvPr>
         </p:nvSpPr>
-        <p:spPr bwMode="auto">
-          <a:xfrm rot="16200000">
-            <a:off x="6019800" y="1174750"/>
-            <a:ext cx="381000" cy="2362200"/>
+        <p:spPr>
+          <a:xfrm>
+            <a:off x="3618" y="-4726"/>
+            <a:ext cx="7772400" cy="723900"/>
           </a:xfrm>
-          <a:prstGeom prst="rightBrace">
-            <a:avLst>
-              <a:gd name="adj1" fmla="val 51667"/>
-              <a:gd name="adj2" fmla="val 50000"/>
-            </a:avLst>
-          </a:prstGeom>
-          <a:noFill/>
-          <a:ln w="9525">
-            <a:solidFill>
-              <a:schemeClr val="tx1"/>
-            </a:solidFill>
-            <a:round/>
-            <a:headEnd/>
-            <a:tailEnd/>
-          </a:ln>
-          <a:extLst>
-            <a:ext uri="{909E8E84-426E-40DD-AFC4-6F175D3DCCD1}">
-              <a14:hiddenFill xmlns:a14="http://schemas.microsoft.com/office/drawing/2010/main">
-                <a:solidFill>
-                  <a:srgbClr val="FFFFFF"/>
-                </a:solidFill>
-              </a14:hiddenFill>
-            </a:ext>
-          </a:extLst>
         </p:spPr>
         <p:txBody>
-          <a:bodyPr wrap="none" anchor="ctr"/>
-          <a:lstStyle>
-            <a:lvl1pPr>
-              <a:spcBef>
-                <a:spcPct val="20000"/>
-              </a:spcBef>
-              <a:buChar char="•"/>
-              <a:defRPr sz="3200">
-                <a:solidFill>
-                  <a:schemeClr val="tx1"/>
-                </a:solidFill>
-                <a:latin typeface="Times New Roman" panose="02020603050405020304" pitchFamily="18" charset="0"/>
-              </a:defRPr>
-            </a:lvl1pPr>
-            <a:lvl2pPr marL="742950" indent="-285750">
-              <a:spcBef>
-                <a:spcPct val="20000"/>
-              </a:spcBef>
-              <a:buChar char="–"/>
-              <a:defRPr sz="2800">
-                <a:solidFill>
-                  <a:schemeClr val="tx1"/>
-                </a:solidFill>
-                <a:latin typeface="Times New Roman" panose="02020603050405020304" pitchFamily="18" charset="0"/>
-              </a:defRPr>
-            </a:lvl2pPr>
-            <a:lvl3pPr marL="1143000" indent="-228600">
-              <a:spcBef>
-                <a:spcPct val="20000"/>
-              </a:spcBef>
-              <a:buChar char="•"/>
-              <a:defRPr sz="2400">
-                <a:solidFill>
-                  <a:schemeClr val="tx1"/>
-                </a:solidFill>
-                <a:latin typeface="Times New Roman" panose="02020603050405020304" pitchFamily="18" charset="0"/>
-              </a:defRPr>
-            </a:lvl3pPr>
-            <a:lvl4pPr marL="1600200" indent="-228600">
-              <a:spcBef>
-                <a:spcPct val="20000"/>
-              </a:spcBef>
-              <a:buChar char="–"/>
-              <a:defRPr sz="2000">
-                <a:solidFill>
-                  <a:schemeClr val="tx1"/>
-                </a:solidFill>
-                <a:latin typeface="Times New Roman" panose="02020603050405020304" pitchFamily="18" charset="0"/>
-              </a:defRPr>
-            </a:lvl4pPr>
-            <a:lvl5pPr marL="2057400" indent="-228600">
-              <a:spcBef>
-                <a:spcPct val="20000"/>
-              </a:spcBef>
-              <a:buChar char="»"/>
-              <a:defRPr sz="2000">
-                <a:solidFill>
-                  <a:schemeClr val="tx1"/>
-                </a:solidFill>
-                <a:latin typeface="Times New Roman" panose="02020603050405020304" pitchFamily="18" charset="0"/>
-              </a:defRPr>
-            </a:lvl5pPr>
-            <a:lvl6pPr marL="2514600" indent="-228600" eaLnBrk="0" fontAlgn="base" hangingPunct="0">
-              <a:spcBef>
-                <a:spcPct val="20000"/>
-              </a:spcBef>
-              <a:spcAft>
-                <a:spcPct val="0"/>
-              </a:spcAft>
-              <a:buChar char="»"/>
-              <a:defRPr sz="2000">
-                <a:solidFill>
-                  <a:schemeClr val="tx1"/>
-                </a:solidFill>
-                <a:latin typeface="Times New Roman" panose="02020603050405020304" pitchFamily="18" charset="0"/>
-              </a:defRPr>
-            </a:lvl6pPr>
-            <a:lvl7pPr marL="2971800" indent="-228600" eaLnBrk="0" fontAlgn="base" hangingPunct="0">
-              <a:spcBef>
-                <a:spcPct val="20000"/>
-              </a:spcBef>
-              <a:spcAft>
-                <a:spcPct val="0"/>
-              </a:spcAft>
-              <a:buChar char="»"/>
-              <a:defRPr sz="2000">
-                <a:solidFill>
-                  <a:schemeClr val="tx1"/>
-                </a:solidFill>
-                <a:latin typeface="Times New Roman" panose="02020603050405020304" pitchFamily="18" charset="0"/>
-              </a:defRPr>
-            </a:lvl7pPr>
-            <a:lvl8pPr marL="3429000" indent="-228600" eaLnBrk="0" fontAlgn="base" hangingPunct="0">
-              <a:spcBef>
-                <a:spcPct val="20000"/>
-              </a:spcBef>
-              <a:spcAft>
-                <a:spcPct val="0"/>
-              </a:spcAft>
-              <a:buChar char="»"/>
-              <a:defRPr sz="2000">
-                <a:solidFill>
-                  <a:schemeClr val="tx1"/>
-                </a:solidFill>
-                <a:latin typeface="Times New Roman" panose="02020603050405020304" pitchFamily="18" charset="0"/>
-              </a:defRPr>
-            </a:lvl8pPr>
-            <a:lvl9pPr marL="3886200" indent="-228600" eaLnBrk="0" fontAlgn="base" hangingPunct="0">
-              <a:spcBef>
-                <a:spcPct val="20000"/>
-              </a:spcBef>
-              <a:spcAft>
-                <a:spcPct val="0"/>
-              </a:spcAft>
-              <a:buChar char="»"/>
-              <a:defRPr sz="2000">
-                <a:solidFill>
-                  <a:schemeClr val="tx1"/>
-                </a:solidFill>
-                <a:latin typeface="Times New Roman" panose="02020603050405020304" pitchFamily="18" charset="0"/>
-              </a:defRPr>
-            </a:lvl9pPr>
-          </a:lstStyle>
+          <a:bodyPr/>
+          <a:lstStyle/>
           <a:p>
-            <a:pPr algn="ctr" eaLnBrk="1" hangingPunct="1">
-              <a:spcBef>
-                <a:spcPct val="0"/>
-              </a:spcBef>
-              <a:buFontTx/>
-              <a:buNone/>
-            </a:pPr>
-            <a:endParaRPr lang="en-US" altLang="en-US" sz="2400"/>
+            <a:pPr eaLnBrk="1" hangingPunct="1"/>
+            <a:r>
+              <a:rPr lang="en-US" altLang="en-US" sz="4000" i="1" dirty="0"/>
+              <a:t>Qualitative discussion: n-MOSFET</a:t>
+            </a:r>
           </a:p>
         </p:txBody>
       </p:sp>
-      <p:sp>
-        <p:nvSpPr>
-          <p:cNvPr id="31749" name="AutoShape 5">
+      <p:pic>
+        <p:nvPicPr>
+          <p:cNvPr id="28675" name="Picture 3">
             <a:extLst>
               <a:ext uri="{FF2B5EF4-FFF2-40B4-BE49-F238E27FC236}">
-                <a16:creationId xmlns:a16="http://schemas.microsoft.com/office/drawing/2014/main" id="{A406EB6D-41E3-58D2-DAF1-3AA8772362A5}"/>
+                <a16:creationId xmlns:a16="http://schemas.microsoft.com/office/drawing/2014/main" id="{6EEBA240-2A8B-DEA6-2003-66D07890D47B}"/>
               </a:ext>
             </a:extLst>
           </p:cNvPr>
-          <p:cNvSpPr>
-            <a:spLocks/>
-          </p:cNvSpPr>
+          <p:cNvPicPr>
+            <a:picLocks noChangeAspect="1" noChangeArrowheads="1"/>
+          </p:cNvPicPr>
           <p:nvPr/>
-        </p:nvSpPr>
-        <p:spPr bwMode="auto">
-          <a:xfrm rot="16200000">
-            <a:off x="4076700" y="1746250"/>
-            <a:ext cx="228600" cy="1371600"/>
-          </a:xfrm>
-          <a:prstGeom prst="rightBrace">
-            <a:avLst>
-              <a:gd name="adj1" fmla="val 50000"/>
-              <a:gd name="adj2" fmla="val 50000"/>
-            </a:avLst>
-          </a:prstGeom>
-          <a:noFill/>
-          <a:ln w="9525">
-            <a:solidFill>
-              <a:schemeClr val="tx1"/>
-            </a:solidFill>
-            <a:round/>
-            <a:headEnd/>
-            <a:tailEnd/>
-          </a:ln>
-          <a:extLst>
-            <a:ext uri="{909E8E84-426E-40DD-AFC4-6F175D3DCCD1}">
-              <a14:hiddenFill xmlns:a14="http://schemas.microsoft.com/office/drawing/2010/main">
-                <a:solidFill>
-                  <a:srgbClr val="FFFFFF"/>
-                </a:solidFill>
-              </a14:hiddenFill>
-            </a:ext>
-          </a:extLst>
-        </p:spPr>
-        <p:txBody>
-          <a:bodyPr wrap="none" anchor="ctr"/>
-          <a:lstStyle>
-            <a:lvl1pPr>
-              <a:spcBef>
-                <a:spcPct val="20000"/>
-              </a:spcBef>
-              <a:buChar char="•"/>
-              <a:defRPr sz="3200">
-                <a:solidFill>
-                  <a:schemeClr val="tx1"/>
-                </a:solidFill>
-                <a:latin typeface="Times New Roman" panose="02020603050405020304" pitchFamily="18" charset="0"/>
-              </a:defRPr>
-            </a:lvl1pPr>
-            <a:lvl2pPr marL="742950" indent="-285750">
-              <a:spcBef>
-                <a:spcPct val="20000"/>
-              </a:spcBef>
-              <a:buChar char="–"/>
-              <a:defRPr sz="2800">
-                <a:solidFill>
-                  <a:schemeClr val="tx1"/>
-                </a:solidFill>
-                <a:latin typeface="Times New Roman" panose="02020603050405020304" pitchFamily="18" charset="0"/>
-              </a:defRPr>
-            </a:lvl2pPr>
-            <a:lvl3pPr marL="1143000" indent="-228600">
-              <a:spcBef>
-                <a:spcPct val="20000"/>
-              </a:spcBef>
-              <a:buChar char="•"/>
-              <a:defRPr sz="2400">
-                <a:solidFill>
-                  <a:schemeClr val="tx1"/>
-                </a:solidFill>
-                <a:latin typeface="Times New Roman" panose="02020603050405020304" pitchFamily="18" charset="0"/>
-              </a:defRPr>
-            </a:lvl3pPr>
-            <a:lvl4pPr marL="1600200" indent="-228600">
-              <a:spcBef>
-                <a:spcPct val="20000"/>
-              </a:spcBef>
-              <a:buChar char="–"/>
-              <a:defRPr sz="2000">
-                <a:solidFill>
-                  <a:schemeClr val="tx1"/>
-                </a:solidFill>
-                <a:latin typeface="Times New Roman" panose="02020603050405020304" pitchFamily="18" charset="0"/>
-              </a:defRPr>
-            </a:lvl4pPr>
-            <a:lvl5pPr marL="2057400" indent="-228600">
-              <a:spcBef>
-                <a:spcPct val="20000"/>
-              </a:spcBef>
-              <a:buChar char="»"/>
-              <a:defRPr sz="2000">
-                <a:solidFill>
-                  <a:schemeClr val="tx1"/>
-                </a:solidFill>
-                <a:latin typeface="Times New Roman" panose="02020603050405020304" pitchFamily="18" charset="0"/>
-              </a:defRPr>
-            </a:lvl5pPr>
-            <a:lvl6pPr marL="2514600" indent="-228600" eaLnBrk="0" fontAlgn="base" hangingPunct="0">
-              <a:spcBef>
-                <a:spcPct val="20000"/>
-              </a:spcBef>
-              <a:spcAft>
-                <a:spcPct val="0"/>
-              </a:spcAft>
-              <a:buChar char="»"/>
-              <a:defRPr sz="2000">
-                <a:solidFill>
-                  <a:schemeClr val="tx1"/>
-                </a:solidFill>
-                <a:latin typeface="Times New Roman" panose="02020603050405020304" pitchFamily="18" charset="0"/>
-              </a:defRPr>
-            </a:lvl6pPr>
-            <a:lvl7pPr marL="2971800" indent="-228600" eaLnBrk="0" fontAlgn="base" hangingPunct="0">
-              <a:spcBef>
-                <a:spcPct val="20000"/>
-              </a:spcBef>
-              <a:spcAft>
-                <a:spcPct val="0"/>
-              </a:spcAft>
-              <a:buChar char="»"/>
-              <a:defRPr sz="2000">
-                <a:solidFill>
-                  <a:schemeClr val="tx1"/>
-                </a:solidFill>
-                <a:latin typeface="Times New Roman" panose="02020603050405020304" pitchFamily="18" charset="0"/>
-              </a:defRPr>
-            </a:lvl7pPr>
-            <a:lvl8pPr marL="3429000" indent="-228600" eaLnBrk="0" fontAlgn="base" hangingPunct="0">
-              <a:spcBef>
-                <a:spcPct val="20000"/>
-              </a:spcBef>
-              <a:spcAft>
-                <a:spcPct val="0"/>
-              </a:spcAft>
-              <a:buChar char="»"/>
-              <a:defRPr sz="2000">
-                <a:solidFill>
-                  <a:schemeClr val="tx1"/>
-                </a:solidFill>
-                <a:latin typeface="Times New Roman" panose="02020603050405020304" pitchFamily="18" charset="0"/>
-              </a:defRPr>
-            </a:lvl8pPr>
-            <a:lvl9pPr marL="3886200" indent="-228600" eaLnBrk="0" fontAlgn="base" hangingPunct="0">
-              <a:spcBef>
-                <a:spcPct val="20000"/>
-              </a:spcBef>
-              <a:spcAft>
-                <a:spcPct val="0"/>
-              </a:spcAft>
-              <a:buChar char="»"/>
-              <a:defRPr sz="2000">
-                <a:solidFill>
-                  <a:schemeClr val="tx1"/>
-                </a:solidFill>
-                <a:latin typeface="Times New Roman" panose="02020603050405020304" pitchFamily="18" charset="0"/>
-              </a:defRPr>
-            </a:lvl9pPr>
-          </a:lstStyle>
-          <a:p>
-            <a:pPr algn="ctr" eaLnBrk="1" hangingPunct="1">
-              <a:spcBef>
-                <a:spcPct val="0"/>
-              </a:spcBef>
-              <a:buFontTx/>
-              <a:buNone/>
-            </a:pPr>
-            <a:endParaRPr lang="en-US" altLang="en-US" sz="2400"/>
-          </a:p>
-        </p:txBody>
-      </p:sp>
-      <p:sp>
-        <p:nvSpPr>
-          <p:cNvPr id="31750" name="Text Box 6">
+        </p:nvPicPr>
+        <p:blipFill>
+          <a:blip r:embed="rId2">
             <a:extLst>
-              <a:ext uri="{FF2B5EF4-FFF2-40B4-BE49-F238E27FC236}">
-                <a16:creationId xmlns:a16="http://schemas.microsoft.com/office/drawing/2014/main" id="{9313BA47-C8CA-1D61-C271-07AF8E4AB3F5}"/>
+              <a:ext uri="{28A0092B-C50C-407E-A947-70E740481C1C}">
+                <a14:useLocalDpi xmlns:a14="http://schemas.microsoft.com/office/drawing/2010/main" val="0"/>
               </a:ext>
             </a:extLst>
-          </p:cNvPr>
-          <p:cNvSpPr txBox="1">
-            <a:spLocks noChangeArrowheads="1"/>
-          </p:cNvSpPr>
-          <p:nvPr/>
-        </p:nvSpPr>
+          </a:blip>
+          <a:srcRect b="4576"/>
+          <a:stretch>
+            <a:fillRect/>
+          </a:stretch>
+        </p:blipFill>
         <p:spPr bwMode="auto">
           <a:xfrm>
-            <a:off x="5600700" y="1470026"/>
-            <a:ext cx="1225550" cy="701675"/>
+            <a:off x="2438400" y="812800"/>
+            <a:ext cx="3638550" cy="5334000"/>
           </a:xfrm>
           <a:prstGeom prst="rect">
             <a:avLst/>
@@ -4640,175 +4095,13 @@
             </a:ext>
           </a:extLst>
         </p:spPr>
-        <p:txBody>
-          <a:bodyPr wrap="none">
-            <a:spAutoFit/>
-          </a:bodyPr>
-          <a:lstStyle>
-            <a:lvl1pPr>
-              <a:spcBef>
-                <a:spcPct val="20000"/>
-              </a:spcBef>
-              <a:buChar char="•"/>
-              <a:defRPr sz="3200">
-                <a:solidFill>
-                  <a:schemeClr val="tx1"/>
-                </a:solidFill>
-                <a:latin typeface="Times New Roman" panose="02020603050405020304" pitchFamily="18" charset="0"/>
-              </a:defRPr>
-            </a:lvl1pPr>
-            <a:lvl2pPr marL="742950" indent="-285750">
-              <a:spcBef>
-                <a:spcPct val="20000"/>
-              </a:spcBef>
-              <a:buChar char="–"/>
-              <a:defRPr sz="2800">
-                <a:solidFill>
-                  <a:schemeClr val="tx1"/>
-                </a:solidFill>
-                <a:latin typeface="Times New Roman" panose="02020603050405020304" pitchFamily="18" charset="0"/>
-              </a:defRPr>
-            </a:lvl2pPr>
-            <a:lvl3pPr marL="1143000" indent="-228600">
-              <a:spcBef>
-                <a:spcPct val="20000"/>
-              </a:spcBef>
-              <a:buChar char="•"/>
-              <a:defRPr sz="2400">
-                <a:solidFill>
-                  <a:schemeClr val="tx1"/>
-                </a:solidFill>
-                <a:latin typeface="Times New Roman" panose="02020603050405020304" pitchFamily="18" charset="0"/>
-              </a:defRPr>
-            </a:lvl3pPr>
-            <a:lvl4pPr marL="1600200" indent="-228600">
-              <a:spcBef>
-                <a:spcPct val="20000"/>
-              </a:spcBef>
-              <a:buChar char="–"/>
-              <a:defRPr sz="2000">
-                <a:solidFill>
-                  <a:schemeClr val="tx1"/>
-                </a:solidFill>
-                <a:latin typeface="Times New Roman" panose="02020603050405020304" pitchFamily="18" charset="0"/>
-              </a:defRPr>
-            </a:lvl4pPr>
-            <a:lvl5pPr marL="2057400" indent="-228600">
-              <a:spcBef>
-                <a:spcPct val="20000"/>
-              </a:spcBef>
-              <a:buChar char="»"/>
-              <a:defRPr sz="2000">
-                <a:solidFill>
-                  <a:schemeClr val="tx1"/>
-                </a:solidFill>
-                <a:latin typeface="Times New Roman" panose="02020603050405020304" pitchFamily="18" charset="0"/>
-              </a:defRPr>
-            </a:lvl5pPr>
-            <a:lvl6pPr marL="2514600" indent="-228600" eaLnBrk="0" fontAlgn="base" hangingPunct="0">
-              <a:spcBef>
-                <a:spcPct val="20000"/>
-              </a:spcBef>
-              <a:spcAft>
-                <a:spcPct val="0"/>
-              </a:spcAft>
-              <a:buChar char="»"/>
-              <a:defRPr sz="2000">
-                <a:solidFill>
-                  <a:schemeClr val="tx1"/>
-                </a:solidFill>
-                <a:latin typeface="Times New Roman" panose="02020603050405020304" pitchFamily="18" charset="0"/>
-              </a:defRPr>
-            </a:lvl6pPr>
-            <a:lvl7pPr marL="2971800" indent="-228600" eaLnBrk="0" fontAlgn="base" hangingPunct="0">
-              <a:spcBef>
-                <a:spcPct val="20000"/>
-              </a:spcBef>
-              <a:spcAft>
-                <a:spcPct val="0"/>
-              </a:spcAft>
-              <a:buChar char="»"/>
-              <a:defRPr sz="2000">
-                <a:solidFill>
-                  <a:schemeClr val="tx1"/>
-                </a:solidFill>
-                <a:latin typeface="Times New Roman" panose="02020603050405020304" pitchFamily="18" charset="0"/>
-              </a:defRPr>
-            </a:lvl7pPr>
-            <a:lvl8pPr marL="3429000" indent="-228600" eaLnBrk="0" fontAlgn="base" hangingPunct="0">
-              <a:spcBef>
-                <a:spcPct val="20000"/>
-              </a:spcBef>
-              <a:spcAft>
-                <a:spcPct val="0"/>
-              </a:spcAft>
-              <a:buChar char="»"/>
-              <a:defRPr sz="2000">
-                <a:solidFill>
-                  <a:schemeClr val="tx1"/>
-                </a:solidFill>
-                <a:latin typeface="Times New Roman" panose="02020603050405020304" pitchFamily="18" charset="0"/>
-              </a:defRPr>
-            </a:lvl8pPr>
-            <a:lvl9pPr marL="3886200" indent="-228600" eaLnBrk="0" fontAlgn="base" hangingPunct="0">
-              <a:spcBef>
-                <a:spcPct val="20000"/>
-              </a:spcBef>
-              <a:spcAft>
-                <a:spcPct val="0"/>
-              </a:spcAft>
-              <a:buChar char="»"/>
-              <a:defRPr sz="2000">
-                <a:solidFill>
-                  <a:schemeClr val="tx1"/>
-                </a:solidFill>
-                <a:latin typeface="Times New Roman" panose="02020603050405020304" pitchFamily="18" charset="0"/>
-              </a:defRPr>
-            </a:lvl9pPr>
-          </a:lstStyle>
-          <a:p>
-            <a:pPr algn="ctr">
-              <a:spcBef>
-                <a:spcPct val="0"/>
-              </a:spcBef>
-              <a:buFontTx/>
-              <a:buNone/>
-            </a:pPr>
-            <a:r>
-              <a:rPr lang="en-US" altLang="en-US" sz="2000">
-                <a:solidFill>
-                  <a:schemeClr val="accent2"/>
-                </a:solidFill>
-              </a:rPr>
-              <a:t>Saturation</a:t>
-            </a:r>
-          </a:p>
-          <a:p>
-            <a:pPr algn="ctr">
-              <a:spcBef>
-                <a:spcPct val="0"/>
-              </a:spcBef>
-              <a:buFontTx/>
-              <a:buNone/>
-            </a:pPr>
-            <a:r>
-              <a:rPr lang="en-US" altLang="en-US" sz="2000">
-                <a:solidFill>
-                  <a:schemeClr val="accent2"/>
-                </a:solidFill>
-              </a:rPr>
-              <a:t>region</a:t>
-            </a:r>
-            <a:endParaRPr lang="en-US" altLang="en-US" sz="2000"/>
-          </a:p>
-        </p:txBody>
-      </p:sp>
+      </p:pic>
       <p:sp>
         <p:nvSpPr>
-          <p:cNvPr id="31751" name="Text Box 7">
+          <p:cNvPr id="28676" name="Text Box 19">
             <a:extLst>
               <a:ext uri="{FF2B5EF4-FFF2-40B4-BE49-F238E27FC236}">
-                <a16:creationId xmlns:a16="http://schemas.microsoft.com/office/drawing/2014/main" id="{ED1EF211-A8E4-028C-3CA4-EC7BE39D27FE}"/>
+                <a16:creationId xmlns:a16="http://schemas.microsoft.com/office/drawing/2014/main" id="{43B977F2-9295-8D41-CB46-1B52B131DF06}"/>
               </a:ext>
             </a:extLst>
           </p:cNvPr>
@@ -4819,8 +4112,8 @@
         </p:nvSpPr>
         <p:spPr bwMode="auto">
           <a:xfrm>
-            <a:off x="3752850" y="1555751"/>
-            <a:ext cx="846138" cy="701675"/>
+            <a:off x="6480175" y="1079501"/>
+            <a:ext cx="2895600" cy="701675"/>
           </a:xfrm>
           <a:prstGeom prst="rect">
             <a:avLst/>
@@ -4850,7 +4143,7 @@
           </a:extLst>
         </p:spPr>
         <p:txBody>
-          <a:bodyPr wrap="none">
+          <a:bodyPr>
             <a:spAutoFit/>
           </a:bodyPr>
           <a:lstStyle>
@@ -4976,7 +4269,7 @@
             </a:lvl9pPr>
           </a:lstStyle>
           <a:p>
-            <a:pPr algn="ctr">
+            <a:pPr>
               <a:spcBef>
                 <a:spcPct val="0"/>
               </a:spcBef>
@@ -4984,16 +4277,97 @@
               <a:buNone/>
             </a:pPr>
             <a:r>
+              <a:rPr lang="en-US" altLang="en-US" sz="2000" i="1">
+                <a:solidFill>
+                  <a:schemeClr val="accent2"/>
+                </a:solidFill>
+              </a:rPr>
+              <a:t>V</a:t>
+            </a:r>
+            <a:r>
+              <a:rPr lang="en-US" altLang="en-US" sz="2000" baseline="-25000">
+                <a:solidFill>
+                  <a:schemeClr val="accent2"/>
+                </a:solidFill>
+              </a:rPr>
+              <a:t>G </a:t>
+            </a:r>
+            <a:r>
               <a:rPr lang="en-US" altLang="en-US" sz="2000">
                 <a:solidFill>
                   <a:schemeClr val="accent2"/>
                 </a:solidFill>
               </a:rPr>
-              <a:t>Linear</a:t>
+              <a:t>&gt; </a:t>
+            </a:r>
+            <a:r>
+              <a:rPr lang="en-US" altLang="en-US" sz="2000" i="1">
+                <a:solidFill>
+                  <a:schemeClr val="accent2"/>
+                </a:solidFill>
+              </a:rPr>
+              <a:t>V</a:t>
+            </a:r>
+            <a:r>
+              <a:rPr lang="en-US" altLang="en-US" sz="2000" baseline="-25000">
+                <a:solidFill>
+                  <a:schemeClr val="accent2"/>
+                </a:solidFill>
+              </a:rPr>
+              <a:t>T </a:t>
+            </a:r>
+            <a:r>
+              <a:rPr lang="en-US" altLang="en-US" sz="2000">
+                <a:solidFill>
+                  <a:schemeClr val="accent2"/>
+                </a:solidFill>
+              </a:rPr>
+              <a:t>; </a:t>
+            </a:r>
+            <a:r>
+              <a:rPr lang="en-US" altLang="en-US" sz="2000" i="1">
+                <a:solidFill>
+                  <a:schemeClr val="accent2"/>
+                </a:solidFill>
+              </a:rPr>
+              <a:t>V</a:t>
+            </a:r>
+            <a:r>
+              <a:rPr lang="en-US" altLang="en-US" sz="2000" baseline="-25000">
+                <a:solidFill>
+                  <a:schemeClr val="accent2"/>
+                </a:solidFill>
+              </a:rPr>
+              <a:t>DS</a:t>
+            </a:r>
+            <a:r>
+              <a:rPr lang="en-US" altLang="en-US" sz="2000">
+                <a:solidFill>
+                  <a:schemeClr val="accent2"/>
+                </a:solidFill>
+              </a:rPr>
+              <a:t> </a:t>
+            </a:r>
+            <a:r>
+              <a:rPr lang="en-US" altLang="en-US" sz="2000">
+                <a:solidFill>
+                  <a:schemeClr val="accent2"/>
+                </a:solidFill>
+                <a:sym typeface="Symbol" panose="05050102010706020507" pitchFamily="18" charset="2"/>
+              </a:rPr>
+              <a:t></a:t>
+            </a:r>
+            <a:r>
+              <a:rPr lang="en-US" altLang="en-US" sz="2000">
+                <a:solidFill>
+                  <a:schemeClr val="accent2"/>
+                </a:solidFill>
+              </a:rPr>
+              <a:t> 0</a:t>
             </a:r>
           </a:p>
           <a:p>
-            <a:pPr algn="ctr">
+            <a:pPr>
               <a:spcBef>
                 <a:spcPct val="0"/>
               </a:spcBef>
@@ -5001,18 +4375,1039 @@
               <a:buNone/>
             </a:pPr>
             <a:r>
+              <a:rPr lang="en-US" altLang="en-US" sz="2000" i="1">
+                <a:solidFill>
+                  <a:schemeClr val="accent2"/>
+                </a:solidFill>
+              </a:rPr>
+              <a:t>I</a:t>
+            </a:r>
+            <a:r>
+              <a:rPr lang="en-US" altLang="en-US" sz="2000" baseline="-25000">
+                <a:solidFill>
+                  <a:schemeClr val="accent2"/>
+                </a:solidFill>
+              </a:rPr>
+              <a:t>D</a:t>
+            </a:r>
+            <a:r>
               <a:rPr lang="en-US" altLang="en-US" sz="2000">
                 <a:solidFill>
                   <a:schemeClr val="accent2"/>
                 </a:solidFill>
               </a:rPr>
-              <a:t>region</a:t>
-            </a:r>
-            <a:endParaRPr lang="en-US" altLang="en-US" sz="2400">
+              <a:t> increases with </a:t>
+            </a:r>
+            <a:r>
+              <a:rPr lang="en-US" altLang="en-US" sz="2000" i="1">
+                <a:solidFill>
+                  <a:schemeClr val="accent2"/>
+                </a:solidFill>
+              </a:rPr>
+              <a:t>V</a:t>
+            </a:r>
+            <a:r>
+              <a:rPr lang="en-US" altLang="en-US" sz="2000" baseline="-25000">
+                <a:solidFill>
+                  <a:schemeClr val="accent2"/>
+                </a:solidFill>
+              </a:rPr>
+              <a:t>DS</a:t>
+            </a:r>
+            <a:endParaRPr lang="en-US" altLang="en-US" sz="2000"/>
+          </a:p>
+        </p:txBody>
+      </p:sp>
+      <p:sp>
+        <p:nvSpPr>
+          <p:cNvPr id="28677" name="Text Box 20">
+            <a:extLst>
+              <a:ext uri="{FF2B5EF4-FFF2-40B4-BE49-F238E27FC236}">
+                <a16:creationId xmlns:a16="http://schemas.microsoft.com/office/drawing/2014/main" id="{FBCA5694-6C6E-C0DC-D7DC-A342776380B5}"/>
+              </a:ext>
+            </a:extLst>
+          </p:cNvPr>
+          <p:cNvSpPr txBox="1">
+            <a:spLocks noChangeArrowheads="1"/>
+          </p:cNvSpPr>
+          <p:nvPr/>
+        </p:nvSpPr>
+        <p:spPr bwMode="auto">
+          <a:xfrm>
+            <a:off x="6477001" y="2298701"/>
+            <a:ext cx="3216275" cy="1006475"/>
+          </a:xfrm>
+          <a:prstGeom prst="rect">
+            <a:avLst/>
+          </a:prstGeom>
+          <a:noFill/>
+          <a:ln>
+            <a:noFill/>
+          </a:ln>
+          <a:extLst>
+            <a:ext uri="{909E8E84-426E-40DD-AFC4-6F175D3DCCD1}">
+              <a14:hiddenFill xmlns:a14="http://schemas.microsoft.com/office/drawing/2010/main">
+                <a:solidFill>
+                  <a:srgbClr val="FFFFFF"/>
+                </a:solidFill>
+              </a14:hiddenFill>
+            </a:ext>
+            <a:ext uri="{91240B29-F687-4F45-9708-019B960494DF}">
+              <a14:hiddenLine xmlns:a14="http://schemas.microsoft.com/office/drawing/2010/main" w="9525">
+                <a:solidFill>
+                  <a:srgbClr val="000000"/>
+                </a:solidFill>
+                <a:miter lim="800000"/>
+                <a:headEnd/>
+                <a:tailEnd/>
+              </a14:hiddenLine>
+            </a:ext>
+          </a:extLst>
+        </p:spPr>
+        <p:txBody>
+          <a:bodyPr>
+            <a:spAutoFit/>
+          </a:bodyPr>
+          <a:lstStyle>
+            <a:lvl1pPr>
+              <a:spcBef>
+                <a:spcPct val="20000"/>
+              </a:spcBef>
+              <a:buChar char="•"/>
+              <a:defRPr sz="3200">
+                <a:solidFill>
+                  <a:schemeClr val="tx1"/>
+                </a:solidFill>
+                <a:latin typeface="Times New Roman" panose="02020603050405020304" pitchFamily="18" charset="0"/>
+              </a:defRPr>
+            </a:lvl1pPr>
+            <a:lvl2pPr marL="742950" indent="-285750">
+              <a:spcBef>
+                <a:spcPct val="20000"/>
+              </a:spcBef>
+              <a:buChar char="–"/>
+              <a:defRPr sz="2800">
+                <a:solidFill>
+                  <a:schemeClr val="tx1"/>
+                </a:solidFill>
+                <a:latin typeface="Times New Roman" panose="02020603050405020304" pitchFamily="18" charset="0"/>
+              </a:defRPr>
+            </a:lvl2pPr>
+            <a:lvl3pPr marL="1143000" indent="-228600">
+              <a:spcBef>
+                <a:spcPct val="20000"/>
+              </a:spcBef>
+              <a:buChar char="•"/>
+              <a:defRPr sz="2400">
+                <a:solidFill>
+                  <a:schemeClr val="tx1"/>
+                </a:solidFill>
+                <a:latin typeface="Times New Roman" panose="02020603050405020304" pitchFamily="18" charset="0"/>
+              </a:defRPr>
+            </a:lvl3pPr>
+            <a:lvl4pPr marL="1600200" indent="-228600">
+              <a:spcBef>
+                <a:spcPct val="20000"/>
+              </a:spcBef>
+              <a:buChar char="–"/>
+              <a:defRPr sz="2000">
+                <a:solidFill>
+                  <a:schemeClr val="tx1"/>
+                </a:solidFill>
+                <a:latin typeface="Times New Roman" panose="02020603050405020304" pitchFamily="18" charset="0"/>
+              </a:defRPr>
+            </a:lvl4pPr>
+            <a:lvl5pPr marL="2057400" indent="-228600">
+              <a:spcBef>
+                <a:spcPct val="20000"/>
+              </a:spcBef>
+              <a:buChar char="»"/>
+              <a:defRPr sz="2000">
+                <a:solidFill>
+                  <a:schemeClr val="tx1"/>
+                </a:solidFill>
+                <a:latin typeface="Times New Roman" panose="02020603050405020304" pitchFamily="18" charset="0"/>
+              </a:defRPr>
+            </a:lvl5pPr>
+            <a:lvl6pPr marL="2514600" indent="-228600" eaLnBrk="0" fontAlgn="base" hangingPunct="0">
+              <a:spcBef>
+                <a:spcPct val="20000"/>
+              </a:spcBef>
+              <a:spcAft>
+                <a:spcPct val="0"/>
+              </a:spcAft>
+              <a:buChar char="»"/>
+              <a:defRPr sz="2000">
+                <a:solidFill>
+                  <a:schemeClr val="tx1"/>
+                </a:solidFill>
+                <a:latin typeface="Times New Roman" panose="02020603050405020304" pitchFamily="18" charset="0"/>
+              </a:defRPr>
+            </a:lvl6pPr>
+            <a:lvl7pPr marL="2971800" indent="-228600" eaLnBrk="0" fontAlgn="base" hangingPunct="0">
+              <a:spcBef>
+                <a:spcPct val="20000"/>
+              </a:spcBef>
+              <a:spcAft>
+                <a:spcPct val="0"/>
+              </a:spcAft>
+              <a:buChar char="»"/>
+              <a:defRPr sz="2000">
+                <a:solidFill>
+                  <a:schemeClr val="tx1"/>
+                </a:solidFill>
+                <a:latin typeface="Times New Roman" panose="02020603050405020304" pitchFamily="18" charset="0"/>
+              </a:defRPr>
+            </a:lvl7pPr>
+            <a:lvl8pPr marL="3429000" indent="-228600" eaLnBrk="0" fontAlgn="base" hangingPunct="0">
+              <a:spcBef>
+                <a:spcPct val="20000"/>
+              </a:spcBef>
+              <a:spcAft>
+                <a:spcPct val="0"/>
+              </a:spcAft>
+              <a:buChar char="»"/>
+              <a:defRPr sz="2000">
+                <a:solidFill>
+                  <a:schemeClr val="tx1"/>
+                </a:solidFill>
+                <a:latin typeface="Times New Roman" panose="02020603050405020304" pitchFamily="18" charset="0"/>
+              </a:defRPr>
+            </a:lvl8pPr>
+            <a:lvl9pPr marL="3886200" indent="-228600" eaLnBrk="0" fontAlgn="base" hangingPunct="0">
+              <a:spcBef>
+                <a:spcPct val="20000"/>
+              </a:spcBef>
+              <a:spcAft>
+                <a:spcPct val="0"/>
+              </a:spcAft>
+              <a:buChar char="»"/>
+              <a:defRPr sz="2000">
+                <a:solidFill>
+                  <a:schemeClr val="tx1"/>
+                </a:solidFill>
+                <a:latin typeface="Times New Roman" panose="02020603050405020304" pitchFamily="18" charset="0"/>
+              </a:defRPr>
+            </a:lvl9pPr>
+          </a:lstStyle>
+          <a:p>
+            <a:pPr>
+              <a:spcBef>
+                <a:spcPct val="0"/>
+              </a:spcBef>
+              <a:buFontTx/>
+              <a:buNone/>
+            </a:pPr>
+            <a:r>
+              <a:rPr lang="en-US" altLang="en-US" sz="2000" i="1">
+                <a:solidFill>
+                  <a:schemeClr val="accent2"/>
+                </a:solidFill>
+              </a:rPr>
+              <a:t>V</a:t>
+            </a:r>
+            <a:r>
+              <a:rPr lang="en-US" altLang="en-US" sz="2000" baseline="-25000">
+                <a:solidFill>
+                  <a:schemeClr val="accent2"/>
+                </a:solidFill>
+              </a:rPr>
+              <a:t>G </a:t>
+            </a:r>
+            <a:r>
+              <a:rPr lang="en-US" altLang="en-US" sz="2000">
+                <a:solidFill>
+                  <a:schemeClr val="accent2"/>
+                </a:solidFill>
+              </a:rPr>
+              <a:t>&gt; </a:t>
+            </a:r>
+            <a:r>
+              <a:rPr lang="en-US" altLang="en-US" sz="2000" i="1">
+                <a:solidFill>
+                  <a:schemeClr val="accent2"/>
+                </a:solidFill>
+              </a:rPr>
+              <a:t>V</a:t>
+            </a:r>
+            <a:r>
+              <a:rPr lang="en-US" altLang="en-US" sz="2000" baseline="-25000">
+                <a:solidFill>
+                  <a:schemeClr val="accent2"/>
+                </a:solidFill>
+              </a:rPr>
+              <a:t>T</a:t>
+            </a:r>
+            <a:r>
+              <a:rPr lang="en-US" altLang="en-US" sz="2000">
+                <a:solidFill>
+                  <a:schemeClr val="accent2"/>
+                </a:solidFill>
+              </a:rPr>
+              <a:t>; </a:t>
+            </a:r>
+            <a:r>
+              <a:rPr lang="en-US" altLang="en-US" sz="2000" i="1">
+                <a:solidFill>
+                  <a:schemeClr val="accent2"/>
+                </a:solidFill>
+              </a:rPr>
+              <a:t>V</a:t>
+            </a:r>
+            <a:r>
+              <a:rPr lang="en-US" altLang="en-US" sz="2000" baseline="-25000">
+                <a:solidFill>
+                  <a:schemeClr val="accent2"/>
+                </a:solidFill>
+              </a:rPr>
+              <a:t>DS</a:t>
+            </a:r>
+            <a:r>
+              <a:rPr lang="en-US" altLang="en-US" sz="2000">
+                <a:solidFill>
+                  <a:schemeClr val="accent2"/>
+                </a:solidFill>
+              </a:rPr>
+              <a:t> small, &gt; 0</a:t>
+            </a:r>
+          </a:p>
+          <a:p>
+            <a:pPr>
+              <a:spcBef>
+                <a:spcPct val="0"/>
+              </a:spcBef>
+              <a:buFontTx/>
+              <a:buNone/>
+            </a:pPr>
+            <a:r>
+              <a:rPr lang="en-US" altLang="en-US" sz="2000" i="1">
+                <a:solidFill>
+                  <a:schemeClr val="accent2"/>
+                </a:solidFill>
+              </a:rPr>
+              <a:t>I</a:t>
+            </a:r>
+            <a:r>
+              <a:rPr lang="en-US" altLang="en-US" sz="2000" baseline="-25000">
+                <a:solidFill>
+                  <a:schemeClr val="accent2"/>
+                </a:solidFill>
+              </a:rPr>
+              <a:t>D</a:t>
+            </a:r>
+            <a:r>
+              <a:rPr lang="en-US" altLang="en-US" sz="2000">
+                <a:solidFill>
+                  <a:schemeClr val="accent2"/>
+                </a:solidFill>
+              </a:rPr>
+              <a:t> increases with </a:t>
+            </a:r>
+            <a:r>
+              <a:rPr lang="en-US" altLang="en-US" sz="2000" i="1">
+                <a:solidFill>
+                  <a:schemeClr val="accent2"/>
+                </a:solidFill>
+              </a:rPr>
+              <a:t>V</a:t>
+            </a:r>
+            <a:r>
+              <a:rPr lang="en-US" altLang="en-US" sz="2000" baseline="-25000">
+                <a:solidFill>
+                  <a:schemeClr val="accent2"/>
+                </a:solidFill>
+              </a:rPr>
+              <a:t>DS</a:t>
+            </a:r>
+            <a:r>
+              <a:rPr lang="en-US" altLang="en-US" sz="2000">
+                <a:solidFill>
+                  <a:schemeClr val="accent2"/>
+                </a:solidFill>
+              </a:rPr>
+              <a:t> , but rate of increase decreases.</a:t>
+            </a:r>
+          </a:p>
+        </p:txBody>
+      </p:sp>
+      <p:sp>
+        <p:nvSpPr>
+          <p:cNvPr id="28678" name="Text Box 21">
+            <a:extLst>
+              <a:ext uri="{FF2B5EF4-FFF2-40B4-BE49-F238E27FC236}">
+                <a16:creationId xmlns:a16="http://schemas.microsoft.com/office/drawing/2014/main" id="{6E080F32-741D-B058-3D56-46C4D6718AA0}"/>
+              </a:ext>
+            </a:extLst>
+          </p:cNvPr>
+          <p:cNvSpPr txBox="1">
+            <a:spLocks noChangeArrowheads="1"/>
+          </p:cNvSpPr>
+          <p:nvPr/>
+        </p:nvSpPr>
+        <p:spPr bwMode="auto">
+          <a:xfrm>
+            <a:off x="6480175" y="3594101"/>
+            <a:ext cx="3657600" cy="1006475"/>
+          </a:xfrm>
+          <a:prstGeom prst="rect">
+            <a:avLst/>
+          </a:prstGeom>
+          <a:noFill/>
+          <a:ln>
+            <a:noFill/>
+          </a:ln>
+          <a:extLst>
+            <a:ext uri="{909E8E84-426E-40DD-AFC4-6F175D3DCCD1}">
+              <a14:hiddenFill xmlns:a14="http://schemas.microsoft.com/office/drawing/2010/main">
+                <a:solidFill>
+                  <a:srgbClr val="FFFFFF"/>
+                </a:solidFill>
+              </a14:hiddenFill>
+            </a:ext>
+            <a:ext uri="{91240B29-F687-4F45-9708-019B960494DF}">
+              <a14:hiddenLine xmlns:a14="http://schemas.microsoft.com/office/drawing/2010/main" w="9525">
+                <a:solidFill>
+                  <a:srgbClr val="000000"/>
+                </a:solidFill>
+                <a:miter lim="800000"/>
+                <a:headEnd/>
+                <a:tailEnd/>
+              </a14:hiddenLine>
+            </a:ext>
+          </a:extLst>
+        </p:spPr>
+        <p:txBody>
+          <a:bodyPr>
+            <a:spAutoFit/>
+          </a:bodyPr>
+          <a:lstStyle>
+            <a:lvl1pPr>
+              <a:spcBef>
+                <a:spcPct val="20000"/>
+              </a:spcBef>
+              <a:buChar char="•"/>
+              <a:defRPr sz="3200">
+                <a:solidFill>
+                  <a:schemeClr val="tx1"/>
+                </a:solidFill>
+                <a:latin typeface="Times New Roman" panose="02020603050405020304" pitchFamily="18" charset="0"/>
+              </a:defRPr>
+            </a:lvl1pPr>
+            <a:lvl2pPr marL="742950" indent="-285750">
+              <a:spcBef>
+                <a:spcPct val="20000"/>
+              </a:spcBef>
+              <a:buChar char="–"/>
+              <a:defRPr sz="2800">
+                <a:solidFill>
+                  <a:schemeClr val="tx1"/>
+                </a:solidFill>
+                <a:latin typeface="Times New Roman" panose="02020603050405020304" pitchFamily="18" charset="0"/>
+              </a:defRPr>
+            </a:lvl2pPr>
+            <a:lvl3pPr marL="1143000" indent="-228600">
+              <a:spcBef>
+                <a:spcPct val="20000"/>
+              </a:spcBef>
+              <a:buChar char="•"/>
+              <a:defRPr sz="2400">
+                <a:solidFill>
+                  <a:schemeClr val="tx1"/>
+                </a:solidFill>
+                <a:latin typeface="Times New Roman" panose="02020603050405020304" pitchFamily="18" charset="0"/>
+              </a:defRPr>
+            </a:lvl3pPr>
+            <a:lvl4pPr marL="1600200" indent="-228600">
+              <a:spcBef>
+                <a:spcPct val="20000"/>
+              </a:spcBef>
+              <a:buChar char="–"/>
+              <a:defRPr sz="2000">
+                <a:solidFill>
+                  <a:schemeClr val="tx1"/>
+                </a:solidFill>
+                <a:latin typeface="Times New Roman" panose="02020603050405020304" pitchFamily="18" charset="0"/>
+              </a:defRPr>
+            </a:lvl4pPr>
+            <a:lvl5pPr marL="2057400" indent="-228600">
+              <a:spcBef>
+                <a:spcPct val="20000"/>
+              </a:spcBef>
+              <a:buChar char="»"/>
+              <a:defRPr sz="2000">
+                <a:solidFill>
+                  <a:schemeClr val="tx1"/>
+                </a:solidFill>
+                <a:latin typeface="Times New Roman" panose="02020603050405020304" pitchFamily="18" charset="0"/>
+              </a:defRPr>
+            </a:lvl5pPr>
+            <a:lvl6pPr marL="2514600" indent="-228600" eaLnBrk="0" fontAlgn="base" hangingPunct="0">
+              <a:spcBef>
+                <a:spcPct val="20000"/>
+              </a:spcBef>
+              <a:spcAft>
+                <a:spcPct val="0"/>
+              </a:spcAft>
+              <a:buChar char="»"/>
+              <a:defRPr sz="2000">
+                <a:solidFill>
+                  <a:schemeClr val="tx1"/>
+                </a:solidFill>
+                <a:latin typeface="Times New Roman" panose="02020603050405020304" pitchFamily="18" charset="0"/>
+              </a:defRPr>
+            </a:lvl6pPr>
+            <a:lvl7pPr marL="2971800" indent="-228600" eaLnBrk="0" fontAlgn="base" hangingPunct="0">
+              <a:spcBef>
+                <a:spcPct val="20000"/>
+              </a:spcBef>
+              <a:spcAft>
+                <a:spcPct val="0"/>
+              </a:spcAft>
+              <a:buChar char="»"/>
+              <a:defRPr sz="2000">
+                <a:solidFill>
+                  <a:schemeClr val="tx1"/>
+                </a:solidFill>
+                <a:latin typeface="Times New Roman" panose="02020603050405020304" pitchFamily="18" charset="0"/>
+              </a:defRPr>
+            </a:lvl7pPr>
+            <a:lvl8pPr marL="3429000" indent="-228600" eaLnBrk="0" fontAlgn="base" hangingPunct="0">
+              <a:spcBef>
+                <a:spcPct val="20000"/>
+              </a:spcBef>
+              <a:spcAft>
+                <a:spcPct val="0"/>
+              </a:spcAft>
+              <a:buChar char="»"/>
+              <a:defRPr sz="2000">
+                <a:solidFill>
+                  <a:schemeClr val="tx1"/>
+                </a:solidFill>
+                <a:latin typeface="Times New Roman" panose="02020603050405020304" pitchFamily="18" charset="0"/>
+              </a:defRPr>
+            </a:lvl8pPr>
+            <a:lvl9pPr marL="3886200" indent="-228600" eaLnBrk="0" fontAlgn="base" hangingPunct="0">
+              <a:spcBef>
+                <a:spcPct val="20000"/>
+              </a:spcBef>
+              <a:spcAft>
+                <a:spcPct val="0"/>
+              </a:spcAft>
+              <a:buChar char="»"/>
+              <a:defRPr sz="2000">
+                <a:solidFill>
+                  <a:schemeClr val="tx1"/>
+                </a:solidFill>
+                <a:latin typeface="Times New Roman" panose="02020603050405020304" pitchFamily="18" charset="0"/>
+              </a:defRPr>
+            </a:lvl9pPr>
+          </a:lstStyle>
+          <a:p>
+            <a:pPr>
+              <a:spcBef>
+                <a:spcPct val="0"/>
+              </a:spcBef>
+              <a:buFontTx/>
+              <a:buNone/>
+            </a:pPr>
+            <a:r>
+              <a:rPr lang="en-US" altLang="en-US" sz="2000" i="1">
+                <a:solidFill>
+                  <a:schemeClr val="accent2"/>
+                </a:solidFill>
+              </a:rPr>
+              <a:t>V</a:t>
+            </a:r>
+            <a:r>
+              <a:rPr lang="en-US" altLang="en-US" sz="2000" baseline="-25000">
+                <a:solidFill>
+                  <a:schemeClr val="accent2"/>
+                </a:solidFill>
+              </a:rPr>
+              <a:t>G</a:t>
+            </a:r>
+            <a:r>
+              <a:rPr lang="en-US" altLang="en-US" sz="2000">
+                <a:solidFill>
+                  <a:schemeClr val="accent2"/>
+                </a:solidFill>
+              </a:rPr>
+              <a:t> &gt; </a:t>
+            </a:r>
+            <a:r>
+              <a:rPr lang="en-US" altLang="en-US" sz="2000" i="1">
+                <a:solidFill>
+                  <a:schemeClr val="accent2"/>
+                </a:solidFill>
+              </a:rPr>
+              <a:t>V</a:t>
+            </a:r>
+            <a:r>
+              <a:rPr lang="en-US" altLang="en-US" sz="2000" baseline="-25000">
+                <a:solidFill>
+                  <a:schemeClr val="accent2"/>
+                </a:solidFill>
+              </a:rPr>
+              <a:t>T</a:t>
+            </a:r>
+            <a:r>
+              <a:rPr lang="en-US" altLang="en-US" sz="2000">
+                <a:solidFill>
+                  <a:schemeClr val="accent2"/>
+                </a:solidFill>
+              </a:rPr>
+              <a:t>; </a:t>
+            </a:r>
+            <a:r>
+              <a:rPr lang="en-US" altLang="en-US" sz="2000" i="1">
+                <a:solidFill>
+                  <a:schemeClr val="accent2"/>
+                </a:solidFill>
+              </a:rPr>
+              <a:t>V</a:t>
+            </a:r>
+            <a:r>
+              <a:rPr lang="en-US" altLang="en-US" sz="2000" baseline="-25000">
+                <a:solidFill>
+                  <a:schemeClr val="accent2"/>
+                </a:solidFill>
+              </a:rPr>
+              <a:t>DS</a:t>
+            </a:r>
+            <a:r>
+              <a:rPr lang="en-US" altLang="en-US" sz="2000">
+                <a:solidFill>
+                  <a:schemeClr val="accent2"/>
+                </a:solidFill>
+              </a:rPr>
+              <a:t> </a:t>
+            </a:r>
+            <a:r>
+              <a:rPr lang="en-US" altLang="en-US" sz="2000">
+                <a:solidFill>
+                  <a:schemeClr val="accent2"/>
+                </a:solidFill>
+                <a:sym typeface="Symbol" panose="05050102010706020507" pitchFamily="18" charset="2"/>
+              </a:rPr>
+              <a:t> pinch-off</a:t>
+            </a:r>
+          </a:p>
+          <a:p>
+            <a:pPr>
+              <a:spcBef>
+                <a:spcPct val="0"/>
+              </a:spcBef>
+              <a:buFontTx/>
+              <a:buNone/>
+            </a:pPr>
+            <a:r>
+              <a:rPr lang="en-US" altLang="en-US" sz="2000" i="1">
+                <a:solidFill>
+                  <a:schemeClr val="accent2"/>
+                </a:solidFill>
+                <a:sym typeface="Symbol" panose="05050102010706020507" pitchFamily="18" charset="2"/>
+              </a:rPr>
+              <a:t>I</a:t>
+            </a:r>
+            <a:r>
+              <a:rPr lang="en-US" altLang="en-US" sz="2000" baseline="-25000">
+                <a:solidFill>
+                  <a:schemeClr val="accent2"/>
+                </a:solidFill>
+                <a:sym typeface="Symbol" panose="05050102010706020507" pitchFamily="18" charset="2"/>
+              </a:rPr>
+              <a:t>D</a:t>
+            </a:r>
+            <a:r>
+              <a:rPr lang="en-US" altLang="en-US" sz="2000">
+                <a:solidFill>
+                  <a:schemeClr val="accent2"/>
+                </a:solidFill>
+                <a:sym typeface="Symbol" panose="05050102010706020507" pitchFamily="18" charset="2"/>
+              </a:rPr>
+              <a:t> reaches a saturation value, </a:t>
+            </a:r>
+            <a:r>
+              <a:rPr lang="en-US" altLang="en-US" sz="2000" i="1">
+                <a:solidFill>
+                  <a:schemeClr val="accent2"/>
+                </a:solidFill>
+                <a:sym typeface="Symbol" panose="05050102010706020507" pitchFamily="18" charset="2"/>
+              </a:rPr>
+              <a:t>I</a:t>
+            </a:r>
+            <a:r>
+              <a:rPr lang="en-US" altLang="en-US" sz="2000" baseline="-25000">
+                <a:solidFill>
+                  <a:schemeClr val="accent2"/>
+                </a:solidFill>
+                <a:sym typeface="Symbol" panose="05050102010706020507" pitchFamily="18" charset="2"/>
+              </a:rPr>
+              <a:t>D,sat</a:t>
+            </a:r>
+            <a:r>
+              <a:rPr lang="en-US" altLang="en-US" sz="2000">
+                <a:solidFill>
+                  <a:schemeClr val="accent2"/>
+                </a:solidFill>
+                <a:sym typeface="Symbol" panose="05050102010706020507" pitchFamily="18" charset="2"/>
+              </a:rPr>
+              <a:t> The </a:t>
+            </a:r>
+            <a:r>
+              <a:rPr lang="en-US" altLang="en-US" sz="2000" i="1">
+                <a:solidFill>
+                  <a:schemeClr val="accent2"/>
+                </a:solidFill>
+                <a:sym typeface="Symbol" panose="05050102010706020507" pitchFamily="18" charset="2"/>
+              </a:rPr>
+              <a:t>V</a:t>
+            </a:r>
+            <a:r>
+              <a:rPr lang="en-US" altLang="en-US" sz="2000" baseline="-25000">
+                <a:solidFill>
+                  <a:schemeClr val="accent2"/>
+                </a:solidFill>
+                <a:sym typeface="Symbol" panose="05050102010706020507" pitchFamily="18" charset="2"/>
+              </a:rPr>
+              <a:t>DS</a:t>
+            </a:r>
+            <a:r>
+              <a:rPr lang="en-US" altLang="en-US" sz="2000">
+                <a:solidFill>
+                  <a:schemeClr val="accent2"/>
+                </a:solidFill>
+                <a:sym typeface="Symbol" panose="05050102010706020507" pitchFamily="18" charset="2"/>
+              </a:rPr>
+              <a:t> value is called </a:t>
+            </a:r>
+            <a:r>
+              <a:rPr lang="en-US" altLang="en-US" sz="2000" i="1">
+                <a:solidFill>
+                  <a:schemeClr val="accent2"/>
+                </a:solidFill>
+                <a:sym typeface="Symbol" panose="05050102010706020507" pitchFamily="18" charset="2"/>
+              </a:rPr>
+              <a:t>V</a:t>
+            </a:r>
+            <a:r>
+              <a:rPr lang="en-US" altLang="en-US" sz="2000" baseline="-25000">
+                <a:solidFill>
+                  <a:schemeClr val="accent2"/>
+                </a:solidFill>
+                <a:sym typeface="Symbol" panose="05050102010706020507" pitchFamily="18" charset="2"/>
+              </a:rPr>
+              <a:t>DS,sat</a:t>
+            </a:r>
+            <a:endParaRPr lang="en-US" altLang="en-US" sz="2000">
               <a:solidFill>
                 <a:schemeClr val="accent2"/>
               </a:solidFill>
             </a:endParaRPr>
+          </a:p>
+        </p:txBody>
+      </p:sp>
+      <p:sp>
+        <p:nvSpPr>
+          <p:cNvPr id="28679" name="Text Box 22">
+            <a:extLst>
+              <a:ext uri="{FF2B5EF4-FFF2-40B4-BE49-F238E27FC236}">
+                <a16:creationId xmlns:a16="http://schemas.microsoft.com/office/drawing/2014/main" id="{DEB26D5B-FD93-DE64-CE3D-C74A280FFE98}"/>
+              </a:ext>
+            </a:extLst>
+          </p:cNvPr>
+          <p:cNvSpPr txBox="1">
+            <a:spLocks noChangeArrowheads="1"/>
+          </p:cNvSpPr>
+          <p:nvPr/>
+        </p:nvSpPr>
+        <p:spPr bwMode="auto">
+          <a:xfrm>
+            <a:off x="6518275" y="4860926"/>
+            <a:ext cx="3810000" cy="1006475"/>
+          </a:xfrm>
+          <a:prstGeom prst="rect">
+            <a:avLst/>
+          </a:prstGeom>
+          <a:noFill/>
+          <a:ln>
+            <a:noFill/>
+          </a:ln>
+          <a:extLst>
+            <a:ext uri="{909E8E84-426E-40DD-AFC4-6F175D3DCCD1}">
+              <a14:hiddenFill xmlns:a14="http://schemas.microsoft.com/office/drawing/2010/main">
+                <a:solidFill>
+                  <a:srgbClr val="FFFFFF"/>
+                </a:solidFill>
+              </a14:hiddenFill>
+            </a:ext>
+            <a:ext uri="{91240B29-F687-4F45-9708-019B960494DF}">
+              <a14:hiddenLine xmlns:a14="http://schemas.microsoft.com/office/drawing/2010/main" w="9525">
+                <a:solidFill>
+                  <a:srgbClr val="000000"/>
+                </a:solidFill>
+                <a:miter lim="800000"/>
+                <a:headEnd/>
+                <a:tailEnd/>
+              </a14:hiddenLine>
+            </a:ext>
+          </a:extLst>
+        </p:spPr>
+        <p:txBody>
+          <a:bodyPr>
+            <a:spAutoFit/>
+          </a:bodyPr>
+          <a:lstStyle>
+            <a:lvl1pPr>
+              <a:spcBef>
+                <a:spcPct val="20000"/>
+              </a:spcBef>
+              <a:buChar char="•"/>
+              <a:defRPr sz="3200">
+                <a:solidFill>
+                  <a:schemeClr val="tx1"/>
+                </a:solidFill>
+                <a:latin typeface="Times New Roman" panose="02020603050405020304" pitchFamily="18" charset="0"/>
+              </a:defRPr>
+            </a:lvl1pPr>
+            <a:lvl2pPr marL="742950" indent="-285750">
+              <a:spcBef>
+                <a:spcPct val="20000"/>
+              </a:spcBef>
+              <a:buChar char="–"/>
+              <a:defRPr sz="2800">
+                <a:solidFill>
+                  <a:schemeClr val="tx1"/>
+                </a:solidFill>
+                <a:latin typeface="Times New Roman" panose="02020603050405020304" pitchFamily="18" charset="0"/>
+              </a:defRPr>
+            </a:lvl2pPr>
+            <a:lvl3pPr marL="1143000" indent="-228600">
+              <a:spcBef>
+                <a:spcPct val="20000"/>
+              </a:spcBef>
+              <a:buChar char="•"/>
+              <a:defRPr sz="2400">
+                <a:solidFill>
+                  <a:schemeClr val="tx1"/>
+                </a:solidFill>
+                <a:latin typeface="Times New Roman" panose="02020603050405020304" pitchFamily="18" charset="0"/>
+              </a:defRPr>
+            </a:lvl3pPr>
+            <a:lvl4pPr marL="1600200" indent="-228600">
+              <a:spcBef>
+                <a:spcPct val="20000"/>
+              </a:spcBef>
+              <a:buChar char="–"/>
+              <a:defRPr sz="2000">
+                <a:solidFill>
+                  <a:schemeClr val="tx1"/>
+                </a:solidFill>
+                <a:latin typeface="Times New Roman" panose="02020603050405020304" pitchFamily="18" charset="0"/>
+              </a:defRPr>
+            </a:lvl4pPr>
+            <a:lvl5pPr marL="2057400" indent="-228600">
+              <a:spcBef>
+                <a:spcPct val="20000"/>
+              </a:spcBef>
+              <a:buChar char="»"/>
+              <a:defRPr sz="2000">
+                <a:solidFill>
+                  <a:schemeClr val="tx1"/>
+                </a:solidFill>
+                <a:latin typeface="Times New Roman" panose="02020603050405020304" pitchFamily="18" charset="0"/>
+              </a:defRPr>
+            </a:lvl5pPr>
+            <a:lvl6pPr marL="2514600" indent="-228600" eaLnBrk="0" fontAlgn="base" hangingPunct="0">
+              <a:spcBef>
+                <a:spcPct val="20000"/>
+              </a:spcBef>
+              <a:spcAft>
+                <a:spcPct val="0"/>
+              </a:spcAft>
+              <a:buChar char="»"/>
+              <a:defRPr sz="2000">
+                <a:solidFill>
+                  <a:schemeClr val="tx1"/>
+                </a:solidFill>
+                <a:latin typeface="Times New Roman" panose="02020603050405020304" pitchFamily="18" charset="0"/>
+              </a:defRPr>
+            </a:lvl6pPr>
+            <a:lvl7pPr marL="2971800" indent="-228600" eaLnBrk="0" fontAlgn="base" hangingPunct="0">
+              <a:spcBef>
+                <a:spcPct val="20000"/>
+              </a:spcBef>
+              <a:spcAft>
+                <a:spcPct val="0"/>
+              </a:spcAft>
+              <a:buChar char="»"/>
+              <a:defRPr sz="2000">
+                <a:solidFill>
+                  <a:schemeClr val="tx1"/>
+                </a:solidFill>
+                <a:latin typeface="Times New Roman" panose="02020603050405020304" pitchFamily="18" charset="0"/>
+              </a:defRPr>
+            </a:lvl7pPr>
+            <a:lvl8pPr marL="3429000" indent="-228600" eaLnBrk="0" fontAlgn="base" hangingPunct="0">
+              <a:spcBef>
+                <a:spcPct val="20000"/>
+              </a:spcBef>
+              <a:spcAft>
+                <a:spcPct val="0"/>
+              </a:spcAft>
+              <a:buChar char="»"/>
+              <a:defRPr sz="2000">
+                <a:solidFill>
+                  <a:schemeClr val="tx1"/>
+                </a:solidFill>
+                <a:latin typeface="Times New Roman" panose="02020603050405020304" pitchFamily="18" charset="0"/>
+              </a:defRPr>
+            </a:lvl8pPr>
+            <a:lvl9pPr marL="3886200" indent="-228600" eaLnBrk="0" fontAlgn="base" hangingPunct="0">
+              <a:spcBef>
+                <a:spcPct val="20000"/>
+              </a:spcBef>
+              <a:spcAft>
+                <a:spcPct val="0"/>
+              </a:spcAft>
+              <a:buChar char="»"/>
+              <a:defRPr sz="2000">
+                <a:solidFill>
+                  <a:schemeClr val="tx1"/>
+                </a:solidFill>
+                <a:latin typeface="Times New Roman" panose="02020603050405020304" pitchFamily="18" charset="0"/>
+              </a:defRPr>
+            </a:lvl9pPr>
+          </a:lstStyle>
+          <a:p>
+            <a:pPr>
+              <a:spcBef>
+                <a:spcPct val="0"/>
+              </a:spcBef>
+              <a:buFontTx/>
+              <a:buNone/>
+            </a:pPr>
+            <a:r>
+              <a:rPr lang="en-US" altLang="en-US" sz="2000" i="1">
+                <a:solidFill>
+                  <a:schemeClr val="accent2"/>
+                </a:solidFill>
+              </a:rPr>
+              <a:t>V</a:t>
+            </a:r>
+            <a:r>
+              <a:rPr lang="en-US" altLang="en-US" sz="2000" baseline="-25000">
+                <a:solidFill>
+                  <a:schemeClr val="accent2"/>
+                </a:solidFill>
+              </a:rPr>
+              <a:t>G </a:t>
+            </a:r>
+            <a:r>
+              <a:rPr lang="en-US" altLang="en-US" sz="2000">
+                <a:solidFill>
+                  <a:schemeClr val="accent2"/>
+                </a:solidFill>
+              </a:rPr>
+              <a:t>&gt; </a:t>
+            </a:r>
+            <a:r>
+              <a:rPr lang="en-US" altLang="en-US" sz="2000" i="1">
+                <a:solidFill>
+                  <a:schemeClr val="accent2"/>
+                </a:solidFill>
+              </a:rPr>
+              <a:t>V</a:t>
+            </a:r>
+            <a:r>
+              <a:rPr lang="en-US" altLang="en-US" sz="2000" i="1" baseline="-25000">
+                <a:solidFill>
+                  <a:schemeClr val="accent2"/>
+                </a:solidFill>
+              </a:rPr>
+              <a:t>T</a:t>
+            </a:r>
+            <a:r>
+              <a:rPr lang="en-US" altLang="en-US" sz="2000">
+                <a:solidFill>
+                  <a:schemeClr val="accent2"/>
+                </a:solidFill>
+              </a:rPr>
+              <a:t>; </a:t>
+            </a:r>
+            <a:r>
+              <a:rPr lang="en-US" altLang="en-US" sz="2000" i="1">
+                <a:solidFill>
+                  <a:schemeClr val="accent2"/>
+                </a:solidFill>
+              </a:rPr>
+              <a:t>V</a:t>
+            </a:r>
+            <a:r>
+              <a:rPr lang="en-US" altLang="en-US" sz="2000" baseline="-25000">
+                <a:solidFill>
+                  <a:schemeClr val="accent2"/>
+                </a:solidFill>
+              </a:rPr>
+              <a:t>DS </a:t>
+            </a:r>
+            <a:r>
+              <a:rPr lang="en-US" altLang="en-US" sz="2000">
+                <a:solidFill>
+                  <a:schemeClr val="accent2"/>
+                </a:solidFill>
+              </a:rPr>
+              <a:t>&gt; </a:t>
+            </a:r>
+            <a:r>
+              <a:rPr lang="en-US" altLang="en-US" sz="2000" i="1">
+                <a:solidFill>
+                  <a:schemeClr val="accent2"/>
+                </a:solidFill>
+              </a:rPr>
+              <a:t>V</a:t>
+            </a:r>
+            <a:r>
+              <a:rPr lang="en-US" altLang="en-US" sz="2000" baseline="-25000">
+                <a:solidFill>
+                  <a:schemeClr val="accent2"/>
+                </a:solidFill>
+              </a:rPr>
+              <a:t>DS,sat</a:t>
+            </a:r>
+          </a:p>
+          <a:p>
+            <a:pPr>
+              <a:spcBef>
+                <a:spcPct val="0"/>
+              </a:spcBef>
+              <a:buFontTx/>
+              <a:buNone/>
+            </a:pPr>
+            <a:r>
+              <a:rPr lang="en-US" altLang="en-US" sz="2000" i="1">
+                <a:solidFill>
+                  <a:schemeClr val="accent2"/>
+                </a:solidFill>
+              </a:rPr>
+              <a:t>I</a:t>
+            </a:r>
+            <a:r>
+              <a:rPr lang="en-US" altLang="en-US" sz="2000" baseline="-25000">
+                <a:solidFill>
+                  <a:schemeClr val="accent2"/>
+                </a:solidFill>
+              </a:rPr>
+              <a:t>D</a:t>
+            </a:r>
+            <a:r>
+              <a:rPr lang="en-US" altLang="en-US" sz="2000">
+                <a:solidFill>
+                  <a:schemeClr val="accent2"/>
+                </a:solidFill>
+              </a:rPr>
+              <a:t> does not increase further, saturation region.</a:t>
+            </a:r>
           </a:p>
         </p:txBody>
       </p:sp>
@@ -5024,7 +5419,7 @@
 </p:sld>
 </file>
 
-<file path=ppt/slides/slide14.xml><?xml version="1.0" encoding="utf-8"?>
+<file path=ppt/slides/slide17.xml><?xml version="1.0" encoding="utf-8"?>
 <p:sld xmlns:a="http://schemas.openxmlformats.org/drawingml/2006/main" xmlns:r="http://schemas.openxmlformats.org/officeDocument/2006/relationships" xmlns:p="http://schemas.openxmlformats.org/presentationml/2006/main">
   <p:cSld>
     <p:spTree>
@@ -5110,111 +5505,6 @@
       </p:sp>
       <p:graphicFrame>
         <p:nvGraphicFramePr>
-          <p:cNvPr id="35843" name="Object 3">
-            <a:extLst>
-              <a:ext uri="{FF2B5EF4-FFF2-40B4-BE49-F238E27FC236}">
-                <a16:creationId xmlns:a16="http://schemas.microsoft.com/office/drawing/2014/main" id="{6150970C-D94B-D0C9-6D7B-0005C7564F0B}"/>
-              </a:ext>
-            </a:extLst>
-          </p:cNvPr>
-          <p:cNvGraphicFramePr>
-            <a:graphicFrameLocks noChangeAspect="1"/>
-          </p:cNvGraphicFramePr>
-          <p:nvPr/>
-        </p:nvGraphicFramePr>
-        <p:xfrm>
-          <a:off x="2008189" y="1404939"/>
-          <a:ext cx="4352925" cy="992187"/>
-        </p:xfrm>
-        <a:graphic>
-          <a:graphicData uri="http://schemas.openxmlformats.org/presentationml/2006/ole">
-            <mc:AlternateContent xmlns:mc="http://schemas.openxmlformats.org/markup-compatibility/2006">
-              <mc:Choice xmlns:v="urn:schemas-microsoft-com:vml" Requires="v">
-                <p:oleObj name="Equation" r:id="rId2" imgW="2387600" imgH="533400" progId="Equation.3">
-                  <p:embed/>
-                </p:oleObj>
-              </mc:Choice>
-              <mc:Fallback>
-                <p:oleObj name="Equation" r:id="rId2" imgW="2387600" imgH="533400" progId="Equation.3">
-                  <p:embed/>
-                  <p:pic>
-                    <p:nvPicPr>
-                      <p:cNvPr id="35843" name="Object 3">
-                        <a:extLst>
-                          <a:ext uri="{FF2B5EF4-FFF2-40B4-BE49-F238E27FC236}">
-                            <a16:creationId xmlns:a16="http://schemas.microsoft.com/office/drawing/2014/main" id="{6150970C-D94B-D0C9-6D7B-0005C7564F0B}"/>
-                          </a:ext>
-                        </a:extLst>
-                      </p:cNvPr>
-                      <p:cNvPicPr>
-                        <a:picLocks noChangeAspect="1" noChangeArrowheads="1"/>
-                      </p:cNvPicPr>
-                      <p:nvPr/>
-                    </p:nvPicPr>
-                    <p:blipFill>
-                      <a:blip r:embed="rId3">
-                        <a:extLst>
-                          <a:ext uri="{28A0092B-C50C-407E-A947-70E740481C1C}">
-                            <a14:useLocalDpi xmlns:a14="http://schemas.microsoft.com/office/drawing/2010/main" val="0"/>
-                          </a:ext>
-                        </a:extLst>
-                      </a:blip>
-                      <a:srcRect/>
-                      <a:stretch>
-                        <a:fillRect/>
-                      </a:stretch>
-                    </p:blipFill>
-                    <p:spPr bwMode="auto">
-                      <a:xfrm>
-                        <a:off x="2008189" y="1404939"/>
-                        <a:ext cx="4352925" cy="992187"/>
-                      </a:xfrm>
-                      <a:prstGeom prst="rect">
-                        <a:avLst/>
-                      </a:prstGeom>
-                      <a:noFill/>
-                      <a:ln>
-                        <a:noFill/>
-                      </a:ln>
-                      <a:effectLst/>
-                      <a:extLst>
-                        <a:ext uri="{909E8E84-426E-40DD-AFC4-6F175D3DCCD1}">
-                          <a14:hiddenFill xmlns:a14="http://schemas.microsoft.com/office/drawing/2010/main">
-                            <a:solidFill>
-                              <a:schemeClr val="accent1"/>
-                            </a:solidFill>
-                          </a14:hiddenFill>
-                        </a:ext>
-                        <a:ext uri="{91240B29-F687-4F45-9708-019B960494DF}">
-                          <a14:hiddenLine xmlns:a14="http://schemas.microsoft.com/office/drawing/2010/main" w="9525">
-                            <a:solidFill>
-                              <a:schemeClr val="tx1"/>
-                            </a:solidFill>
-                            <a:miter lim="800000"/>
-                            <a:headEnd/>
-                            <a:tailEnd/>
-                          </a14:hiddenLine>
-                        </a:ext>
-                        <a:ext uri="{AF507438-7753-43E0-B8FC-AC1667EBCBE1}">
-                          <a14:hiddenEffects xmlns:a14="http://schemas.microsoft.com/office/drawing/2010/main">
-                            <a:effectLst>
-                              <a:outerShdw dist="35921" dir="2700000" algn="ctr" rotWithShape="0">
-                                <a:schemeClr val="bg2"/>
-                              </a:outerShdw>
-                            </a:effectLst>
-                          </a14:hiddenEffects>
-                        </a:ext>
-                      </a:extLst>
-                    </p:spPr>
-                  </p:pic>
-                </p:oleObj>
-              </mc:Fallback>
-            </mc:AlternateContent>
-          </a:graphicData>
-        </a:graphic>
-      </p:graphicFrame>
-      <p:graphicFrame>
-        <p:nvGraphicFramePr>
           <p:cNvPr id="35844" name="Object 4">
             <a:extLst>
               <a:ext uri="{FF2B5EF4-FFF2-40B4-BE49-F238E27FC236}">
@@ -5235,12 +5525,12 @@
           <a:graphicData uri="http://schemas.openxmlformats.org/presentationml/2006/ole">
             <mc:AlternateContent xmlns:mc="http://schemas.openxmlformats.org/markup-compatibility/2006">
               <mc:Choice xmlns:v="urn:schemas-microsoft-com:vml" Requires="v">
-                <p:oleObj name="Equation" r:id="rId4" imgW="1091726" imgH="241195" progId="Equation.3">
+                <p:oleObj name="Equation" r:id="rId2" imgW="1091726" imgH="241195" progId="Equation.3">
                   <p:embed/>
                 </p:oleObj>
               </mc:Choice>
               <mc:Fallback>
-                <p:oleObj name="Equation" r:id="rId4" imgW="1091726" imgH="241195" progId="Equation.3">
+                <p:oleObj name="Equation" r:id="rId2" imgW="1091726" imgH="241195" progId="Equation.3">
                   <p:embed/>
                   <p:pic>
                     <p:nvPicPr>
@@ -5257,7 +5547,7 @@
                       <p:nvPr/>
                     </p:nvPicPr>
                     <p:blipFill>
-                      <a:blip r:embed="rId5">
+                      <a:blip r:embed="rId3">
                         <a:extLst>
                           <a:ext uri="{28A0092B-C50C-407E-A947-70E740481C1C}">
                             <a14:useLocalDpi xmlns:a14="http://schemas.microsoft.com/office/drawing/2010/main" val="0"/>
@@ -5340,12 +5630,12 @@
           <a:graphicData uri="http://schemas.openxmlformats.org/presentationml/2006/ole">
             <mc:AlternateContent xmlns:mc="http://schemas.openxmlformats.org/markup-compatibility/2006">
               <mc:Choice xmlns:v="urn:schemas-microsoft-com:vml" Requires="v">
-                <p:oleObj name="Equation" r:id="rId6" imgW="545863" imgH="228501" progId="Equation.3">
+                <p:oleObj name="Equation" r:id="rId4" imgW="545863" imgH="228501" progId="Equation.3">
                   <p:embed/>
                 </p:oleObj>
               </mc:Choice>
               <mc:Fallback>
-                <p:oleObj name="Equation" r:id="rId6" imgW="545863" imgH="228501" progId="Equation.3">
+                <p:oleObj name="Equation" r:id="rId4" imgW="545863" imgH="228501" progId="Equation.3">
                   <p:embed/>
                   <p:pic>
                     <p:nvPicPr>
@@ -5362,7 +5652,7 @@
                       <p:nvPr/>
                     </p:nvPicPr>
                     <p:blipFill>
-                      <a:blip r:embed="rId7">
+                      <a:blip r:embed="rId5">
                         <a:extLst>
                           <a:ext uri="{28A0092B-C50C-407E-A947-70E740481C1C}">
                             <a14:useLocalDpi xmlns:a14="http://schemas.microsoft.com/office/drawing/2010/main" val="0"/>
@@ -6139,111 +6429,6 @@
       </p:sp>
       <p:graphicFrame>
         <p:nvGraphicFramePr>
-          <p:cNvPr id="35848" name="Object 8">
-            <a:extLst>
-              <a:ext uri="{FF2B5EF4-FFF2-40B4-BE49-F238E27FC236}">
-                <a16:creationId xmlns:a16="http://schemas.microsoft.com/office/drawing/2014/main" id="{CF62F22A-1832-41E1-DA00-B181E3A80E10}"/>
-              </a:ext>
-            </a:extLst>
-          </p:cNvPr>
-          <p:cNvGraphicFramePr>
-            <a:graphicFrameLocks noChangeAspect="1"/>
-          </p:cNvGraphicFramePr>
-          <p:nvPr/>
-        </p:nvGraphicFramePr>
-        <p:xfrm>
-          <a:off x="2138363" y="4413251"/>
-          <a:ext cx="3725862" cy="885825"/>
-        </p:xfrm>
-        <a:graphic>
-          <a:graphicData uri="http://schemas.openxmlformats.org/presentationml/2006/ole">
-            <mc:AlternateContent xmlns:mc="http://schemas.openxmlformats.org/markup-compatibility/2006">
-              <mc:Choice xmlns:v="urn:schemas-microsoft-com:vml" Requires="v">
-                <p:oleObj name="Equation" r:id="rId8" imgW="1816100" imgH="431800" progId="Equation.3">
-                  <p:embed/>
-                </p:oleObj>
-              </mc:Choice>
-              <mc:Fallback>
-                <p:oleObj name="Equation" r:id="rId8" imgW="1816100" imgH="431800" progId="Equation.3">
-                  <p:embed/>
-                  <p:pic>
-                    <p:nvPicPr>
-                      <p:cNvPr id="35848" name="Object 8">
-                        <a:extLst>
-                          <a:ext uri="{FF2B5EF4-FFF2-40B4-BE49-F238E27FC236}">
-                            <a16:creationId xmlns:a16="http://schemas.microsoft.com/office/drawing/2014/main" id="{CF62F22A-1832-41E1-DA00-B181E3A80E10}"/>
-                          </a:ext>
-                        </a:extLst>
-                      </p:cNvPr>
-                      <p:cNvPicPr>
-                        <a:picLocks noChangeAspect="1" noChangeArrowheads="1"/>
-                      </p:cNvPicPr>
-                      <p:nvPr/>
-                    </p:nvPicPr>
-                    <p:blipFill>
-                      <a:blip r:embed="rId9">
-                        <a:extLst>
-                          <a:ext uri="{28A0092B-C50C-407E-A947-70E740481C1C}">
-                            <a14:useLocalDpi xmlns:a14="http://schemas.microsoft.com/office/drawing/2010/main" val="0"/>
-                          </a:ext>
-                        </a:extLst>
-                      </a:blip>
-                      <a:srcRect/>
-                      <a:stretch>
-                        <a:fillRect/>
-                      </a:stretch>
-                    </p:blipFill>
-                    <p:spPr bwMode="auto">
-                      <a:xfrm>
-                        <a:off x="2138363" y="4413251"/>
-                        <a:ext cx="3725862" cy="885825"/>
-                      </a:xfrm>
-                      <a:prstGeom prst="rect">
-                        <a:avLst/>
-                      </a:prstGeom>
-                      <a:noFill/>
-                      <a:ln>
-                        <a:noFill/>
-                      </a:ln>
-                      <a:effectLst/>
-                      <a:extLst>
-                        <a:ext uri="{909E8E84-426E-40DD-AFC4-6F175D3DCCD1}">
-                          <a14:hiddenFill xmlns:a14="http://schemas.microsoft.com/office/drawing/2010/main">
-                            <a:solidFill>
-                              <a:schemeClr val="accent1"/>
-                            </a:solidFill>
-                          </a14:hiddenFill>
-                        </a:ext>
-                        <a:ext uri="{91240B29-F687-4F45-9708-019B960494DF}">
-                          <a14:hiddenLine xmlns:a14="http://schemas.microsoft.com/office/drawing/2010/main" w="9525">
-                            <a:solidFill>
-                              <a:schemeClr val="tx1"/>
-                            </a:solidFill>
-                            <a:miter lim="800000"/>
-                            <a:headEnd/>
-                            <a:tailEnd/>
-                          </a14:hiddenLine>
-                        </a:ext>
-                        <a:ext uri="{AF507438-7753-43E0-B8FC-AC1667EBCBE1}">
-                          <a14:hiddenEffects xmlns:a14="http://schemas.microsoft.com/office/drawing/2010/main">
-                            <a:effectLst>
-                              <a:outerShdw dist="35921" dir="2700000" algn="ctr" rotWithShape="0">
-                                <a:schemeClr val="bg2"/>
-                              </a:outerShdw>
-                            </a:effectLst>
-                          </a14:hiddenEffects>
-                        </a:ext>
-                      </a:extLst>
-                    </p:spPr>
-                  </p:pic>
-                </p:oleObj>
-              </mc:Fallback>
-            </mc:AlternateContent>
-          </a:graphicData>
-        </a:graphic>
-      </p:graphicFrame>
-      <p:graphicFrame>
-        <p:nvGraphicFramePr>
           <p:cNvPr id="35849" name="Object 9">
             <a:extLst>
               <a:ext uri="{FF2B5EF4-FFF2-40B4-BE49-F238E27FC236}">
@@ -6264,12 +6449,12 @@
           <a:graphicData uri="http://schemas.openxmlformats.org/presentationml/2006/ole">
             <mc:AlternateContent xmlns:mc="http://schemas.openxmlformats.org/markup-compatibility/2006">
               <mc:Choice xmlns:v="urn:schemas-microsoft-com:vml" Requires="v">
-                <p:oleObj name="Equation" r:id="rId10" imgW="799753" imgH="241195" progId="Equation.3">
+                <p:oleObj name="Equation" r:id="rId6" imgW="799753" imgH="241195" progId="Equation.3">
                   <p:embed/>
                 </p:oleObj>
               </mc:Choice>
               <mc:Fallback>
-                <p:oleObj name="Equation" r:id="rId10" imgW="799753" imgH="241195" progId="Equation.3">
+                <p:oleObj name="Equation" r:id="rId6" imgW="799753" imgH="241195" progId="Equation.3">
                   <p:embed/>
                   <p:pic>
                     <p:nvPicPr>
@@ -6286,7 +6471,7 @@
                       <p:nvPr/>
                     </p:nvPicPr>
                     <p:blipFill>
-                      <a:blip r:embed="rId11">
+                      <a:blip r:embed="rId7">
                         <a:extLst>
                           <a:ext uri="{28A0092B-C50C-407E-A947-70E740481C1C}">
                             <a14:useLocalDpi xmlns:a14="http://schemas.microsoft.com/office/drawing/2010/main" val="0"/>
@@ -6362,19 +6547,19 @@
           <p:nvPr/>
         </p:nvGraphicFramePr>
         <p:xfrm>
-          <a:off x="8964614" y="4546600"/>
+          <a:off x="8964613" y="4546600"/>
           <a:ext cx="1087437" cy="457200"/>
         </p:xfrm>
         <a:graphic>
           <a:graphicData uri="http://schemas.openxmlformats.org/presentationml/2006/ole">
             <mc:AlternateContent xmlns:mc="http://schemas.openxmlformats.org/markup-compatibility/2006">
               <mc:Choice xmlns:v="urn:schemas-microsoft-com:vml" Requires="v">
-                <p:oleObj name="Equation" r:id="rId12" imgW="545863" imgH="228501" progId="Equation.3">
+                <p:oleObj name="Equation" r:id="rId8" imgW="545863" imgH="228501" progId="Equation.3">
                   <p:embed/>
                 </p:oleObj>
               </mc:Choice>
               <mc:Fallback>
-                <p:oleObj name="Equation" r:id="rId12" imgW="545863" imgH="228501" progId="Equation.3">
+                <p:oleObj name="Equation" r:id="rId8" imgW="545863" imgH="228501" progId="Equation.3">
                   <p:embed/>
                   <p:pic>
                     <p:nvPicPr>
@@ -6391,7 +6576,7 @@
                       <p:nvPr/>
                     </p:nvPicPr>
                     <p:blipFill>
-                      <a:blip r:embed="rId13">
+                      <a:blip r:embed="rId9">
                         <a:extLst>
                           <a:ext uri="{28A0092B-C50C-407E-A947-70E740481C1C}">
                             <a14:useLocalDpi xmlns:a14="http://schemas.microsoft.com/office/drawing/2010/main" val="0"/>
@@ -6405,7 +6590,7 @@
                     </p:blipFill>
                     <p:spPr bwMode="auto">
                       <a:xfrm>
-                        <a:off x="8964614" y="4546600"/>
+                        <a:off x="8964613" y="4546600"/>
                         <a:ext cx="1087437" cy="457200"/>
                       </a:xfrm>
                       <a:prstGeom prst="rect">
@@ -6924,6 +7109,80 @@
           </a:p>
         </p:txBody>
       </p:sp>
+      <p:pic>
+        <p:nvPicPr>
+          <p:cNvPr id="2" name="Picture 1" descr="A math equations on a white background&#10;&#10;AI-generated content may be incorrect.">
+            <a:extLst>
+              <a:ext uri="{FF2B5EF4-FFF2-40B4-BE49-F238E27FC236}">
+                <a16:creationId xmlns:a16="http://schemas.microsoft.com/office/drawing/2014/main" id="{B1B1F43D-AE23-D849-0BEA-508DEEE10AD2}"/>
+              </a:ext>
+            </a:extLst>
+          </p:cNvPr>
+          <p:cNvPicPr>
+            <a:picLocks noChangeAspect="1"/>
+          </p:cNvPicPr>
+          <p:nvPr/>
+        </p:nvPicPr>
+        <p:blipFill>
+          <a:blip r:embed="rId10">
+            <a:extLst>
+              <a:ext uri="{28A0092B-C50C-407E-A947-70E740481C1C}">
+                <a14:useLocalDpi xmlns:a14="http://schemas.microsoft.com/office/drawing/2010/main" val="0"/>
+              </a:ext>
+            </a:extLst>
+          </a:blip>
+          <a:srcRect l="32584" t="60496" r="29705" b="16430"/>
+          <a:stretch>
+            <a:fillRect/>
+          </a:stretch>
+        </p:blipFill>
+        <p:spPr>
+          <a:xfrm>
+            <a:off x="2570530" y="4272325"/>
+            <a:ext cx="3679091" cy="983887"/>
+          </a:xfrm>
+          <a:prstGeom prst="rect">
+            <a:avLst/>
+          </a:prstGeom>
+        </p:spPr>
+      </p:pic>
+      <p:pic>
+        <p:nvPicPr>
+          <p:cNvPr id="3" name="Picture 2" descr="A math equations on a white background&#10;&#10;AI-generated content may be incorrect.">
+            <a:extLst>
+              <a:ext uri="{FF2B5EF4-FFF2-40B4-BE49-F238E27FC236}">
+                <a16:creationId xmlns:a16="http://schemas.microsoft.com/office/drawing/2014/main" id="{32D7BE50-5440-88C1-6061-68CD44B1C6B8}"/>
+              </a:ext>
+            </a:extLst>
+          </p:cNvPr>
+          <p:cNvPicPr>
+            <a:picLocks noChangeAspect="1"/>
+          </p:cNvPicPr>
+          <p:nvPr/>
+        </p:nvPicPr>
+        <p:blipFill>
+          <a:blip r:embed="rId10">
+            <a:extLst>
+              <a:ext uri="{28A0092B-C50C-407E-A947-70E740481C1C}">
+                <a14:useLocalDpi xmlns:a14="http://schemas.microsoft.com/office/drawing/2010/main" val="0"/>
+              </a:ext>
+            </a:extLst>
+          </a:blip>
+          <a:srcRect l="27531" t="22716" r="24669" b="58675"/>
+          <a:stretch>
+            <a:fillRect/>
+          </a:stretch>
+        </p:blipFill>
+        <p:spPr>
+          <a:xfrm>
+            <a:off x="2408556" y="1539028"/>
+            <a:ext cx="4003040" cy="681144"/>
+          </a:xfrm>
+          <a:prstGeom prst="rect">
+            <a:avLst/>
+          </a:prstGeom>
+        </p:spPr>
+      </p:pic>
     </p:spTree>
   </p:cSld>
   <p:clrMapOvr>
@@ -6932,7 +7191,926 @@
 </p:sld>
 </file>
 
-<file path=ppt/slides/slide15.xml><?xml version="1.0" encoding="utf-8"?>
+<file path=ppt/slides/slide18.xml><?xml version="1.0" encoding="utf-8"?>
+<p:sld xmlns:a="http://schemas.openxmlformats.org/drawingml/2006/main" xmlns:r="http://schemas.openxmlformats.org/officeDocument/2006/relationships" xmlns:p="http://schemas.openxmlformats.org/presentationml/2006/main">
+  <p:cSld>
+    <p:spTree>
+      <p:nvGrpSpPr>
+        <p:cNvPr id="1" name=""/>
+        <p:cNvGrpSpPr/>
+        <p:nvPr/>
+      </p:nvGrpSpPr>
+      <p:grpSpPr>
+        <a:xfrm>
+          <a:off x="0" y="0"/>
+          <a:ext cx="0" cy="0"/>
+          <a:chOff x="0" y="0"/>
+          <a:chExt cx="0" cy="0"/>
+        </a:xfrm>
+      </p:grpSpPr>
+      <p:sp>
+        <p:nvSpPr>
+          <p:cNvPr id="31746" name="Rectangle 2">
+            <a:extLst>
+              <a:ext uri="{FF2B5EF4-FFF2-40B4-BE49-F238E27FC236}">
+                <a16:creationId xmlns:a16="http://schemas.microsoft.com/office/drawing/2014/main" id="{47079780-1E60-9A6B-DE5D-DC910A03E7E8}"/>
+              </a:ext>
+            </a:extLst>
+          </p:cNvPr>
+          <p:cNvSpPr>
+            <a:spLocks noGrp="1" noChangeArrowheads="1"/>
+          </p:cNvSpPr>
+          <p:nvPr>
+            <p:ph type="title"/>
+          </p:nvPr>
+        </p:nvSpPr>
+        <p:spPr>
+          <a:xfrm>
+            <a:off x="0" y="0"/>
+            <a:ext cx="7772400" cy="590931"/>
+          </a:xfrm>
+        </p:spPr>
+        <p:txBody>
+          <a:bodyPr anchor="t">
+            <a:spAutoFit/>
+          </a:bodyPr>
+          <a:lstStyle/>
+          <a:p>
+            <a:pPr eaLnBrk="1" hangingPunct="1"/>
+            <a:r>
+              <a:rPr lang="en-US" altLang="en-US" sz="3600" i="1" dirty="0"/>
+              <a:t>I</a:t>
+            </a:r>
+            <a:r>
+              <a:rPr lang="en-US" altLang="en-US" sz="3600" i="1" baseline="-25000" dirty="0"/>
+              <a:t>D</a:t>
+            </a:r>
+            <a:r>
+              <a:rPr lang="en-US" altLang="en-US" sz="3600" i="1" dirty="0"/>
+              <a:t>-V</a:t>
+            </a:r>
+            <a:r>
+              <a:rPr lang="en-US" altLang="en-US" sz="3600" i="1" baseline="-25000" dirty="0"/>
+              <a:t>DS </a:t>
+            </a:r>
+            <a:r>
+              <a:rPr lang="en-US" altLang="en-US" sz="3600" i="1" dirty="0"/>
+              <a:t> characteristics for n-MOSFET</a:t>
+            </a:r>
+          </a:p>
+        </p:txBody>
+      </p:sp>
+      <p:pic>
+        <p:nvPicPr>
+          <p:cNvPr id="31747" name="Picture 3">
+            <a:extLst>
+              <a:ext uri="{FF2B5EF4-FFF2-40B4-BE49-F238E27FC236}">
+                <a16:creationId xmlns:a16="http://schemas.microsoft.com/office/drawing/2014/main" id="{4A7F44B8-310D-CE04-59E2-586F514991BC}"/>
+              </a:ext>
+            </a:extLst>
+          </p:cNvPr>
+          <p:cNvPicPr>
+            <a:picLocks noChangeAspect="1" noChangeArrowheads="1"/>
+          </p:cNvPicPr>
+          <p:nvPr/>
+        </p:nvPicPr>
+        <p:blipFill>
+          <a:blip r:embed="rId2">
+            <a:extLst>
+              <a:ext uri="{28A0092B-C50C-407E-A947-70E740481C1C}">
+                <a14:useLocalDpi xmlns:a14="http://schemas.microsoft.com/office/drawing/2010/main" val="0"/>
+              </a:ext>
+            </a:extLst>
+          </a:blip>
+          <a:srcRect l="3339" r="4289" b="14951"/>
+          <a:stretch>
+            <a:fillRect/>
+          </a:stretch>
+        </p:blipFill>
+        <p:spPr bwMode="auto">
+          <a:xfrm>
+            <a:off x="2895600" y="1470026"/>
+            <a:ext cx="6324600" cy="4551363"/>
+          </a:xfrm>
+          <a:prstGeom prst="rect">
+            <a:avLst/>
+          </a:prstGeom>
+          <a:noFill/>
+          <a:ln>
+            <a:noFill/>
+          </a:ln>
+          <a:extLst>
+            <a:ext uri="{909E8E84-426E-40DD-AFC4-6F175D3DCCD1}">
+              <a14:hiddenFill xmlns:a14="http://schemas.microsoft.com/office/drawing/2010/main">
+                <a:solidFill>
+                  <a:srgbClr val="FFFFFF"/>
+                </a:solidFill>
+              </a14:hiddenFill>
+            </a:ext>
+            <a:ext uri="{91240B29-F687-4F45-9708-019B960494DF}">
+              <a14:hiddenLine xmlns:a14="http://schemas.microsoft.com/office/drawing/2010/main" w="9525">
+                <a:solidFill>
+                  <a:srgbClr val="000000"/>
+                </a:solidFill>
+                <a:miter lim="800000"/>
+                <a:headEnd/>
+                <a:tailEnd/>
+              </a14:hiddenLine>
+            </a:ext>
+          </a:extLst>
+        </p:spPr>
+      </p:pic>
+      <p:sp>
+        <p:nvSpPr>
+          <p:cNvPr id="31748" name="AutoShape 4">
+            <a:extLst>
+              <a:ext uri="{FF2B5EF4-FFF2-40B4-BE49-F238E27FC236}">
+                <a16:creationId xmlns:a16="http://schemas.microsoft.com/office/drawing/2014/main" id="{84B1BA75-81F5-EF6A-9395-EE4DB770F733}"/>
+              </a:ext>
+            </a:extLst>
+          </p:cNvPr>
+          <p:cNvSpPr>
+            <a:spLocks/>
+          </p:cNvSpPr>
+          <p:nvPr/>
+        </p:nvSpPr>
+        <p:spPr bwMode="auto">
+          <a:xfrm rot="16200000">
+            <a:off x="6019800" y="1174750"/>
+            <a:ext cx="381000" cy="2362200"/>
+          </a:xfrm>
+          <a:prstGeom prst="rightBrace">
+            <a:avLst>
+              <a:gd name="adj1" fmla="val 51667"/>
+              <a:gd name="adj2" fmla="val 50000"/>
+            </a:avLst>
+          </a:prstGeom>
+          <a:noFill/>
+          <a:ln w="9525">
+            <a:solidFill>
+              <a:schemeClr val="tx1"/>
+            </a:solidFill>
+            <a:round/>
+            <a:headEnd/>
+            <a:tailEnd/>
+          </a:ln>
+          <a:extLst>
+            <a:ext uri="{909E8E84-426E-40DD-AFC4-6F175D3DCCD1}">
+              <a14:hiddenFill xmlns:a14="http://schemas.microsoft.com/office/drawing/2010/main">
+                <a:solidFill>
+                  <a:srgbClr val="FFFFFF"/>
+                </a:solidFill>
+              </a14:hiddenFill>
+            </a:ext>
+          </a:extLst>
+        </p:spPr>
+        <p:txBody>
+          <a:bodyPr wrap="none" anchor="ctr"/>
+          <a:lstStyle>
+            <a:lvl1pPr>
+              <a:spcBef>
+                <a:spcPct val="20000"/>
+              </a:spcBef>
+              <a:buChar char="•"/>
+              <a:defRPr sz="3200">
+                <a:solidFill>
+                  <a:schemeClr val="tx1"/>
+                </a:solidFill>
+                <a:latin typeface="Times New Roman" panose="02020603050405020304" pitchFamily="18" charset="0"/>
+              </a:defRPr>
+            </a:lvl1pPr>
+            <a:lvl2pPr marL="742950" indent="-285750">
+              <a:spcBef>
+                <a:spcPct val="20000"/>
+              </a:spcBef>
+              <a:buChar char="–"/>
+              <a:defRPr sz="2800">
+                <a:solidFill>
+                  <a:schemeClr val="tx1"/>
+                </a:solidFill>
+                <a:latin typeface="Times New Roman" panose="02020603050405020304" pitchFamily="18" charset="0"/>
+              </a:defRPr>
+            </a:lvl2pPr>
+            <a:lvl3pPr marL="1143000" indent="-228600">
+              <a:spcBef>
+                <a:spcPct val="20000"/>
+              </a:spcBef>
+              <a:buChar char="•"/>
+              <a:defRPr sz="2400">
+                <a:solidFill>
+                  <a:schemeClr val="tx1"/>
+                </a:solidFill>
+                <a:latin typeface="Times New Roman" panose="02020603050405020304" pitchFamily="18" charset="0"/>
+              </a:defRPr>
+            </a:lvl3pPr>
+            <a:lvl4pPr marL="1600200" indent="-228600">
+              <a:spcBef>
+                <a:spcPct val="20000"/>
+              </a:spcBef>
+              <a:buChar char="–"/>
+              <a:defRPr sz="2000">
+                <a:solidFill>
+                  <a:schemeClr val="tx1"/>
+                </a:solidFill>
+                <a:latin typeface="Times New Roman" panose="02020603050405020304" pitchFamily="18" charset="0"/>
+              </a:defRPr>
+            </a:lvl4pPr>
+            <a:lvl5pPr marL="2057400" indent="-228600">
+              <a:spcBef>
+                <a:spcPct val="20000"/>
+              </a:spcBef>
+              <a:buChar char="»"/>
+              <a:defRPr sz="2000">
+                <a:solidFill>
+                  <a:schemeClr val="tx1"/>
+                </a:solidFill>
+                <a:latin typeface="Times New Roman" panose="02020603050405020304" pitchFamily="18" charset="0"/>
+              </a:defRPr>
+            </a:lvl5pPr>
+            <a:lvl6pPr marL="2514600" indent="-228600" eaLnBrk="0" fontAlgn="base" hangingPunct="0">
+              <a:spcBef>
+                <a:spcPct val="20000"/>
+              </a:spcBef>
+              <a:spcAft>
+                <a:spcPct val="0"/>
+              </a:spcAft>
+              <a:buChar char="»"/>
+              <a:defRPr sz="2000">
+                <a:solidFill>
+                  <a:schemeClr val="tx1"/>
+                </a:solidFill>
+                <a:latin typeface="Times New Roman" panose="02020603050405020304" pitchFamily="18" charset="0"/>
+              </a:defRPr>
+            </a:lvl6pPr>
+            <a:lvl7pPr marL="2971800" indent="-228600" eaLnBrk="0" fontAlgn="base" hangingPunct="0">
+              <a:spcBef>
+                <a:spcPct val="20000"/>
+              </a:spcBef>
+              <a:spcAft>
+                <a:spcPct val="0"/>
+              </a:spcAft>
+              <a:buChar char="»"/>
+              <a:defRPr sz="2000">
+                <a:solidFill>
+                  <a:schemeClr val="tx1"/>
+                </a:solidFill>
+                <a:latin typeface="Times New Roman" panose="02020603050405020304" pitchFamily="18" charset="0"/>
+              </a:defRPr>
+            </a:lvl7pPr>
+            <a:lvl8pPr marL="3429000" indent="-228600" eaLnBrk="0" fontAlgn="base" hangingPunct="0">
+              <a:spcBef>
+                <a:spcPct val="20000"/>
+              </a:spcBef>
+              <a:spcAft>
+                <a:spcPct val="0"/>
+              </a:spcAft>
+              <a:buChar char="»"/>
+              <a:defRPr sz="2000">
+                <a:solidFill>
+                  <a:schemeClr val="tx1"/>
+                </a:solidFill>
+                <a:latin typeface="Times New Roman" panose="02020603050405020304" pitchFamily="18" charset="0"/>
+              </a:defRPr>
+            </a:lvl8pPr>
+            <a:lvl9pPr marL="3886200" indent="-228600" eaLnBrk="0" fontAlgn="base" hangingPunct="0">
+              <a:spcBef>
+                <a:spcPct val="20000"/>
+              </a:spcBef>
+              <a:spcAft>
+                <a:spcPct val="0"/>
+              </a:spcAft>
+              <a:buChar char="»"/>
+              <a:defRPr sz="2000">
+                <a:solidFill>
+                  <a:schemeClr val="tx1"/>
+                </a:solidFill>
+                <a:latin typeface="Times New Roman" panose="02020603050405020304" pitchFamily="18" charset="0"/>
+              </a:defRPr>
+            </a:lvl9pPr>
+          </a:lstStyle>
+          <a:p>
+            <a:pPr algn="ctr" eaLnBrk="1" hangingPunct="1">
+              <a:spcBef>
+                <a:spcPct val="0"/>
+              </a:spcBef>
+              <a:buFontTx/>
+              <a:buNone/>
+            </a:pPr>
+            <a:endParaRPr lang="en-US" altLang="en-US" sz="2400"/>
+          </a:p>
+        </p:txBody>
+      </p:sp>
+      <p:sp>
+        <p:nvSpPr>
+          <p:cNvPr id="31749" name="AutoShape 5">
+            <a:extLst>
+              <a:ext uri="{FF2B5EF4-FFF2-40B4-BE49-F238E27FC236}">
+                <a16:creationId xmlns:a16="http://schemas.microsoft.com/office/drawing/2014/main" id="{A406EB6D-41E3-58D2-DAF1-3AA8772362A5}"/>
+              </a:ext>
+            </a:extLst>
+          </p:cNvPr>
+          <p:cNvSpPr>
+            <a:spLocks/>
+          </p:cNvSpPr>
+          <p:nvPr/>
+        </p:nvSpPr>
+        <p:spPr bwMode="auto">
+          <a:xfrm rot="16200000">
+            <a:off x="4076700" y="1746250"/>
+            <a:ext cx="228600" cy="1371600"/>
+          </a:xfrm>
+          <a:prstGeom prst="rightBrace">
+            <a:avLst>
+              <a:gd name="adj1" fmla="val 50000"/>
+              <a:gd name="adj2" fmla="val 50000"/>
+            </a:avLst>
+          </a:prstGeom>
+          <a:noFill/>
+          <a:ln w="9525">
+            <a:solidFill>
+              <a:schemeClr val="tx1"/>
+            </a:solidFill>
+            <a:round/>
+            <a:headEnd/>
+            <a:tailEnd/>
+          </a:ln>
+          <a:extLst>
+            <a:ext uri="{909E8E84-426E-40DD-AFC4-6F175D3DCCD1}">
+              <a14:hiddenFill xmlns:a14="http://schemas.microsoft.com/office/drawing/2010/main">
+                <a:solidFill>
+                  <a:srgbClr val="FFFFFF"/>
+                </a:solidFill>
+              </a14:hiddenFill>
+            </a:ext>
+          </a:extLst>
+        </p:spPr>
+        <p:txBody>
+          <a:bodyPr wrap="none" anchor="ctr"/>
+          <a:lstStyle>
+            <a:lvl1pPr>
+              <a:spcBef>
+                <a:spcPct val="20000"/>
+              </a:spcBef>
+              <a:buChar char="•"/>
+              <a:defRPr sz="3200">
+                <a:solidFill>
+                  <a:schemeClr val="tx1"/>
+                </a:solidFill>
+                <a:latin typeface="Times New Roman" panose="02020603050405020304" pitchFamily="18" charset="0"/>
+              </a:defRPr>
+            </a:lvl1pPr>
+            <a:lvl2pPr marL="742950" indent="-285750">
+              <a:spcBef>
+                <a:spcPct val="20000"/>
+              </a:spcBef>
+              <a:buChar char="–"/>
+              <a:defRPr sz="2800">
+                <a:solidFill>
+                  <a:schemeClr val="tx1"/>
+                </a:solidFill>
+                <a:latin typeface="Times New Roman" panose="02020603050405020304" pitchFamily="18" charset="0"/>
+              </a:defRPr>
+            </a:lvl2pPr>
+            <a:lvl3pPr marL="1143000" indent="-228600">
+              <a:spcBef>
+                <a:spcPct val="20000"/>
+              </a:spcBef>
+              <a:buChar char="•"/>
+              <a:defRPr sz="2400">
+                <a:solidFill>
+                  <a:schemeClr val="tx1"/>
+                </a:solidFill>
+                <a:latin typeface="Times New Roman" panose="02020603050405020304" pitchFamily="18" charset="0"/>
+              </a:defRPr>
+            </a:lvl3pPr>
+            <a:lvl4pPr marL="1600200" indent="-228600">
+              <a:spcBef>
+                <a:spcPct val="20000"/>
+              </a:spcBef>
+              <a:buChar char="–"/>
+              <a:defRPr sz="2000">
+                <a:solidFill>
+                  <a:schemeClr val="tx1"/>
+                </a:solidFill>
+                <a:latin typeface="Times New Roman" panose="02020603050405020304" pitchFamily="18" charset="0"/>
+              </a:defRPr>
+            </a:lvl4pPr>
+            <a:lvl5pPr marL="2057400" indent="-228600">
+              <a:spcBef>
+                <a:spcPct val="20000"/>
+              </a:spcBef>
+              <a:buChar char="»"/>
+              <a:defRPr sz="2000">
+                <a:solidFill>
+                  <a:schemeClr val="tx1"/>
+                </a:solidFill>
+                <a:latin typeface="Times New Roman" panose="02020603050405020304" pitchFamily="18" charset="0"/>
+              </a:defRPr>
+            </a:lvl5pPr>
+            <a:lvl6pPr marL="2514600" indent="-228600" eaLnBrk="0" fontAlgn="base" hangingPunct="0">
+              <a:spcBef>
+                <a:spcPct val="20000"/>
+              </a:spcBef>
+              <a:spcAft>
+                <a:spcPct val="0"/>
+              </a:spcAft>
+              <a:buChar char="»"/>
+              <a:defRPr sz="2000">
+                <a:solidFill>
+                  <a:schemeClr val="tx1"/>
+                </a:solidFill>
+                <a:latin typeface="Times New Roman" panose="02020603050405020304" pitchFamily="18" charset="0"/>
+              </a:defRPr>
+            </a:lvl6pPr>
+            <a:lvl7pPr marL="2971800" indent="-228600" eaLnBrk="0" fontAlgn="base" hangingPunct="0">
+              <a:spcBef>
+                <a:spcPct val="20000"/>
+              </a:spcBef>
+              <a:spcAft>
+                <a:spcPct val="0"/>
+              </a:spcAft>
+              <a:buChar char="»"/>
+              <a:defRPr sz="2000">
+                <a:solidFill>
+                  <a:schemeClr val="tx1"/>
+                </a:solidFill>
+                <a:latin typeface="Times New Roman" panose="02020603050405020304" pitchFamily="18" charset="0"/>
+              </a:defRPr>
+            </a:lvl7pPr>
+            <a:lvl8pPr marL="3429000" indent="-228600" eaLnBrk="0" fontAlgn="base" hangingPunct="0">
+              <a:spcBef>
+                <a:spcPct val="20000"/>
+              </a:spcBef>
+              <a:spcAft>
+                <a:spcPct val="0"/>
+              </a:spcAft>
+              <a:buChar char="»"/>
+              <a:defRPr sz="2000">
+                <a:solidFill>
+                  <a:schemeClr val="tx1"/>
+                </a:solidFill>
+                <a:latin typeface="Times New Roman" panose="02020603050405020304" pitchFamily="18" charset="0"/>
+              </a:defRPr>
+            </a:lvl8pPr>
+            <a:lvl9pPr marL="3886200" indent="-228600" eaLnBrk="0" fontAlgn="base" hangingPunct="0">
+              <a:spcBef>
+                <a:spcPct val="20000"/>
+              </a:spcBef>
+              <a:spcAft>
+                <a:spcPct val="0"/>
+              </a:spcAft>
+              <a:buChar char="»"/>
+              <a:defRPr sz="2000">
+                <a:solidFill>
+                  <a:schemeClr val="tx1"/>
+                </a:solidFill>
+                <a:latin typeface="Times New Roman" panose="02020603050405020304" pitchFamily="18" charset="0"/>
+              </a:defRPr>
+            </a:lvl9pPr>
+          </a:lstStyle>
+          <a:p>
+            <a:pPr algn="ctr" eaLnBrk="1" hangingPunct="1">
+              <a:spcBef>
+                <a:spcPct val="0"/>
+              </a:spcBef>
+              <a:buFontTx/>
+              <a:buNone/>
+            </a:pPr>
+            <a:endParaRPr lang="en-US" altLang="en-US" sz="2400"/>
+          </a:p>
+        </p:txBody>
+      </p:sp>
+      <p:sp>
+        <p:nvSpPr>
+          <p:cNvPr id="31750" name="Text Box 6">
+            <a:extLst>
+              <a:ext uri="{FF2B5EF4-FFF2-40B4-BE49-F238E27FC236}">
+                <a16:creationId xmlns:a16="http://schemas.microsoft.com/office/drawing/2014/main" id="{9313BA47-C8CA-1D61-C271-07AF8E4AB3F5}"/>
+              </a:ext>
+            </a:extLst>
+          </p:cNvPr>
+          <p:cNvSpPr txBox="1">
+            <a:spLocks noChangeArrowheads="1"/>
+          </p:cNvSpPr>
+          <p:nvPr/>
+        </p:nvSpPr>
+        <p:spPr bwMode="auto">
+          <a:xfrm>
+            <a:off x="5600700" y="1470026"/>
+            <a:ext cx="1225550" cy="701675"/>
+          </a:xfrm>
+          <a:prstGeom prst="rect">
+            <a:avLst/>
+          </a:prstGeom>
+          <a:noFill/>
+          <a:ln>
+            <a:noFill/>
+          </a:ln>
+          <a:extLst>
+            <a:ext uri="{909E8E84-426E-40DD-AFC4-6F175D3DCCD1}">
+              <a14:hiddenFill xmlns:a14="http://schemas.microsoft.com/office/drawing/2010/main">
+                <a:solidFill>
+                  <a:srgbClr val="FFFFFF"/>
+                </a:solidFill>
+              </a14:hiddenFill>
+            </a:ext>
+            <a:ext uri="{91240B29-F687-4F45-9708-019B960494DF}">
+              <a14:hiddenLine xmlns:a14="http://schemas.microsoft.com/office/drawing/2010/main" w="9525">
+                <a:solidFill>
+                  <a:srgbClr val="000000"/>
+                </a:solidFill>
+                <a:miter lim="800000"/>
+                <a:headEnd/>
+                <a:tailEnd/>
+              </a14:hiddenLine>
+            </a:ext>
+          </a:extLst>
+        </p:spPr>
+        <p:txBody>
+          <a:bodyPr wrap="none">
+            <a:spAutoFit/>
+          </a:bodyPr>
+          <a:lstStyle>
+            <a:lvl1pPr>
+              <a:spcBef>
+                <a:spcPct val="20000"/>
+              </a:spcBef>
+              <a:buChar char="•"/>
+              <a:defRPr sz="3200">
+                <a:solidFill>
+                  <a:schemeClr val="tx1"/>
+                </a:solidFill>
+                <a:latin typeface="Times New Roman" panose="02020603050405020304" pitchFamily="18" charset="0"/>
+              </a:defRPr>
+            </a:lvl1pPr>
+            <a:lvl2pPr marL="742950" indent="-285750">
+              <a:spcBef>
+                <a:spcPct val="20000"/>
+              </a:spcBef>
+              <a:buChar char="–"/>
+              <a:defRPr sz="2800">
+                <a:solidFill>
+                  <a:schemeClr val="tx1"/>
+                </a:solidFill>
+                <a:latin typeface="Times New Roman" panose="02020603050405020304" pitchFamily="18" charset="0"/>
+              </a:defRPr>
+            </a:lvl2pPr>
+            <a:lvl3pPr marL="1143000" indent="-228600">
+              <a:spcBef>
+                <a:spcPct val="20000"/>
+              </a:spcBef>
+              <a:buChar char="•"/>
+              <a:defRPr sz="2400">
+                <a:solidFill>
+                  <a:schemeClr val="tx1"/>
+                </a:solidFill>
+                <a:latin typeface="Times New Roman" panose="02020603050405020304" pitchFamily="18" charset="0"/>
+              </a:defRPr>
+            </a:lvl3pPr>
+            <a:lvl4pPr marL="1600200" indent="-228600">
+              <a:spcBef>
+                <a:spcPct val="20000"/>
+              </a:spcBef>
+              <a:buChar char="–"/>
+              <a:defRPr sz="2000">
+                <a:solidFill>
+                  <a:schemeClr val="tx1"/>
+                </a:solidFill>
+                <a:latin typeface="Times New Roman" panose="02020603050405020304" pitchFamily="18" charset="0"/>
+              </a:defRPr>
+            </a:lvl4pPr>
+            <a:lvl5pPr marL="2057400" indent="-228600">
+              <a:spcBef>
+                <a:spcPct val="20000"/>
+              </a:spcBef>
+              <a:buChar char="»"/>
+              <a:defRPr sz="2000">
+                <a:solidFill>
+                  <a:schemeClr val="tx1"/>
+                </a:solidFill>
+                <a:latin typeface="Times New Roman" panose="02020603050405020304" pitchFamily="18" charset="0"/>
+              </a:defRPr>
+            </a:lvl5pPr>
+            <a:lvl6pPr marL="2514600" indent="-228600" eaLnBrk="0" fontAlgn="base" hangingPunct="0">
+              <a:spcBef>
+                <a:spcPct val="20000"/>
+              </a:spcBef>
+              <a:spcAft>
+                <a:spcPct val="0"/>
+              </a:spcAft>
+              <a:buChar char="»"/>
+              <a:defRPr sz="2000">
+                <a:solidFill>
+                  <a:schemeClr val="tx1"/>
+                </a:solidFill>
+                <a:latin typeface="Times New Roman" panose="02020603050405020304" pitchFamily="18" charset="0"/>
+              </a:defRPr>
+            </a:lvl6pPr>
+            <a:lvl7pPr marL="2971800" indent="-228600" eaLnBrk="0" fontAlgn="base" hangingPunct="0">
+              <a:spcBef>
+                <a:spcPct val="20000"/>
+              </a:spcBef>
+              <a:spcAft>
+                <a:spcPct val="0"/>
+              </a:spcAft>
+              <a:buChar char="»"/>
+              <a:defRPr sz="2000">
+                <a:solidFill>
+                  <a:schemeClr val="tx1"/>
+                </a:solidFill>
+                <a:latin typeface="Times New Roman" panose="02020603050405020304" pitchFamily="18" charset="0"/>
+              </a:defRPr>
+            </a:lvl7pPr>
+            <a:lvl8pPr marL="3429000" indent="-228600" eaLnBrk="0" fontAlgn="base" hangingPunct="0">
+              <a:spcBef>
+                <a:spcPct val="20000"/>
+              </a:spcBef>
+              <a:spcAft>
+                <a:spcPct val="0"/>
+              </a:spcAft>
+              <a:buChar char="»"/>
+              <a:defRPr sz="2000">
+                <a:solidFill>
+                  <a:schemeClr val="tx1"/>
+                </a:solidFill>
+                <a:latin typeface="Times New Roman" panose="02020603050405020304" pitchFamily="18" charset="0"/>
+              </a:defRPr>
+            </a:lvl8pPr>
+            <a:lvl9pPr marL="3886200" indent="-228600" eaLnBrk="0" fontAlgn="base" hangingPunct="0">
+              <a:spcBef>
+                <a:spcPct val="20000"/>
+              </a:spcBef>
+              <a:spcAft>
+                <a:spcPct val="0"/>
+              </a:spcAft>
+              <a:buChar char="»"/>
+              <a:defRPr sz="2000">
+                <a:solidFill>
+                  <a:schemeClr val="tx1"/>
+                </a:solidFill>
+                <a:latin typeface="Times New Roman" panose="02020603050405020304" pitchFamily="18" charset="0"/>
+              </a:defRPr>
+            </a:lvl9pPr>
+          </a:lstStyle>
+          <a:p>
+            <a:pPr algn="ctr">
+              <a:spcBef>
+                <a:spcPct val="0"/>
+              </a:spcBef>
+              <a:buFontTx/>
+              <a:buNone/>
+            </a:pPr>
+            <a:r>
+              <a:rPr lang="en-US" altLang="en-US" sz="2000">
+                <a:solidFill>
+                  <a:schemeClr val="accent2"/>
+                </a:solidFill>
+              </a:rPr>
+              <a:t>Saturation</a:t>
+            </a:r>
+          </a:p>
+          <a:p>
+            <a:pPr algn="ctr">
+              <a:spcBef>
+                <a:spcPct val="0"/>
+              </a:spcBef>
+              <a:buFontTx/>
+              <a:buNone/>
+            </a:pPr>
+            <a:r>
+              <a:rPr lang="en-US" altLang="en-US" sz="2000">
+                <a:solidFill>
+                  <a:schemeClr val="accent2"/>
+                </a:solidFill>
+              </a:rPr>
+              <a:t>region</a:t>
+            </a:r>
+            <a:endParaRPr lang="en-US" altLang="en-US" sz="2000"/>
+          </a:p>
+        </p:txBody>
+      </p:sp>
+      <p:sp>
+        <p:nvSpPr>
+          <p:cNvPr id="31751" name="Text Box 7">
+            <a:extLst>
+              <a:ext uri="{FF2B5EF4-FFF2-40B4-BE49-F238E27FC236}">
+                <a16:creationId xmlns:a16="http://schemas.microsoft.com/office/drawing/2014/main" id="{ED1EF211-A8E4-028C-3CA4-EC7BE39D27FE}"/>
+              </a:ext>
+            </a:extLst>
+          </p:cNvPr>
+          <p:cNvSpPr txBox="1">
+            <a:spLocks noChangeArrowheads="1"/>
+          </p:cNvSpPr>
+          <p:nvPr/>
+        </p:nvSpPr>
+        <p:spPr bwMode="auto">
+          <a:xfrm>
+            <a:off x="3752850" y="1555751"/>
+            <a:ext cx="846138" cy="701675"/>
+          </a:xfrm>
+          <a:prstGeom prst="rect">
+            <a:avLst/>
+          </a:prstGeom>
+          <a:noFill/>
+          <a:ln>
+            <a:noFill/>
+          </a:ln>
+          <a:extLst>
+            <a:ext uri="{909E8E84-426E-40DD-AFC4-6F175D3DCCD1}">
+              <a14:hiddenFill xmlns:a14="http://schemas.microsoft.com/office/drawing/2010/main">
+                <a:solidFill>
+                  <a:srgbClr val="FFFFFF"/>
+                </a:solidFill>
+              </a14:hiddenFill>
+            </a:ext>
+            <a:ext uri="{91240B29-F687-4F45-9708-019B960494DF}">
+              <a14:hiddenLine xmlns:a14="http://schemas.microsoft.com/office/drawing/2010/main" w="9525">
+                <a:solidFill>
+                  <a:srgbClr val="000000"/>
+                </a:solidFill>
+                <a:miter lim="800000"/>
+                <a:headEnd/>
+                <a:tailEnd/>
+              </a14:hiddenLine>
+            </a:ext>
+          </a:extLst>
+        </p:spPr>
+        <p:txBody>
+          <a:bodyPr wrap="none">
+            <a:spAutoFit/>
+          </a:bodyPr>
+          <a:lstStyle>
+            <a:lvl1pPr>
+              <a:spcBef>
+                <a:spcPct val="20000"/>
+              </a:spcBef>
+              <a:buChar char="•"/>
+              <a:defRPr sz="3200">
+                <a:solidFill>
+                  <a:schemeClr val="tx1"/>
+                </a:solidFill>
+                <a:latin typeface="Times New Roman" panose="02020603050405020304" pitchFamily="18" charset="0"/>
+              </a:defRPr>
+            </a:lvl1pPr>
+            <a:lvl2pPr marL="742950" indent="-285750">
+              <a:spcBef>
+                <a:spcPct val="20000"/>
+              </a:spcBef>
+              <a:buChar char="–"/>
+              <a:defRPr sz="2800">
+                <a:solidFill>
+                  <a:schemeClr val="tx1"/>
+                </a:solidFill>
+                <a:latin typeface="Times New Roman" panose="02020603050405020304" pitchFamily="18" charset="0"/>
+              </a:defRPr>
+            </a:lvl2pPr>
+            <a:lvl3pPr marL="1143000" indent="-228600">
+              <a:spcBef>
+                <a:spcPct val="20000"/>
+              </a:spcBef>
+              <a:buChar char="•"/>
+              <a:defRPr sz="2400">
+                <a:solidFill>
+                  <a:schemeClr val="tx1"/>
+                </a:solidFill>
+                <a:latin typeface="Times New Roman" panose="02020603050405020304" pitchFamily="18" charset="0"/>
+              </a:defRPr>
+            </a:lvl3pPr>
+            <a:lvl4pPr marL="1600200" indent="-228600">
+              <a:spcBef>
+                <a:spcPct val="20000"/>
+              </a:spcBef>
+              <a:buChar char="–"/>
+              <a:defRPr sz="2000">
+                <a:solidFill>
+                  <a:schemeClr val="tx1"/>
+                </a:solidFill>
+                <a:latin typeface="Times New Roman" panose="02020603050405020304" pitchFamily="18" charset="0"/>
+              </a:defRPr>
+            </a:lvl4pPr>
+            <a:lvl5pPr marL="2057400" indent="-228600">
+              <a:spcBef>
+                <a:spcPct val="20000"/>
+              </a:spcBef>
+              <a:buChar char="»"/>
+              <a:defRPr sz="2000">
+                <a:solidFill>
+                  <a:schemeClr val="tx1"/>
+                </a:solidFill>
+                <a:latin typeface="Times New Roman" panose="02020603050405020304" pitchFamily="18" charset="0"/>
+              </a:defRPr>
+            </a:lvl5pPr>
+            <a:lvl6pPr marL="2514600" indent="-228600" eaLnBrk="0" fontAlgn="base" hangingPunct="0">
+              <a:spcBef>
+                <a:spcPct val="20000"/>
+              </a:spcBef>
+              <a:spcAft>
+                <a:spcPct val="0"/>
+              </a:spcAft>
+              <a:buChar char="»"/>
+              <a:defRPr sz="2000">
+                <a:solidFill>
+                  <a:schemeClr val="tx1"/>
+                </a:solidFill>
+                <a:latin typeface="Times New Roman" panose="02020603050405020304" pitchFamily="18" charset="0"/>
+              </a:defRPr>
+            </a:lvl6pPr>
+            <a:lvl7pPr marL="2971800" indent="-228600" eaLnBrk="0" fontAlgn="base" hangingPunct="0">
+              <a:spcBef>
+                <a:spcPct val="20000"/>
+              </a:spcBef>
+              <a:spcAft>
+                <a:spcPct val="0"/>
+              </a:spcAft>
+              <a:buChar char="»"/>
+              <a:defRPr sz="2000">
+                <a:solidFill>
+                  <a:schemeClr val="tx1"/>
+                </a:solidFill>
+                <a:latin typeface="Times New Roman" panose="02020603050405020304" pitchFamily="18" charset="0"/>
+              </a:defRPr>
+            </a:lvl7pPr>
+            <a:lvl8pPr marL="3429000" indent="-228600" eaLnBrk="0" fontAlgn="base" hangingPunct="0">
+              <a:spcBef>
+                <a:spcPct val="20000"/>
+              </a:spcBef>
+              <a:spcAft>
+                <a:spcPct val="0"/>
+              </a:spcAft>
+              <a:buChar char="»"/>
+              <a:defRPr sz="2000">
+                <a:solidFill>
+                  <a:schemeClr val="tx1"/>
+                </a:solidFill>
+                <a:latin typeface="Times New Roman" panose="02020603050405020304" pitchFamily="18" charset="0"/>
+              </a:defRPr>
+            </a:lvl8pPr>
+            <a:lvl9pPr marL="3886200" indent="-228600" eaLnBrk="0" fontAlgn="base" hangingPunct="0">
+              <a:spcBef>
+                <a:spcPct val="20000"/>
+              </a:spcBef>
+              <a:spcAft>
+                <a:spcPct val="0"/>
+              </a:spcAft>
+              <a:buChar char="»"/>
+              <a:defRPr sz="2000">
+                <a:solidFill>
+                  <a:schemeClr val="tx1"/>
+                </a:solidFill>
+                <a:latin typeface="Times New Roman" panose="02020603050405020304" pitchFamily="18" charset="0"/>
+              </a:defRPr>
+            </a:lvl9pPr>
+          </a:lstStyle>
+          <a:p>
+            <a:pPr algn="ctr">
+              <a:spcBef>
+                <a:spcPct val="0"/>
+              </a:spcBef>
+              <a:buFontTx/>
+              <a:buNone/>
+            </a:pPr>
+            <a:r>
+              <a:rPr lang="en-US" altLang="en-US" sz="2000">
+                <a:solidFill>
+                  <a:schemeClr val="accent2"/>
+                </a:solidFill>
+              </a:rPr>
+              <a:t>Linear</a:t>
+            </a:r>
+          </a:p>
+          <a:p>
+            <a:pPr algn="ctr">
+              <a:spcBef>
+                <a:spcPct val="0"/>
+              </a:spcBef>
+              <a:buFontTx/>
+              <a:buNone/>
+            </a:pPr>
+            <a:r>
+              <a:rPr lang="en-US" altLang="en-US" sz="2000">
+                <a:solidFill>
+                  <a:schemeClr val="accent2"/>
+                </a:solidFill>
+              </a:rPr>
+              <a:t>region</a:t>
+            </a:r>
+            <a:endParaRPr lang="en-US" altLang="en-US" sz="2400">
+              <a:solidFill>
+                <a:schemeClr val="accent2"/>
+              </a:solidFill>
+            </a:endParaRPr>
+          </a:p>
+        </p:txBody>
+      </p:sp>
+    </p:spTree>
+  </p:cSld>
+  <p:clrMapOvr>
+    <a:masterClrMapping/>
+  </p:clrMapOvr>
+</p:sld>
+</file>
+
+<file path=ppt/slides/slide19.xml><?xml version="1.0" encoding="utf-8"?>
 <p:sld xmlns:a="http://schemas.openxmlformats.org/drawingml/2006/main" xmlns:r="http://schemas.openxmlformats.org/officeDocument/2006/relationships" xmlns:p="http://schemas.openxmlformats.org/presentationml/2006/main">
   <p:cSld>
     <p:spTree>
@@ -7243,7 +8421,551 @@
 </p:sld>
 </file>
 
-<file path=ppt/slides/slide16.xml><?xml version="1.0" encoding="utf-8"?>
+<file path=ppt/slides/slide2.xml><?xml version="1.0" encoding="utf-8"?>
+<p:sld xmlns:a="http://schemas.openxmlformats.org/drawingml/2006/main" xmlns:r="http://schemas.openxmlformats.org/officeDocument/2006/relationships" xmlns:p="http://schemas.openxmlformats.org/presentationml/2006/main">
+  <p:cSld>
+    <p:spTree>
+      <p:nvGrpSpPr>
+        <p:cNvPr id="1" name=""/>
+        <p:cNvGrpSpPr/>
+        <p:nvPr/>
+      </p:nvGrpSpPr>
+      <p:grpSpPr>
+        <a:xfrm>
+          <a:off x="0" y="0"/>
+          <a:ext cx="0" cy="0"/>
+          <a:chOff x="0" y="0"/>
+          <a:chExt cx="0" cy="0"/>
+        </a:xfrm>
+      </p:grpSpPr>
+      <p:sp>
+        <p:nvSpPr>
+          <p:cNvPr id="18434" name="Rectangle 2">
+            <a:extLst>
+              <a:ext uri="{FF2B5EF4-FFF2-40B4-BE49-F238E27FC236}">
+                <a16:creationId xmlns:a16="http://schemas.microsoft.com/office/drawing/2014/main" id="{F3CF9C05-2D78-1D6A-D3E6-1EEB48317AB4}"/>
+              </a:ext>
+            </a:extLst>
+          </p:cNvPr>
+          <p:cNvSpPr>
+            <a:spLocks noGrp="1" noChangeArrowheads="1"/>
+          </p:cNvSpPr>
+          <p:nvPr>
+            <p:ph type="title"/>
+          </p:nvPr>
+        </p:nvSpPr>
+        <p:spPr>
+          <a:xfrm>
+            <a:off x="0" y="-270245"/>
+            <a:ext cx="7772400" cy="1143000"/>
+          </a:xfrm>
+        </p:spPr>
+        <p:txBody>
+          <a:bodyPr/>
+          <a:lstStyle/>
+          <a:p>
+            <a:r>
+              <a:rPr lang="en-US" altLang="en-US" dirty="0"/>
+              <a:t>The First Transistor</a:t>
+            </a:r>
+          </a:p>
+        </p:txBody>
+      </p:sp>
+      <p:pic>
+        <p:nvPicPr>
+          <p:cNvPr id="18435" name="Picture 4" descr="1947 First point contact transistor-1">
+            <a:extLst>
+              <a:ext uri="{FF2B5EF4-FFF2-40B4-BE49-F238E27FC236}">
+                <a16:creationId xmlns:a16="http://schemas.microsoft.com/office/drawing/2014/main" id="{37497411-10C9-F0E1-F10B-A626BF3170CA}"/>
+              </a:ext>
+            </a:extLst>
+          </p:cNvPr>
+          <p:cNvPicPr>
+            <a:picLocks noChangeAspect="1" noChangeArrowheads="1"/>
+          </p:cNvPicPr>
+          <p:nvPr/>
+        </p:nvPicPr>
+        <p:blipFill>
+          <a:blip r:embed="rId2">
+            <a:extLst>
+              <a:ext uri="{28A0092B-C50C-407E-A947-70E740481C1C}">
+                <a14:useLocalDpi xmlns:a14="http://schemas.microsoft.com/office/drawing/2010/main" val="0"/>
+              </a:ext>
+            </a:extLst>
+          </a:blip>
+          <a:srcRect/>
+          <a:stretch>
+            <a:fillRect/>
+          </a:stretch>
+        </p:blipFill>
+        <p:spPr bwMode="auto">
+          <a:xfrm>
+            <a:off x="4691064" y="1177926"/>
+            <a:ext cx="3157537" cy="4651375"/>
+          </a:xfrm>
+          <a:prstGeom prst="rect">
+            <a:avLst/>
+          </a:prstGeom>
+          <a:noFill/>
+          <a:ln>
+            <a:noFill/>
+          </a:ln>
+          <a:extLst>
+            <a:ext uri="{909E8E84-426E-40DD-AFC4-6F175D3DCCD1}">
+              <a14:hiddenFill xmlns:a14="http://schemas.microsoft.com/office/drawing/2010/main">
+                <a:solidFill>
+                  <a:srgbClr val="FFFFFF"/>
+                </a:solidFill>
+              </a14:hiddenFill>
+            </a:ext>
+            <a:ext uri="{91240B29-F687-4F45-9708-019B960494DF}">
+              <a14:hiddenLine xmlns:a14="http://schemas.microsoft.com/office/drawing/2010/main" w="9525">
+                <a:solidFill>
+                  <a:srgbClr val="000000"/>
+                </a:solidFill>
+                <a:miter lim="800000"/>
+                <a:headEnd/>
+                <a:tailEnd/>
+              </a14:hiddenLine>
+            </a:ext>
+          </a:extLst>
+        </p:spPr>
+      </p:pic>
+      <p:sp>
+        <p:nvSpPr>
+          <p:cNvPr id="3" name="TextBox 2">
+            <a:extLst>
+              <a:ext uri="{FF2B5EF4-FFF2-40B4-BE49-F238E27FC236}">
+                <a16:creationId xmlns:a16="http://schemas.microsoft.com/office/drawing/2014/main" id="{BFAFFDD9-1CE8-1395-1FE6-1C7BCBCBB4A4}"/>
+              </a:ext>
+            </a:extLst>
+          </p:cNvPr>
+          <p:cNvSpPr txBox="1"/>
+          <p:nvPr/>
+        </p:nvSpPr>
+        <p:spPr>
+          <a:xfrm>
+            <a:off x="8148319" y="1177926"/>
+            <a:ext cx="3916679" cy="4801314"/>
+          </a:xfrm>
+          <a:prstGeom prst="rect">
+            <a:avLst/>
+          </a:prstGeom>
+          <a:noFill/>
+        </p:spPr>
+        <p:txBody>
+          <a:bodyPr wrap="square">
+            <a:spAutoFit/>
+          </a:bodyPr>
+          <a:lstStyle/>
+          <a:p>
+            <a:pPr>
+              <a:buFont typeface="Arial" panose="020B0604020202020204" pitchFamily="34" charset="0"/>
+              <a:buChar char="•"/>
+            </a:pPr>
+            <a:r>
+              <a:rPr lang="en-US" b="1" dirty="0">
+                <a:latin typeface="PT Sans" panose="020B0503020203020204" pitchFamily="34" charset="0"/>
+              </a:rPr>
+              <a:t>December 16, 1947</a:t>
+            </a:r>
+            <a:r>
+              <a:rPr lang="en-US" dirty="0">
+                <a:latin typeface="PT Sans" panose="020B0503020203020204" pitchFamily="34" charset="0"/>
+              </a:rPr>
+              <a:t>: John Bardeen and Walter Brattain successfully demonstrated the </a:t>
+            </a:r>
+            <a:r>
+              <a:rPr lang="en-US" b="1" dirty="0">
+                <a:latin typeface="PT Sans" panose="020B0503020203020204" pitchFamily="34" charset="0"/>
+              </a:rPr>
+              <a:t>first working transistor</a:t>
+            </a:r>
+            <a:r>
+              <a:rPr lang="en-US" dirty="0">
+                <a:latin typeface="PT Sans" panose="020B0503020203020204" pitchFamily="34" charset="0"/>
+              </a:rPr>
+              <a:t> at Bell Labs.</a:t>
+            </a:r>
+          </a:p>
+          <a:p>
+            <a:pPr>
+              <a:buFont typeface="Arial" panose="020B0604020202020204" pitchFamily="34" charset="0"/>
+              <a:buChar char="•"/>
+            </a:pPr>
+            <a:r>
+              <a:rPr lang="en-US" dirty="0">
+                <a:latin typeface="PT Sans" panose="020B0503020203020204" pitchFamily="34" charset="0"/>
+              </a:rPr>
+              <a:t>It was a </a:t>
+            </a:r>
+            <a:r>
+              <a:rPr lang="en-US" b="1" dirty="0">
+                <a:latin typeface="PT Sans" panose="020B0503020203020204" pitchFamily="34" charset="0"/>
+              </a:rPr>
+              <a:t>point-contact transistor</a:t>
+            </a:r>
+            <a:r>
+              <a:rPr lang="en-US" dirty="0">
+                <a:latin typeface="PT Sans" panose="020B0503020203020204" pitchFamily="34" charset="0"/>
+              </a:rPr>
+              <a:t> made of a small slab of germanium with two closely spaced gold contacts.</a:t>
+            </a:r>
+          </a:p>
+          <a:p>
+            <a:pPr>
+              <a:buFont typeface="Arial" panose="020B0604020202020204" pitchFamily="34" charset="0"/>
+              <a:buChar char="•"/>
+            </a:pPr>
+            <a:r>
+              <a:rPr lang="en-US" dirty="0">
+                <a:latin typeface="PT Sans" panose="020B0503020203020204" pitchFamily="34" charset="0"/>
+              </a:rPr>
+              <a:t>When input current was applied to one contact, it modulated the conductivity of the germanium, amplifying the signal seen at the other contact.</a:t>
+            </a:r>
+          </a:p>
+          <a:p>
+            <a:pPr>
+              <a:buNone/>
+            </a:pPr>
+            <a:r>
+              <a:rPr lang="en-US" b="1" dirty="0">
+                <a:latin typeface="PT Sans" panose="020B0503020203020204" pitchFamily="34" charset="0"/>
+              </a:rPr>
+              <a:t>Key outcome:</a:t>
+            </a:r>
+            <a:r>
+              <a:rPr lang="en-US" dirty="0">
+                <a:latin typeface="PT Sans" panose="020B0503020203020204" pitchFamily="34" charset="0"/>
+              </a:rPr>
+              <a:t> It could amplify electrical signals like a vacuum tube, but in a device only a few millimeters wide.</a:t>
+            </a:r>
+          </a:p>
+        </p:txBody>
+      </p:sp>
+      <p:sp>
+        <p:nvSpPr>
+          <p:cNvPr id="6" name="Rectangle 3">
+            <a:extLst>
+              <a:ext uri="{FF2B5EF4-FFF2-40B4-BE49-F238E27FC236}">
+                <a16:creationId xmlns:a16="http://schemas.microsoft.com/office/drawing/2014/main" id="{BE58B8EE-A986-DF2A-F963-194AEB13EC34}"/>
+              </a:ext>
+            </a:extLst>
+          </p:cNvPr>
+          <p:cNvSpPr>
+            <a:spLocks noChangeArrowheads="1"/>
+          </p:cNvSpPr>
+          <p:nvPr/>
+        </p:nvSpPr>
+        <p:spPr bwMode="auto">
+          <a:xfrm>
+            <a:off x="741680" y="1528862"/>
+            <a:ext cx="3484880" cy="3139321"/>
+          </a:xfrm>
+          <a:prstGeom prst="rect">
+            <a:avLst/>
+          </a:prstGeom>
+          <a:noFill/>
+          <a:ln>
+            <a:noFill/>
+          </a:ln>
+          <a:effectLst/>
+          <a:extLst>
+            <a:ext uri="{909E8E84-426E-40DD-AFC4-6F175D3DCCD1}">
+              <a14:hiddenFill xmlns:a14="http://schemas.microsoft.com/office/drawing/2010/main">
+                <a:solidFill>
+                  <a:schemeClr val="accent1"/>
+                </a:solidFill>
+              </a14:hiddenFill>
+            </a:ext>
+            <a:ext uri="{91240B29-F687-4F45-9708-019B960494DF}">
+              <a14:hiddenLine xmlns:a14="http://schemas.microsoft.com/office/drawing/2010/main" w="9525">
+                <a:solidFill>
+                  <a:schemeClr val="tx1"/>
+                </a:solidFill>
+                <a:miter lim="800000"/>
+                <a:headEnd/>
+                <a:tailEnd/>
+              </a14:hiddenLine>
+            </a:ext>
+            <a:ext uri="{AF507438-7753-43E0-B8FC-AC1667EBCBE1}">
+              <a14:hiddenEffects xmlns:a14="http://schemas.microsoft.com/office/drawing/2010/main">
+                <a:effectLst>
+                  <a:outerShdw dist="35921" dir="2700000" algn="ctr" rotWithShape="0">
+                    <a:schemeClr val="bg2"/>
+                  </a:outerShdw>
+                </a:effectLst>
+              </a14:hiddenEffects>
+            </a:ext>
+          </a:extLst>
+        </p:spPr>
+        <p:txBody>
+          <a:bodyPr vert="horz" wrap="square" lIns="91440" tIns="45720" rIns="91440" bIns="45720" numCol="1" anchor="ctr" anchorCtr="0" compatLnSpc="1">
+            <a:prstTxWarp prst="textNoShape">
+              <a:avLst/>
+            </a:prstTxWarp>
+            <a:spAutoFit/>
+          </a:bodyPr>
+          <a:lstStyle/>
+          <a:p>
+            <a:pPr marL="0" marR="0" lvl="0" indent="0" algn="l" defTabSz="914400" rtl="0" eaLnBrk="0" fontAlgn="base" latinLnBrk="0" hangingPunct="0">
+              <a:lnSpc>
+                <a:spcPct val="100000"/>
+              </a:lnSpc>
+              <a:spcBef>
+                <a:spcPct val="0"/>
+              </a:spcBef>
+              <a:spcAft>
+                <a:spcPct val="0"/>
+              </a:spcAft>
+              <a:buClrTx/>
+              <a:buSzTx/>
+              <a:buFontTx/>
+              <a:buChar char="•"/>
+              <a:tabLst/>
+            </a:pPr>
+            <a:r>
+              <a:rPr kumimoji="0" lang="en-US" altLang="en-US" sz="1800" b="0" i="0" u="none" strike="noStrike" cap="none" normalizeH="0" baseline="0" dirty="0">
+                <a:ln>
+                  <a:noFill/>
+                </a:ln>
+                <a:solidFill>
+                  <a:schemeClr val="tx1"/>
+                </a:solidFill>
+                <a:effectLst/>
+                <a:latin typeface="PT Sans" panose="020B0503020203020204" pitchFamily="34" charset="0"/>
+              </a:rPr>
+              <a:t>At </a:t>
+            </a:r>
+            <a:r>
+              <a:rPr kumimoji="0" lang="en-US" altLang="en-US" sz="1800" b="1" i="0" u="none" strike="noStrike" cap="none" normalizeH="0" baseline="0" dirty="0">
+                <a:ln>
+                  <a:noFill/>
+                </a:ln>
+                <a:solidFill>
+                  <a:schemeClr val="tx1"/>
+                </a:solidFill>
+                <a:effectLst/>
+                <a:latin typeface="PT Sans" panose="020B0503020203020204" pitchFamily="34" charset="0"/>
+              </a:rPr>
+              <a:t>Bell Telephone Laboratories</a:t>
+            </a:r>
+            <a:r>
+              <a:rPr kumimoji="0" lang="en-US" altLang="en-US" sz="1800" b="0" i="0" u="none" strike="noStrike" cap="none" normalizeH="0" baseline="0" dirty="0">
+                <a:ln>
+                  <a:noFill/>
+                </a:ln>
+                <a:solidFill>
+                  <a:schemeClr val="tx1"/>
+                </a:solidFill>
+                <a:effectLst/>
+                <a:latin typeface="PT Sans" panose="020B0503020203020204" pitchFamily="34" charset="0"/>
+              </a:rPr>
+              <a:t>, research was focused on finding a solid-state amplifier for telephone signal processing.</a:t>
+            </a:r>
+          </a:p>
+          <a:p>
+            <a:pPr marL="0" marR="0" lvl="0" indent="0" algn="l" defTabSz="914400" rtl="0" eaLnBrk="0" fontAlgn="base" latinLnBrk="0" hangingPunct="0">
+              <a:lnSpc>
+                <a:spcPct val="100000"/>
+              </a:lnSpc>
+              <a:spcBef>
+                <a:spcPct val="0"/>
+              </a:spcBef>
+              <a:spcAft>
+                <a:spcPct val="0"/>
+              </a:spcAft>
+              <a:buClrTx/>
+              <a:buSzTx/>
+              <a:buFontTx/>
+              <a:buChar char="•"/>
+              <a:tabLst/>
+            </a:pPr>
+            <a:r>
+              <a:rPr kumimoji="0" lang="en-US" altLang="en-US" sz="1800" b="0" i="0" u="none" strike="noStrike" cap="none" normalizeH="0" baseline="0" dirty="0">
+                <a:ln>
+                  <a:noFill/>
+                </a:ln>
+                <a:solidFill>
+                  <a:schemeClr val="tx1"/>
+                </a:solidFill>
+                <a:effectLst/>
+                <a:latin typeface="PT Sans" panose="020B0503020203020204" pitchFamily="34" charset="0"/>
+              </a:rPr>
+              <a:t>The three key scientists were:</a:t>
+            </a:r>
+          </a:p>
+          <a:p>
+            <a:pPr marL="0" marR="0" lvl="0" indent="0" algn="l" defTabSz="914400" rtl="0" eaLnBrk="0" fontAlgn="base" latinLnBrk="0" hangingPunct="0">
+              <a:lnSpc>
+                <a:spcPct val="100000"/>
+              </a:lnSpc>
+              <a:spcBef>
+                <a:spcPct val="0"/>
+              </a:spcBef>
+              <a:spcAft>
+                <a:spcPct val="0"/>
+              </a:spcAft>
+              <a:buClrTx/>
+              <a:buSzTx/>
+              <a:buFontTx/>
+              <a:buChar char="•"/>
+              <a:tabLst/>
+            </a:pPr>
+            <a:r>
+              <a:rPr kumimoji="0" lang="en-US" altLang="en-US" sz="1800" b="1" i="0" u="none" strike="noStrike" cap="none" normalizeH="0" baseline="0" dirty="0">
+                <a:ln>
+                  <a:noFill/>
+                </a:ln>
+                <a:solidFill>
+                  <a:schemeClr val="tx1"/>
+                </a:solidFill>
+                <a:effectLst/>
+                <a:latin typeface="PT Sans" panose="020B0503020203020204" pitchFamily="34" charset="0"/>
+              </a:rPr>
+              <a:t>John Bardeen</a:t>
+            </a:r>
+            <a:r>
+              <a:rPr kumimoji="0" lang="en-US" altLang="en-US" sz="1800" b="0" i="0" u="none" strike="noStrike" cap="none" normalizeH="0" baseline="0" dirty="0">
+                <a:ln>
+                  <a:noFill/>
+                </a:ln>
+                <a:solidFill>
+                  <a:schemeClr val="tx1"/>
+                </a:solidFill>
+                <a:effectLst/>
+                <a:latin typeface="PT Sans" panose="020B0503020203020204" pitchFamily="34" charset="0"/>
+              </a:rPr>
+              <a:t> (theorist)</a:t>
+            </a:r>
+          </a:p>
+          <a:p>
+            <a:pPr marL="0" marR="0" lvl="0" indent="0" algn="l" defTabSz="914400" rtl="0" eaLnBrk="0" fontAlgn="base" latinLnBrk="0" hangingPunct="0">
+              <a:lnSpc>
+                <a:spcPct val="100000"/>
+              </a:lnSpc>
+              <a:spcBef>
+                <a:spcPct val="0"/>
+              </a:spcBef>
+              <a:spcAft>
+                <a:spcPct val="0"/>
+              </a:spcAft>
+              <a:buClrTx/>
+              <a:buSzTx/>
+              <a:buFontTx/>
+              <a:buChar char="•"/>
+              <a:tabLst/>
+            </a:pPr>
+            <a:r>
+              <a:rPr kumimoji="0" lang="en-US" altLang="en-US" sz="1800" b="1" i="0" u="none" strike="noStrike" cap="none" normalizeH="0" baseline="0" dirty="0">
+                <a:ln>
+                  <a:noFill/>
+                </a:ln>
+                <a:solidFill>
+                  <a:schemeClr val="tx1"/>
+                </a:solidFill>
+                <a:effectLst/>
+                <a:latin typeface="PT Sans" panose="020B0503020203020204" pitchFamily="34" charset="0"/>
+              </a:rPr>
+              <a:t>Walter Brattain</a:t>
+            </a:r>
+            <a:r>
+              <a:rPr kumimoji="0" lang="en-US" altLang="en-US" sz="1800" b="0" i="0" u="none" strike="noStrike" cap="none" normalizeH="0" baseline="0" dirty="0">
+                <a:ln>
+                  <a:noFill/>
+                </a:ln>
+                <a:solidFill>
+                  <a:schemeClr val="tx1"/>
+                </a:solidFill>
+                <a:effectLst/>
+                <a:latin typeface="PT Sans" panose="020B0503020203020204" pitchFamily="34" charset="0"/>
+              </a:rPr>
+              <a:t> (experimentalist)</a:t>
+            </a:r>
+          </a:p>
+          <a:p>
+            <a:pPr marL="0" marR="0" lvl="0" indent="0" algn="l" defTabSz="914400" rtl="0" eaLnBrk="0" fontAlgn="base" latinLnBrk="0" hangingPunct="0">
+              <a:lnSpc>
+                <a:spcPct val="100000"/>
+              </a:lnSpc>
+              <a:spcBef>
+                <a:spcPct val="0"/>
+              </a:spcBef>
+              <a:spcAft>
+                <a:spcPct val="0"/>
+              </a:spcAft>
+              <a:buClrTx/>
+              <a:buSzTx/>
+              <a:buFontTx/>
+              <a:buChar char="•"/>
+              <a:tabLst/>
+            </a:pPr>
+            <a:r>
+              <a:rPr kumimoji="0" lang="en-US" altLang="en-US" sz="1800" b="1" i="0" u="none" strike="noStrike" cap="none" normalizeH="0" baseline="0" dirty="0">
+                <a:ln>
+                  <a:noFill/>
+                </a:ln>
+                <a:solidFill>
+                  <a:schemeClr val="tx1"/>
+                </a:solidFill>
+                <a:effectLst/>
+                <a:latin typeface="PT Sans" panose="020B0503020203020204" pitchFamily="34" charset="0"/>
+              </a:rPr>
+              <a:t>William Shockley</a:t>
+            </a:r>
+            <a:r>
+              <a:rPr kumimoji="0" lang="en-US" altLang="en-US" sz="1800" b="0" i="0" u="none" strike="noStrike" cap="none" normalizeH="0" baseline="0" dirty="0">
+                <a:ln>
+                  <a:noFill/>
+                </a:ln>
+                <a:solidFill>
+                  <a:schemeClr val="tx1"/>
+                </a:solidFill>
+                <a:effectLst/>
+                <a:latin typeface="PT Sans" panose="020B0503020203020204" pitchFamily="34" charset="0"/>
+              </a:rPr>
+              <a:t> (team leader, physicist)</a:t>
+            </a:r>
+          </a:p>
+          <a:p>
+            <a:pPr marL="0" marR="0" lvl="0" indent="0" algn="l" defTabSz="914400" rtl="0" eaLnBrk="0" fontAlgn="base" latinLnBrk="0" hangingPunct="0">
+              <a:lnSpc>
+                <a:spcPct val="100000"/>
+              </a:lnSpc>
+              <a:spcBef>
+                <a:spcPct val="0"/>
+              </a:spcBef>
+              <a:spcAft>
+                <a:spcPct val="0"/>
+              </a:spcAft>
+              <a:buClrTx/>
+              <a:buSzTx/>
+              <a:buFontTx/>
+              <a:buNone/>
+              <a:tabLst/>
+            </a:pPr>
+            <a:endParaRPr kumimoji="0" lang="en-US" altLang="en-US" sz="1800" b="0" i="0" u="none" strike="noStrike" cap="none" normalizeH="0" baseline="0" dirty="0">
+              <a:ln>
+                <a:noFill/>
+              </a:ln>
+              <a:solidFill>
+                <a:schemeClr val="tx1"/>
+              </a:solidFill>
+              <a:effectLst/>
+              <a:latin typeface="PT Sans" panose="020B0503020203020204" pitchFamily="34" charset="0"/>
+            </a:endParaRPr>
+          </a:p>
+        </p:txBody>
+      </p:sp>
+    </p:spTree>
+  </p:cSld>
+  <p:clrMapOvr>
+    <a:masterClrMapping/>
+  </p:clrMapOvr>
+</p:sld>
+</file>
+
+<file path=ppt/slides/slide20.xml><?xml version="1.0" encoding="utf-8"?>
 <p:sld xmlns:a="http://schemas.openxmlformats.org/drawingml/2006/main" xmlns:r="http://schemas.openxmlformats.org/officeDocument/2006/relationships" xmlns:p="http://schemas.openxmlformats.org/presentationml/2006/main">
   <p:cSld>
     <p:spTree>
@@ -7362,7 +9084,7 @@
 </p:sld>
 </file>
 
-<file path=ppt/slides/slide17.xml><?xml version="1.0" encoding="utf-8"?>
+<file path=ppt/slides/slide21.xml><?xml version="1.0" encoding="utf-8"?>
 <p:sld xmlns:a="http://schemas.openxmlformats.org/drawingml/2006/main" xmlns:r="http://schemas.openxmlformats.org/officeDocument/2006/relationships" xmlns:p="http://schemas.openxmlformats.org/presentationml/2006/main">
   <p:cSld>
     <p:spTree>
@@ -10730,7 +12452,7 @@
 </p:sld>
 </file>
 
-<file path=ppt/slides/slide2.xml><?xml version="1.0" encoding="utf-8"?>
+<file path=ppt/slides/slide3.xml><?xml version="1.0" encoding="utf-8"?>
 <p:sld xmlns:a="http://schemas.openxmlformats.org/drawingml/2006/main" xmlns:r="http://schemas.openxmlformats.org/officeDocument/2006/relationships" xmlns:p="http://schemas.openxmlformats.org/presentationml/2006/main">
   <p:cSld>
     <p:spTree>
@@ -10749,98 +12471,70 @@
       </p:grpSpPr>
       <p:sp>
         <p:nvSpPr>
-          <p:cNvPr id="18434" name="Rectangle 2">
+          <p:cNvPr id="2" name="Title 1">
             <a:extLst>
               <a:ext uri="{FF2B5EF4-FFF2-40B4-BE49-F238E27FC236}">
-                <a16:creationId xmlns:a16="http://schemas.microsoft.com/office/drawing/2014/main" id="{F3CF9C05-2D78-1D6A-D3E6-1EEB48317AB4}"/>
+                <a16:creationId xmlns:a16="http://schemas.microsoft.com/office/drawing/2014/main" id="{BE9ECEDE-3CAE-335B-7A50-1E821AE0D9DC}"/>
               </a:ext>
             </a:extLst>
           </p:cNvPr>
           <p:cNvSpPr>
-            <a:spLocks noGrp="1" noChangeArrowheads="1"/>
+            <a:spLocks noGrp="1"/>
           </p:cNvSpPr>
           <p:nvPr>
             <p:ph type="title"/>
           </p:nvPr>
         </p:nvSpPr>
-        <p:spPr>
-          <a:xfrm>
-            <a:off x="0" y="-270245"/>
-            <a:ext cx="7772400" cy="1143000"/>
-          </a:xfrm>
-        </p:spPr>
+        <p:spPr/>
         <p:txBody>
           <a:bodyPr/>
           <a:lstStyle/>
           <a:p>
             <a:r>
-              <a:rPr lang="en-US" altLang="en-US" dirty="0"/>
-              <a:t>The First Transistor</a:t>
+              <a:rPr lang="en-US" dirty="0"/>
+              <a:t>Transistor amplification</a:t>
             </a:r>
           </a:p>
         </p:txBody>
       </p:sp>
-      <p:pic>
-        <p:nvPicPr>
-          <p:cNvPr id="18435" name="Picture 4" descr="1947 First point contact transistor-1">
+      <p:sp>
+        <p:nvSpPr>
+          <p:cNvPr id="4" name="Slide Number Placeholder 3">
             <a:extLst>
               <a:ext uri="{FF2B5EF4-FFF2-40B4-BE49-F238E27FC236}">
-                <a16:creationId xmlns:a16="http://schemas.microsoft.com/office/drawing/2014/main" id="{37497411-10C9-F0E1-F10B-A626BF3170CA}"/>
+                <a16:creationId xmlns:a16="http://schemas.microsoft.com/office/drawing/2014/main" id="{B41F0D0F-86F7-A8CE-89D0-D396DBB914DC}"/>
               </a:ext>
             </a:extLst>
           </p:cNvPr>
-          <p:cNvPicPr>
-            <a:picLocks noChangeAspect="1" noChangeArrowheads="1"/>
-          </p:cNvPicPr>
-          <p:nvPr/>
-        </p:nvPicPr>
-        <p:blipFill>
-          <a:blip r:embed="rId2">
-            <a:extLst>
-              <a:ext uri="{28A0092B-C50C-407E-A947-70E740481C1C}">
-                <a14:useLocalDpi xmlns:a14="http://schemas.microsoft.com/office/drawing/2010/main" val="0"/>
-              </a:ext>
-            </a:extLst>
-          </a:blip>
-          <a:srcRect/>
-          <a:stretch>
-            <a:fillRect/>
-          </a:stretch>
-        </p:blipFill>
-        <p:spPr bwMode="auto">
-          <a:xfrm>
-            <a:off x="4691064" y="1177926"/>
-            <a:ext cx="3157537" cy="4651375"/>
-          </a:xfrm>
-          <a:prstGeom prst="rect">
-            <a:avLst/>
-          </a:prstGeom>
-          <a:noFill/>
-          <a:ln>
-            <a:noFill/>
-          </a:ln>
-          <a:extLst>
-            <a:ext uri="{909E8E84-426E-40DD-AFC4-6F175D3DCCD1}">
-              <a14:hiddenFill xmlns:a14="http://schemas.microsoft.com/office/drawing/2010/main">
-                <a:solidFill>
-                  <a:srgbClr val="FFFFFF"/>
-                </a:solidFill>
-              </a14:hiddenFill>
-            </a:ext>
-            <a:ext uri="{91240B29-F687-4F45-9708-019B960494DF}">
-              <a14:hiddenLine xmlns:a14="http://schemas.microsoft.com/office/drawing/2010/main" w="9525">
-                <a:solidFill>
-                  <a:srgbClr val="000000"/>
-                </a:solidFill>
-                <a:miter lim="800000"/>
-                <a:headEnd/>
-                <a:tailEnd/>
-              </a14:hiddenLine>
-            </a:ext>
-          </a:extLst>
-        </p:spPr>
-      </p:pic>
+          <p:cNvSpPr>
+            <a:spLocks noGrp="1"/>
+          </p:cNvSpPr>
+          <p:nvPr>
+            <p:ph type="sldNum" sz="quarter" idx="4"/>
+          </p:nvPr>
+        </p:nvSpPr>
+        <p:spPr/>
+        <p:txBody>
+          <a:bodyPr/>
+          <a:lstStyle/>
+          <a:p>
+            <a:fld id="{C4929C3B-27DB-4701-9AD5-57958A04CB2E}" type="slidenum">
+              <a:rPr lang="en-US" smtClean="0"/>
+              <a:pPr/>
+              <a:t>3</a:t>
+            </a:fld>
+            <a:endParaRPr lang="en-US" dirty="0">
+              <a:latin typeface="PT Sans" panose="020B0503020203020204" pitchFamily="34" charset="0"/>
+            </a:endParaRPr>
+          </a:p>
+        </p:txBody>
+      </p:sp>
     </p:spTree>
+    <p:extLst>
+      <p:ext uri="{BB962C8B-B14F-4D97-AF65-F5344CB8AC3E}">
+        <p14:creationId xmlns:p14="http://schemas.microsoft.com/office/powerpoint/2010/main" val="3630556584"/>
+      </p:ext>
+    </p:extLst>
   </p:cSld>
   <p:clrMapOvr>
     <a:masterClrMapping/>
@@ -10848,7 +12542,7 @@
 </p:sld>
 </file>
 
-<file path=ppt/slides/slide3.xml><?xml version="1.0" encoding="utf-8"?>
+<file path=ppt/slides/slide4.xml><?xml version="1.0" encoding="utf-8"?>
 <p:sld xmlns:a="http://schemas.openxmlformats.org/drawingml/2006/main" xmlns:r="http://schemas.openxmlformats.org/officeDocument/2006/relationships" xmlns:p="http://schemas.openxmlformats.org/presentationml/2006/main">
   <p:cSld>
     <p:spTree>
@@ -10966,7 +12660,7 @@
 </p:sld>
 </file>
 
-<file path=ppt/slides/slide4.xml><?xml version="1.0" encoding="utf-8"?>
+<file path=ppt/slides/slide5.xml><?xml version="1.0" encoding="utf-8"?>
 <p:sld xmlns:a="http://schemas.openxmlformats.org/drawingml/2006/main" xmlns:r="http://schemas.openxmlformats.org/officeDocument/2006/relationships" xmlns:p="http://schemas.openxmlformats.org/presentationml/2006/main">
   <p:cSld>
     <p:spTree>
@@ -11445,7 +13139,7 @@
 </p:sld>
 </file>
 
-<file path=ppt/slides/slide5.xml><?xml version="1.0" encoding="utf-8"?>
+<file path=ppt/slides/slide6.xml><?xml version="1.0" encoding="utf-8"?>
 <p:sld xmlns:a="http://schemas.openxmlformats.org/drawingml/2006/main" xmlns:r="http://schemas.openxmlformats.org/officeDocument/2006/relationships" xmlns:p="http://schemas.openxmlformats.org/presentationml/2006/main">
   <p:cSld>
     <p:spTree>
@@ -11491,8 +13185,8 @@
         </p:blipFill>
         <p:spPr bwMode="auto">
           <a:xfrm>
-            <a:off x="2413000" y="622300"/>
-            <a:ext cx="7392988" cy="4859338"/>
+            <a:off x="502919" y="300990"/>
+            <a:ext cx="9517897" cy="6256020"/>
           </a:xfrm>
           <a:prstGeom prst="rect">
             <a:avLst/>
@@ -11530,7 +13224,7 @@
 </p:sld>
 </file>
 
-<file path=ppt/slides/slide6.xml><?xml version="1.0" encoding="utf-8"?>
+<file path=ppt/slides/slide7.xml><?xml version="1.0" encoding="utf-8"?>
 <p:sld xmlns:a="http://schemas.openxmlformats.org/drawingml/2006/main" xmlns:r="http://schemas.openxmlformats.org/officeDocument/2006/relationships" xmlns:p="http://schemas.openxmlformats.org/presentationml/2006/main">
   <p:cSld>
     <p:spTree>
@@ -12579,7 +14273,7 @@
 </p:sld>
 </file>
 
-<file path=ppt/slides/slide7.xml><?xml version="1.0" encoding="utf-8"?>
+<file path=ppt/slides/slide8.xml><?xml version="1.0" encoding="utf-8"?>
 <p:sld xmlns:a="http://schemas.openxmlformats.org/drawingml/2006/main" xmlns:r="http://schemas.openxmlformats.org/officeDocument/2006/relationships" xmlns:p="http://schemas.openxmlformats.org/presentationml/2006/main">
   <p:cSld>
     <p:spTree>
@@ -13278,7 +14972,7 @@
 </p:sld>
 </file>
 
-<file path=ppt/slides/slide8.xml><?xml version="1.0" encoding="utf-8"?>
+<file path=ppt/slides/slide9.xml><?xml version="1.0" encoding="utf-8"?>
 <p:sld xmlns:a="http://schemas.openxmlformats.org/drawingml/2006/main" xmlns:r="http://schemas.openxmlformats.org/officeDocument/2006/relationships" xmlns:p="http://schemas.openxmlformats.org/presentationml/2006/main">
   <p:cSld>
     <p:spTree>
@@ -13309,7 +15003,7 @@
           </p:cNvPicPr>
           <p:nvPr/>
         </p:nvPicPr>
-        <p:blipFill>
+        <p:blipFill rotWithShape="1">
           <a:blip r:embed="rId2">
             <a:extLst>
               <a:ext uri="{28A0092B-C50C-407E-A947-70E740481C1C}">
@@ -13317,7 +15011,7 @@
               </a:ext>
             </a:extLst>
           </a:blip>
-          <a:srcRect/>
+          <a:srcRect b="18727"/>
           <a:stretch>
             <a:fillRect/>
           </a:stretch>
@@ -13325,7 +15019,7 @@
         <p:spPr bwMode="auto">
           <a:xfrm>
             <a:off x="2192338" y="628650"/>
-            <a:ext cx="7766050" cy="5189538"/>
+            <a:ext cx="7766050" cy="4217670"/>
           </a:xfrm>
           <a:prstGeom prst="rect">
             <a:avLst/>
@@ -13355,765 +15049,6 @@
           </a:extLst>
         </p:spPr>
       </p:pic>
-    </p:spTree>
-  </p:cSld>
-  <p:clrMapOvr>
-    <a:masterClrMapping/>
-  </p:clrMapOvr>
-</p:sld>
-</file>
-
-<file path=ppt/slides/slide9.xml><?xml version="1.0" encoding="utf-8"?>
-<p:sld xmlns:a="http://schemas.openxmlformats.org/drawingml/2006/main" xmlns:r="http://schemas.openxmlformats.org/officeDocument/2006/relationships" xmlns:p="http://schemas.openxmlformats.org/presentationml/2006/main">
-  <p:cSld>
-    <p:spTree>
-      <p:nvGrpSpPr>
-        <p:cNvPr id="1" name=""/>
-        <p:cNvGrpSpPr/>
-        <p:nvPr/>
-      </p:nvGrpSpPr>
-      <p:grpSpPr>
-        <a:xfrm>
-          <a:off x="0" y="0"/>
-          <a:ext cx="0" cy="0"/>
-          <a:chOff x="0" y="0"/>
-          <a:chExt cx="0" cy="0"/>
-        </a:xfrm>
-      </p:grpSpPr>
-      <p:sp>
-        <p:nvSpPr>
-          <p:cNvPr id="26626" name="Rectangle 2">
-            <a:extLst>
-              <a:ext uri="{FF2B5EF4-FFF2-40B4-BE49-F238E27FC236}">
-                <a16:creationId xmlns:a16="http://schemas.microsoft.com/office/drawing/2014/main" id="{55AE5536-7E3E-C0FA-79E4-99D79BC76DE2}"/>
-              </a:ext>
-            </a:extLst>
-          </p:cNvPr>
-          <p:cNvSpPr>
-            <a:spLocks noGrp="1" noChangeArrowheads="1"/>
-          </p:cNvSpPr>
-          <p:nvPr>
-            <p:ph type="title"/>
-          </p:nvPr>
-        </p:nvSpPr>
-        <p:spPr>
-          <a:xfrm>
-            <a:off x="56506" y="-1586"/>
-            <a:ext cx="6324600" cy="914400"/>
-          </a:xfrm>
-        </p:spPr>
-        <p:txBody>
-          <a:bodyPr/>
-          <a:lstStyle/>
-          <a:p>
-            <a:pPr eaLnBrk="1" hangingPunct="1"/>
-            <a:r>
-              <a:rPr lang="en-US" altLang="en-US" dirty="0"/>
-              <a:t>Complementary MOSFETs (CMOS)</a:t>
-            </a:r>
-          </a:p>
-        </p:txBody>
-      </p:sp>
-      <p:sp>
-        <p:nvSpPr>
-          <p:cNvPr id="26627" name="Text Box 3">
-            <a:extLst>
-              <a:ext uri="{FF2B5EF4-FFF2-40B4-BE49-F238E27FC236}">
-                <a16:creationId xmlns:a16="http://schemas.microsoft.com/office/drawing/2014/main" id="{C784E76F-9C8C-12C3-36FC-52787EE203B1}"/>
-              </a:ext>
-            </a:extLst>
-          </p:cNvPr>
-          <p:cNvSpPr txBox="1">
-            <a:spLocks noChangeArrowheads="1"/>
-          </p:cNvSpPr>
-          <p:nvPr/>
-        </p:nvSpPr>
-        <p:spPr bwMode="auto">
-          <a:xfrm>
-            <a:off x="5775325" y="2657476"/>
-            <a:ext cx="184150" cy="519113"/>
-          </a:xfrm>
-          <a:prstGeom prst="rect">
-            <a:avLst/>
-          </a:prstGeom>
-          <a:noFill/>
-          <a:ln>
-            <a:noFill/>
-          </a:ln>
-          <a:extLst>
-            <a:ext uri="{909E8E84-426E-40DD-AFC4-6F175D3DCCD1}">
-              <a14:hiddenFill xmlns:a14="http://schemas.microsoft.com/office/drawing/2010/main">
-                <a:solidFill>
-                  <a:srgbClr val="FFFFFF"/>
-                </a:solidFill>
-              </a14:hiddenFill>
-            </a:ext>
-            <a:ext uri="{91240B29-F687-4F45-9708-019B960494DF}">
-              <a14:hiddenLine xmlns:a14="http://schemas.microsoft.com/office/drawing/2010/main" w="9525">
-                <a:solidFill>
-                  <a:srgbClr val="000000"/>
-                </a:solidFill>
-                <a:miter lim="800000"/>
-                <a:headEnd/>
-                <a:tailEnd/>
-              </a14:hiddenLine>
-            </a:ext>
-          </a:extLst>
-        </p:spPr>
-        <p:txBody>
-          <a:bodyPr wrap="none">
-            <a:spAutoFit/>
-          </a:bodyPr>
-          <a:lstStyle>
-            <a:lvl1pPr>
-              <a:spcBef>
-                <a:spcPct val="20000"/>
-              </a:spcBef>
-              <a:buChar char="•"/>
-              <a:defRPr sz="3200">
-                <a:solidFill>
-                  <a:schemeClr val="tx1"/>
-                </a:solidFill>
-                <a:latin typeface="Times New Roman" panose="02020603050405020304" pitchFamily="18" charset="0"/>
-              </a:defRPr>
-            </a:lvl1pPr>
-            <a:lvl2pPr marL="742950" indent="-285750">
-              <a:spcBef>
-                <a:spcPct val="20000"/>
-              </a:spcBef>
-              <a:buChar char="–"/>
-              <a:defRPr sz="2800">
-                <a:solidFill>
-                  <a:schemeClr val="tx1"/>
-                </a:solidFill>
-                <a:latin typeface="Times New Roman" panose="02020603050405020304" pitchFamily="18" charset="0"/>
-              </a:defRPr>
-            </a:lvl2pPr>
-            <a:lvl3pPr marL="1143000" indent="-228600">
-              <a:spcBef>
-                <a:spcPct val="20000"/>
-              </a:spcBef>
-              <a:buChar char="•"/>
-              <a:defRPr sz="2400">
-                <a:solidFill>
-                  <a:schemeClr val="tx1"/>
-                </a:solidFill>
-                <a:latin typeface="Times New Roman" panose="02020603050405020304" pitchFamily="18" charset="0"/>
-              </a:defRPr>
-            </a:lvl3pPr>
-            <a:lvl4pPr marL="1600200" indent="-228600">
-              <a:spcBef>
-                <a:spcPct val="20000"/>
-              </a:spcBef>
-              <a:buChar char="–"/>
-              <a:defRPr sz="2000">
-                <a:solidFill>
-                  <a:schemeClr val="tx1"/>
-                </a:solidFill>
-                <a:latin typeface="Times New Roman" panose="02020603050405020304" pitchFamily="18" charset="0"/>
-              </a:defRPr>
-            </a:lvl4pPr>
-            <a:lvl5pPr marL="2057400" indent="-228600">
-              <a:spcBef>
-                <a:spcPct val="20000"/>
-              </a:spcBef>
-              <a:buChar char="»"/>
-              <a:defRPr sz="2000">
-                <a:solidFill>
-                  <a:schemeClr val="tx1"/>
-                </a:solidFill>
-                <a:latin typeface="Times New Roman" panose="02020603050405020304" pitchFamily="18" charset="0"/>
-              </a:defRPr>
-            </a:lvl5pPr>
-            <a:lvl6pPr marL="2514600" indent="-228600" eaLnBrk="0" fontAlgn="base" hangingPunct="0">
-              <a:spcBef>
-                <a:spcPct val="20000"/>
-              </a:spcBef>
-              <a:spcAft>
-                <a:spcPct val="0"/>
-              </a:spcAft>
-              <a:buChar char="»"/>
-              <a:defRPr sz="2000">
-                <a:solidFill>
-                  <a:schemeClr val="tx1"/>
-                </a:solidFill>
-                <a:latin typeface="Times New Roman" panose="02020603050405020304" pitchFamily="18" charset="0"/>
-              </a:defRPr>
-            </a:lvl6pPr>
-            <a:lvl7pPr marL="2971800" indent="-228600" eaLnBrk="0" fontAlgn="base" hangingPunct="0">
-              <a:spcBef>
-                <a:spcPct val="20000"/>
-              </a:spcBef>
-              <a:spcAft>
-                <a:spcPct val="0"/>
-              </a:spcAft>
-              <a:buChar char="»"/>
-              <a:defRPr sz="2000">
-                <a:solidFill>
-                  <a:schemeClr val="tx1"/>
-                </a:solidFill>
-                <a:latin typeface="Times New Roman" panose="02020603050405020304" pitchFamily="18" charset="0"/>
-              </a:defRPr>
-            </a:lvl7pPr>
-            <a:lvl8pPr marL="3429000" indent="-228600" eaLnBrk="0" fontAlgn="base" hangingPunct="0">
-              <a:spcBef>
-                <a:spcPct val="20000"/>
-              </a:spcBef>
-              <a:spcAft>
-                <a:spcPct val="0"/>
-              </a:spcAft>
-              <a:buChar char="»"/>
-              <a:defRPr sz="2000">
-                <a:solidFill>
-                  <a:schemeClr val="tx1"/>
-                </a:solidFill>
-                <a:latin typeface="Times New Roman" panose="02020603050405020304" pitchFamily="18" charset="0"/>
-              </a:defRPr>
-            </a:lvl8pPr>
-            <a:lvl9pPr marL="3886200" indent="-228600" eaLnBrk="0" fontAlgn="base" hangingPunct="0">
-              <a:spcBef>
-                <a:spcPct val="20000"/>
-              </a:spcBef>
-              <a:spcAft>
-                <a:spcPct val="0"/>
-              </a:spcAft>
-              <a:buChar char="»"/>
-              <a:defRPr sz="2000">
-                <a:solidFill>
-                  <a:schemeClr val="tx1"/>
-                </a:solidFill>
-                <a:latin typeface="Times New Roman" panose="02020603050405020304" pitchFamily="18" charset="0"/>
-              </a:defRPr>
-            </a:lvl9pPr>
-          </a:lstStyle>
-          <a:p>
-            <a:pPr>
-              <a:spcBef>
-                <a:spcPct val="0"/>
-              </a:spcBef>
-              <a:buFontTx/>
-              <a:buNone/>
-            </a:pPr>
-            <a:endParaRPr lang="en-US" altLang="en-US" sz="2800" b="1" i="1"/>
-          </a:p>
-        </p:txBody>
-      </p:sp>
-      <p:sp>
-        <p:nvSpPr>
-          <p:cNvPr id="26628" name="Text Box 4">
-            <a:extLst>
-              <a:ext uri="{FF2B5EF4-FFF2-40B4-BE49-F238E27FC236}">
-                <a16:creationId xmlns:a16="http://schemas.microsoft.com/office/drawing/2014/main" id="{014C2436-7858-5588-02B4-7E5F95BF8BB4}"/>
-              </a:ext>
-            </a:extLst>
-          </p:cNvPr>
-          <p:cNvSpPr txBox="1">
-            <a:spLocks noChangeArrowheads="1"/>
-          </p:cNvSpPr>
-          <p:nvPr/>
-        </p:nvSpPr>
-        <p:spPr bwMode="auto">
-          <a:xfrm>
-            <a:off x="2895601" y="5029201"/>
-            <a:ext cx="6971011" cy="830997"/>
-          </a:xfrm>
-          <a:prstGeom prst="rect">
-            <a:avLst/>
-          </a:prstGeom>
-          <a:noFill/>
-          <a:ln>
-            <a:noFill/>
-          </a:ln>
-          <a:extLst>
-            <a:ext uri="{909E8E84-426E-40DD-AFC4-6F175D3DCCD1}">
-              <a14:hiddenFill xmlns:a14="http://schemas.microsoft.com/office/drawing/2010/main">
-                <a:solidFill>
-                  <a:srgbClr val="FFFFFF"/>
-                </a:solidFill>
-              </a14:hiddenFill>
-            </a:ext>
-            <a:ext uri="{91240B29-F687-4F45-9708-019B960494DF}">
-              <a14:hiddenLine xmlns:a14="http://schemas.microsoft.com/office/drawing/2010/main" w="9525">
-                <a:solidFill>
-                  <a:srgbClr val="000000"/>
-                </a:solidFill>
-                <a:miter lim="800000"/>
-                <a:headEnd/>
-                <a:tailEnd/>
-              </a14:hiddenLine>
-            </a:ext>
-          </a:extLst>
-        </p:spPr>
-        <p:txBody>
-          <a:bodyPr wrap="none">
-            <a:spAutoFit/>
-          </a:bodyPr>
-          <a:lstStyle>
-            <a:lvl1pPr>
-              <a:spcBef>
-                <a:spcPct val="20000"/>
-              </a:spcBef>
-              <a:buChar char="•"/>
-              <a:defRPr sz="3200">
-                <a:solidFill>
-                  <a:schemeClr val="tx1"/>
-                </a:solidFill>
-                <a:latin typeface="Times New Roman" panose="02020603050405020304" pitchFamily="18" charset="0"/>
-              </a:defRPr>
-            </a:lvl1pPr>
-            <a:lvl2pPr marL="742950" indent="-285750">
-              <a:spcBef>
-                <a:spcPct val="20000"/>
-              </a:spcBef>
-              <a:buChar char="–"/>
-              <a:defRPr sz="2800">
-                <a:solidFill>
-                  <a:schemeClr val="tx1"/>
-                </a:solidFill>
-                <a:latin typeface="Times New Roman" panose="02020603050405020304" pitchFamily="18" charset="0"/>
-              </a:defRPr>
-            </a:lvl2pPr>
-            <a:lvl3pPr marL="1143000" indent="-228600">
-              <a:spcBef>
-                <a:spcPct val="20000"/>
-              </a:spcBef>
-              <a:buChar char="•"/>
-              <a:defRPr sz="2400">
-                <a:solidFill>
-                  <a:schemeClr val="tx1"/>
-                </a:solidFill>
-                <a:latin typeface="Times New Roman" panose="02020603050405020304" pitchFamily="18" charset="0"/>
-              </a:defRPr>
-            </a:lvl3pPr>
-            <a:lvl4pPr marL="1600200" indent="-228600">
-              <a:spcBef>
-                <a:spcPct val="20000"/>
-              </a:spcBef>
-              <a:buChar char="–"/>
-              <a:defRPr sz="2000">
-                <a:solidFill>
-                  <a:schemeClr val="tx1"/>
-                </a:solidFill>
-                <a:latin typeface="Times New Roman" panose="02020603050405020304" pitchFamily="18" charset="0"/>
-              </a:defRPr>
-            </a:lvl4pPr>
-            <a:lvl5pPr marL="2057400" indent="-228600">
-              <a:spcBef>
-                <a:spcPct val="20000"/>
-              </a:spcBef>
-              <a:buChar char="»"/>
-              <a:defRPr sz="2000">
-                <a:solidFill>
-                  <a:schemeClr val="tx1"/>
-                </a:solidFill>
-                <a:latin typeface="Times New Roman" panose="02020603050405020304" pitchFamily="18" charset="0"/>
-              </a:defRPr>
-            </a:lvl5pPr>
-            <a:lvl6pPr marL="2514600" indent="-228600" eaLnBrk="0" fontAlgn="base" hangingPunct="0">
-              <a:spcBef>
-                <a:spcPct val="20000"/>
-              </a:spcBef>
-              <a:spcAft>
-                <a:spcPct val="0"/>
-              </a:spcAft>
-              <a:buChar char="»"/>
-              <a:defRPr sz="2000">
-                <a:solidFill>
-                  <a:schemeClr val="tx1"/>
-                </a:solidFill>
-                <a:latin typeface="Times New Roman" panose="02020603050405020304" pitchFamily="18" charset="0"/>
-              </a:defRPr>
-            </a:lvl6pPr>
-            <a:lvl7pPr marL="2971800" indent="-228600" eaLnBrk="0" fontAlgn="base" hangingPunct="0">
-              <a:spcBef>
-                <a:spcPct val="20000"/>
-              </a:spcBef>
-              <a:spcAft>
-                <a:spcPct val="0"/>
-              </a:spcAft>
-              <a:buChar char="»"/>
-              <a:defRPr sz="2000">
-                <a:solidFill>
-                  <a:schemeClr val="tx1"/>
-                </a:solidFill>
-                <a:latin typeface="Times New Roman" panose="02020603050405020304" pitchFamily="18" charset="0"/>
-              </a:defRPr>
-            </a:lvl7pPr>
-            <a:lvl8pPr marL="3429000" indent="-228600" eaLnBrk="0" fontAlgn="base" hangingPunct="0">
-              <a:spcBef>
-                <a:spcPct val="20000"/>
-              </a:spcBef>
-              <a:spcAft>
-                <a:spcPct val="0"/>
-              </a:spcAft>
-              <a:buChar char="»"/>
-              <a:defRPr sz="2000">
-                <a:solidFill>
-                  <a:schemeClr val="tx1"/>
-                </a:solidFill>
-                <a:latin typeface="Times New Roman" panose="02020603050405020304" pitchFamily="18" charset="0"/>
-              </a:defRPr>
-            </a:lvl8pPr>
-            <a:lvl9pPr marL="3886200" indent="-228600" eaLnBrk="0" fontAlgn="base" hangingPunct="0">
-              <a:spcBef>
-                <a:spcPct val="20000"/>
-              </a:spcBef>
-              <a:spcAft>
-                <a:spcPct val="0"/>
-              </a:spcAft>
-              <a:buChar char="»"/>
-              <a:defRPr sz="2000">
-                <a:solidFill>
-                  <a:schemeClr val="tx1"/>
-                </a:solidFill>
-                <a:latin typeface="Times New Roman" panose="02020603050405020304" pitchFamily="18" charset="0"/>
-              </a:defRPr>
-            </a:lvl9pPr>
-          </a:lstStyle>
-          <a:p>
-            <a:pPr>
-              <a:spcBef>
-                <a:spcPct val="0"/>
-              </a:spcBef>
-              <a:buFontTx/>
-              <a:buNone/>
-            </a:pPr>
-            <a:r>
-              <a:rPr lang="en-US" altLang="en-US" sz="2400" b="1" i="1"/>
-              <a:t>When V</a:t>
-            </a:r>
-            <a:r>
-              <a:rPr lang="en-US" altLang="en-US" sz="2400" b="1" i="1" baseline="-25000"/>
-              <a:t>g </a:t>
-            </a:r>
-            <a:r>
-              <a:rPr lang="en-US" altLang="en-US" sz="2400" b="1" i="1"/>
-              <a:t>= V</a:t>
-            </a:r>
-            <a:r>
-              <a:rPr lang="en-US" altLang="en-US" sz="2400" b="1" i="1" baseline="-25000"/>
-              <a:t>dd </a:t>
-            </a:r>
-            <a:r>
-              <a:rPr lang="en-US" altLang="en-US" sz="2400" b="1" i="1"/>
-              <a:t>, the NFET is on and the PFET is off. </a:t>
-            </a:r>
-          </a:p>
-          <a:p>
-            <a:pPr>
-              <a:spcBef>
-                <a:spcPct val="0"/>
-              </a:spcBef>
-              <a:buFontTx/>
-              <a:buNone/>
-            </a:pPr>
-            <a:r>
-              <a:rPr lang="en-US" altLang="en-US" sz="2400" b="1" i="1"/>
-              <a:t>When V</a:t>
-            </a:r>
-            <a:r>
-              <a:rPr lang="en-US" altLang="en-US" sz="2400" b="1" i="1" baseline="-25000"/>
-              <a:t>g</a:t>
-            </a:r>
-            <a:r>
-              <a:rPr lang="en-US" altLang="en-US" sz="2400" b="1" i="1"/>
-              <a:t> = 0, the PFET is on and the NFET is off.</a:t>
-            </a:r>
-          </a:p>
-        </p:txBody>
-      </p:sp>
-      <p:graphicFrame>
-        <p:nvGraphicFramePr>
-          <p:cNvPr id="26629" name="Object 5">
-            <a:extLst>
-              <a:ext uri="{FF2B5EF4-FFF2-40B4-BE49-F238E27FC236}">
-                <a16:creationId xmlns:a16="http://schemas.microsoft.com/office/drawing/2014/main" id="{A99480F4-1187-040A-CC21-0575AABACF29}"/>
-              </a:ext>
-            </a:extLst>
-          </p:cNvPr>
-          <p:cNvGraphicFramePr>
-            <a:graphicFrameLocks noChangeAspect="1"/>
-          </p:cNvGraphicFramePr>
-          <p:nvPr/>
-        </p:nvGraphicFramePr>
-        <p:xfrm>
-          <a:off x="2647950" y="1838326"/>
-          <a:ext cx="7277100" cy="3178175"/>
-        </p:xfrm>
-        <a:graphic>
-          <a:graphicData uri="http://schemas.openxmlformats.org/presentationml/2006/ole">
-            <mc:AlternateContent xmlns:mc="http://schemas.openxmlformats.org/markup-compatibility/2006">
-              <mc:Choice xmlns:v="urn:schemas-microsoft-com:vml" Requires="v">
-                <p:oleObj name="Bitmap Image" r:id="rId2" imgW="9097645" imgH="3971429" progId="Paint.Picture">
-                  <p:embed/>
-                </p:oleObj>
-              </mc:Choice>
-              <mc:Fallback>
-                <p:oleObj name="Bitmap Image" r:id="rId2" imgW="9097645" imgH="3971429" progId="Paint.Picture">
-                  <p:embed/>
-                  <p:pic>
-                    <p:nvPicPr>
-                      <p:cNvPr id="26629" name="Object 5">
-                        <a:extLst>
-                          <a:ext uri="{FF2B5EF4-FFF2-40B4-BE49-F238E27FC236}">
-                            <a16:creationId xmlns:a16="http://schemas.microsoft.com/office/drawing/2014/main" id="{A99480F4-1187-040A-CC21-0575AABACF29}"/>
-                          </a:ext>
-                        </a:extLst>
-                      </p:cNvPr>
-                      <p:cNvPicPr>
-                        <a:picLocks noChangeAspect="1" noChangeArrowheads="1"/>
-                      </p:cNvPicPr>
-                      <p:nvPr/>
-                    </p:nvPicPr>
-                    <p:blipFill>
-                      <a:blip r:embed="rId3">
-                        <a:extLst>
-                          <a:ext uri="{28A0092B-C50C-407E-A947-70E740481C1C}">
-                            <a14:useLocalDpi xmlns:a14="http://schemas.microsoft.com/office/drawing/2010/main" val="0"/>
-                          </a:ext>
-                        </a:extLst>
-                      </a:blip>
-                      <a:srcRect/>
-                      <a:stretch>
-                        <a:fillRect/>
-                      </a:stretch>
-                    </p:blipFill>
-                    <p:spPr bwMode="auto">
-                      <a:xfrm>
-                        <a:off x="2647950" y="1838326"/>
-                        <a:ext cx="7277100" cy="3178175"/>
-                      </a:xfrm>
-                      <a:prstGeom prst="rect">
-                        <a:avLst/>
-                      </a:prstGeom>
-                      <a:noFill/>
-                      <a:ln>
-                        <a:noFill/>
-                      </a:ln>
-                      <a:effectLst/>
-                      <a:extLst>
-                        <a:ext uri="{909E8E84-426E-40DD-AFC4-6F175D3DCCD1}">
-                          <a14:hiddenFill xmlns:a14="http://schemas.microsoft.com/office/drawing/2010/main">
-                            <a:solidFill>
-                              <a:schemeClr val="accent1"/>
-                            </a:solidFill>
-                          </a14:hiddenFill>
-                        </a:ext>
-                        <a:ext uri="{91240B29-F687-4F45-9708-019B960494DF}">
-                          <a14:hiddenLine xmlns:a14="http://schemas.microsoft.com/office/drawing/2010/main" w="9525">
-                            <a:solidFill>
-                              <a:schemeClr val="tx1"/>
-                            </a:solidFill>
-                            <a:miter lim="800000"/>
-                            <a:headEnd/>
-                            <a:tailEnd/>
-                          </a14:hiddenLine>
-                        </a:ext>
-                        <a:ext uri="{AF507438-7753-43E0-B8FC-AC1667EBCBE1}">
-                          <a14:hiddenEffects xmlns:a14="http://schemas.microsoft.com/office/drawing/2010/main">
-                            <a:effectLst>
-                              <a:outerShdw dist="35921" dir="2700000" algn="ctr" rotWithShape="0">
-                                <a:schemeClr val="bg2"/>
-                              </a:outerShdw>
-                            </a:effectLst>
-                          </a14:hiddenEffects>
-                        </a:ext>
-                      </a:extLst>
-                    </p:spPr>
-                  </p:pic>
-                </p:oleObj>
-              </mc:Fallback>
-            </mc:AlternateContent>
-          </a:graphicData>
-        </a:graphic>
-      </p:graphicFrame>
-      <p:sp>
-        <p:nvSpPr>
-          <p:cNvPr id="26630" name="Text Box 6">
-            <a:extLst>
-              <a:ext uri="{FF2B5EF4-FFF2-40B4-BE49-F238E27FC236}">
-                <a16:creationId xmlns:a16="http://schemas.microsoft.com/office/drawing/2014/main" id="{C0BDA0CB-637C-7293-665C-3B65CB2FE36C}"/>
-              </a:ext>
-            </a:extLst>
-          </p:cNvPr>
-          <p:cNvSpPr txBox="1">
-            <a:spLocks noChangeArrowheads="1"/>
-          </p:cNvSpPr>
-          <p:nvPr/>
-        </p:nvSpPr>
-        <p:spPr bwMode="auto">
-          <a:xfrm>
-            <a:off x="3886201" y="1219201"/>
-            <a:ext cx="4276725" cy="396875"/>
-          </a:xfrm>
-          <a:prstGeom prst="rect">
-            <a:avLst/>
-          </a:prstGeom>
-          <a:noFill/>
-          <a:ln>
-            <a:noFill/>
-          </a:ln>
-          <a:extLst>
-            <a:ext uri="{909E8E84-426E-40DD-AFC4-6F175D3DCCD1}">
-              <a14:hiddenFill xmlns:a14="http://schemas.microsoft.com/office/drawing/2010/main">
-                <a:solidFill>
-                  <a:srgbClr val="FFFFFF"/>
-                </a:solidFill>
-              </a14:hiddenFill>
-            </a:ext>
-            <a:ext uri="{91240B29-F687-4F45-9708-019B960494DF}">
-              <a14:hiddenLine xmlns:a14="http://schemas.microsoft.com/office/drawing/2010/main" w="9525">
-                <a:solidFill>
-                  <a:srgbClr val="000000"/>
-                </a:solidFill>
-                <a:miter lim="800000"/>
-                <a:headEnd/>
-                <a:tailEnd/>
-              </a14:hiddenLine>
-            </a:ext>
-          </a:extLst>
-        </p:spPr>
-        <p:txBody>
-          <a:bodyPr wrap="none">
-            <a:spAutoFit/>
-          </a:bodyPr>
-          <a:lstStyle>
-            <a:lvl1pPr>
-              <a:spcBef>
-                <a:spcPct val="20000"/>
-              </a:spcBef>
-              <a:buChar char="•"/>
-              <a:defRPr sz="3200">
-                <a:solidFill>
-                  <a:schemeClr val="tx1"/>
-                </a:solidFill>
-                <a:latin typeface="Times New Roman" panose="02020603050405020304" pitchFamily="18" charset="0"/>
-              </a:defRPr>
-            </a:lvl1pPr>
-            <a:lvl2pPr marL="742950" indent="-285750">
-              <a:spcBef>
-                <a:spcPct val="20000"/>
-              </a:spcBef>
-              <a:buChar char="–"/>
-              <a:defRPr sz="2800">
-                <a:solidFill>
-                  <a:schemeClr val="tx1"/>
-                </a:solidFill>
-                <a:latin typeface="Times New Roman" panose="02020603050405020304" pitchFamily="18" charset="0"/>
-              </a:defRPr>
-            </a:lvl2pPr>
-            <a:lvl3pPr marL="1143000" indent="-228600">
-              <a:spcBef>
-                <a:spcPct val="20000"/>
-              </a:spcBef>
-              <a:buChar char="•"/>
-              <a:defRPr sz="2400">
-                <a:solidFill>
-                  <a:schemeClr val="tx1"/>
-                </a:solidFill>
-                <a:latin typeface="Times New Roman" panose="02020603050405020304" pitchFamily="18" charset="0"/>
-              </a:defRPr>
-            </a:lvl3pPr>
-            <a:lvl4pPr marL="1600200" indent="-228600">
-              <a:spcBef>
-                <a:spcPct val="20000"/>
-              </a:spcBef>
-              <a:buChar char="–"/>
-              <a:defRPr sz="2000">
-                <a:solidFill>
-                  <a:schemeClr val="tx1"/>
-                </a:solidFill>
-                <a:latin typeface="Times New Roman" panose="02020603050405020304" pitchFamily="18" charset="0"/>
-              </a:defRPr>
-            </a:lvl4pPr>
-            <a:lvl5pPr marL="2057400" indent="-228600">
-              <a:spcBef>
-                <a:spcPct val="20000"/>
-              </a:spcBef>
-              <a:buChar char="»"/>
-              <a:defRPr sz="2000">
-                <a:solidFill>
-                  <a:schemeClr val="tx1"/>
-                </a:solidFill>
-                <a:latin typeface="Times New Roman" panose="02020603050405020304" pitchFamily="18" charset="0"/>
-              </a:defRPr>
-            </a:lvl5pPr>
-            <a:lvl6pPr marL="2514600" indent="-228600" eaLnBrk="0" fontAlgn="base" hangingPunct="0">
-              <a:spcBef>
-                <a:spcPct val="20000"/>
-              </a:spcBef>
-              <a:spcAft>
-                <a:spcPct val="0"/>
-              </a:spcAft>
-              <a:buChar char="»"/>
-              <a:defRPr sz="2000">
-                <a:solidFill>
-                  <a:schemeClr val="tx1"/>
-                </a:solidFill>
-                <a:latin typeface="Times New Roman" panose="02020603050405020304" pitchFamily="18" charset="0"/>
-              </a:defRPr>
-            </a:lvl6pPr>
-            <a:lvl7pPr marL="2971800" indent="-228600" eaLnBrk="0" fontAlgn="base" hangingPunct="0">
-              <a:spcBef>
-                <a:spcPct val="20000"/>
-              </a:spcBef>
-              <a:spcAft>
-                <a:spcPct val="0"/>
-              </a:spcAft>
-              <a:buChar char="»"/>
-              <a:defRPr sz="2000">
-                <a:solidFill>
-                  <a:schemeClr val="tx1"/>
-                </a:solidFill>
-                <a:latin typeface="Times New Roman" panose="02020603050405020304" pitchFamily="18" charset="0"/>
-              </a:defRPr>
-            </a:lvl7pPr>
-            <a:lvl8pPr marL="3429000" indent="-228600" eaLnBrk="0" fontAlgn="base" hangingPunct="0">
-              <a:spcBef>
-                <a:spcPct val="20000"/>
-              </a:spcBef>
-              <a:spcAft>
-                <a:spcPct val="0"/>
-              </a:spcAft>
-              <a:buChar char="»"/>
-              <a:defRPr sz="2000">
-                <a:solidFill>
-                  <a:schemeClr val="tx1"/>
-                </a:solidFill>
-                <a:latin typeface="Times New Roman" panose="02020603050405020304" pitchFamily="18" charset="0"/>
-              </a:defRPr>
-            </a:lvl8pPr>
-            <a:lvl9pPr marL="3886200" indent="-228600" eaLnBrk="0" fontAlgn="base" hangingPunct="0">
-              <a:spcBef>
-                <a:spcPct val="20000"/>
-              </a:spcBef>
-              <a:spcAft>
-                <a:spcPct val="0"/>
-              </a:spcAft>
-              <a:buChar char="»"/>
-              <a:defRPr sz="2000">
-                <a:solidFill>
-                  <a:schemeClr val="tx1"/>
-                </a:solidFill>
-                <a:latin typeface="Times New Roman" panose="02020603050405020304" pitchFamily="18" charset="0"/>
-              </a:defRPr>
-            </a:lvl9pPr>
-          </a:lstStyle>
-          <a:p>
-            <a:pPr>
-              <a:spcBef>
-                <a:spcPct val="0"/>
-              </a:spcBef>
-              <a:buFontTx/>
-              <a:buNone/>
-            </a:pPr>
-            <a:r>
-              <a:rPr lang="en-US" altLang="en-US" sz="2000" b="1" i="1"/>
-              <a:t>NFET			           PFET</a:t>
-            </a:r>
-          </a:p>
-        </p:txBody>
-      </p:sp>
     </p:spTree>
   </p:cSld>
   <p:clrMapOvr>
